--- a/Commercial_Vehicles_July_2026_Sales_Revenue_Presentation.pptx
+++ b/Commercial_Vehicles_July_2026_Sales_Revenue_Presentation.pptx
@@ -14,6 +14,7 @@
     <p:sldId id="262" r:id="rId8"/>
     <p:sldId id="263" r:id="rId9"/>
     <p:sldId id="264" r:id="rId10"/>
+    <p:sldId id="265" r:id="rId11"/>
   </p:sldIdLst>
   <p:sldSz cx="12192000" cy="6858000"/>
   <p:notesSz cx="6858000" cy="9144000"/>
@@ -154,9 +155,7 @@
             <a:pPr>
               <a:defRPr sz="2128" b="1" i="0" u="none" strike="noStrike" kern="1200" spc="100" baseline="0">
                 <a:solidFill>
-                  <a:schemeClr val="lt1">
-                    <a:lumMod val="95000"/>
-                  </a:schemeClr>
+                  <a:schemeClr val="bg1"/>
                 </a:solidFill>
                 <a:effectLst>
                   <a:outerShdw blurRad="50800" dist="38100" dir="5400000" algn="t" rotWithShape="0">
@@ -171,7 +170,11 @@
               </a:defRPr>
             </a:pPr>
             <a:r>
-              <a:rPr lang="en-IN"/>
+              <a:rPr lang="en-IN">
+                <a:solidFill>
+                  <a:schemeClr val="bg1"/>
+                </a:solidFill>
+              </a:rPr>
               <a:t>Revenue by OEM</a:t>
             </a:r>
           </a:p>
@@ -192,9 +195,7 @@
           <a:pPr>
             <a:defRPr sz="2128" b="1" i="0" u="none" strike="noStrike" kern="1200" spc="100" baseline="0">
               <a:solidFill>
-                <a:schemeClr val="lt1">
-                  <a:lumMod val="95000"/>
-                </a:schemeClr>
+                <a:schemeClr val="bg1"/>
               </a:solidFill>
               <a:effectLst>
                 <a:outerShdw blurRad="50800" dist="38100" dir="5400000" algn="t" rotWithShape="0">
@@ -233,31 +234,20 @@
               </c:strCache>
             </c:strRef>
           </c:tx>
+          <c:spPr>
+            <a:ln>
+              <a:noFill/>
+            </a:ln>
+          </c:spPr>
           <c:invertIfNegative val="1"/>
           <c:dPt>
             <c:idx val="0"/>
             <c:invertIfNegative val="1"/>
             <c:bubble3D val="0"/>
             <c:spPr>
-              <a:gradFill rotWithShape="1">
-                <a:gsLst>
-                  <a:gs pos="0">
-                    <a:schemeClr val="accent1">
-                      <a:tint val="100000"/>
-                      <a:shade val="100000"/>
-                      <a:satMod val="130000"/>
-                    </a:schemeClr>
-                  </a:gs>
-                  <a:gs pos="100000">
-                    <a:schemeClr val="accent1">
-                      <a:tint val="50000"/>
-                      <a:shade val="100000"/>
-                      <a:satMod val="350000"/>
-                    </a:schemeClr>
-                  </a:gs>
-                </a:gsLst>
-                <a:lin ang="16200000" scaled="0"/>
-              </a:gradFill>
+              <a:solidFill>
+                <a:srgbClr val="00B0F0"/>
+              </a:solidFill>
               <a:ln>
                 <a:noFill/>
               </a:ln>
@@ -280,31 +270,20 @@
                 <a:bevelT w="63500" h="25400"/>
               </a:sp3d>
             </c:spPr>
+            <c:extLst>
+              <c:ext xmlns:c16="http://schemas.microsoft.com/office/drawing/2014/chart" uri="{C3380CC4-5D6E-409C-BE32-E72D297353CC}">
+                <c16:uniqueId val="{00000001-9791-4037-AC44-ACB58A52E0F8}"/>
+              </c:ext>
+            </c:extLst>
           </c:dPt>
           <c:dPt>
             <c:idx val="1"/>
             <c:invertIfNegative val="1"/>
             <c:bubble3D val="0"/>
             <c:spPr>
-              <a:gradFill rotWithShape="1">
-                <a:gsLst>
-                  <a:gs pos="0">
-                    <a:schemeClr val="accent2">
-                      <a:tint val="100000"/>
-                      <a:shade val="100000"/>
-                      <a:satMod val="130000"/>
-                    </a:schemeClr>
-                  </a:gs>
-                  <a:gs pos="100000">
-                    <a:schemeClr val="accent2">
-                      <a:tint val="50000"/>
-                      <a:shade val="100000"/>
-                      <a:satMod val="350000"/>
-                    </a:schemeClr>
-                  </a:gs>
-                </a:gsLst>
-                <a:lin ang="16200000" scaled="0"/>
-              </a:gradFill>
+              <a:solidFill>
+                <a:srgbClr val="FF0000"/>
+              </a:solidFill>
               <a:ln>
                 <a:noFill/>
               </a:ln>
@@ -327,31 +306,20 @@
                 <a:bevelT w="63500" h="25400"/>
               </a:sp3d>
             </c:spPr>
+            <c:extLst>
+              <c:ext xmlns:c16="http://schemas.microsoft.com/office/drawing/2014/chart" uri="{C3380CC4-5D6E-409C-BE32-E72D297353CC}">
+                <c16:uniqueId val="{00000003-9791-4037-AC44-ACB58A52E0F8}"/>
+              </c:ext>
+            </c:extLst>
           </c:dPt>
           <c:dPt>
             <c:idx val="2"/>
             <c:invertIfNegative val="1"/>
             <c:bubble3D val="0"/>
             <c:spPr>
-              <a:gradFill rotWithShape="1">
-                <a:gsLst>
-                  <a:gs pos="0">
-                    <a:schemeClr val="accent3">
-                      <a:tint val="100000"/>
-                      <a:shade val="100000"/>
-                      <a:satMod val="130000"/>
-                    </a:schemeClr>
-                  </a:gs>
-                  <a:gs pos="100000">
-                    <a:schemeClr val="accent3">
-                      <a:tint val="50000"/>
-                      <a:shade val="100000"/>
-                      <a:satMod val="350000"/>
-                    </a:schemeClr>
-                  </a:gs>
-                </a:gsLst>
-                <a:lin ang="16200000" scaled="0"/>
-              </a:gradFill>
+              <a:solidFill>
+                <a:srgbClr val="92D050"/>
+              </a:solidFill>
               <a:ln>
                 <a:noFill/>
               </a:ln>
@@ -374,31 +342,20 @@
                 <a:bevelT w="63500" h="25400"/>
               </a:sp3d>
             </c:spPr>
+            <c:extLst>
+              <c:ext xmlns:c16="http://schemas.microsoft.com/office/drawing/2014/chart" uri="{C3380CC4-5D6E-409C-BE32-E72D297353CC}">
+                <c16:uniqueId val="{00000005-9791-4037-AC44-ACB58A52E0F8}"/>
+              </c:ext>
+            </c:extLst>
           </c:dPt>
           <c:dPt>
             <c:idx val="3"/>
             <c:invertIfNegative val="1"/>
             <c:bubble3D val="0"/>
             <c:spPr>
-              <a:gradFill rotWithShape="1">
-                <a:gsLst>
-                  <a:gs pos="0">
-                    <a:schemeClr val="accent4">
-                      <a:tint val="100000"/>
-                      <a:shade val="100000"/>
-                      <a:satMod val="130000"/>
-                    </a:schemeClr>
-                  </a:gs>
-                  <a:gs pos="100000">
-                    <a:schemeClr val="accent4">
-                      <a:tint val="50000"/>
-                      <a:shade val="100000"/>
-                      <a:satMod val="350000"/>
-                    </a:schemeClr>
-                  </a:gs>
-                </a:gsLst>
-                <a:lin ang="16200000" scaled="0"/>
-              </a:gradFill>
+              <a:solidFill>
+                <a:srgbClr val="7030A0"/>
+              </a:solidFill>
               <a:ln>
                 <a:noFill/>
               </a:ln>
@@ -421,6 +378,11 @@
                 <a:bevelT w="63500" h="25400"/>
               </a:sp3d>
             </c:spPr>
+            <c:extLst>
+              <c:ext xmlns:c16="http://schemas.microsoft.com/office/drawing/2014/chart" uri="{C3380CC4-5D6E-409C-BE32-E72D297353CC}">
+                <c16:uniqueId val="{00000007-9791-4037-AC44-ACB58A52E0F8}"/>
+              </c:ext>
+            </c:extLst>
           </c:dPt>
           <c:cat>
             <c:strRef>
@@ -477,8 +439,7 @@
           <c:showPercent val="0"/>
           <c:showBubbleSize val="0"/>
         </c:dLbls>
-        <c:gapWidth val="100"/>
-        <c:overlap val="-24"/>
+        <c:gapWidth val="150"/>
         <c:axId val="-2068027336"/>
         <c:axId val="-2113994440"/>
       </c:barChart>
@@ -489,6 +450,59 @@
         </c:scaling>
         <c:delete val="0"/>
         <c:axPos val="b"/>
+        <c:title>
+          <c:tx>
+            <c:rich>
+              <a:bodyPr rot="0" spcFirstLastPara="1" vertOverflow="ellipsis" vert="horz" wrap="square" anchor="ctr" anchorCtr="1"/>
+              <a:lstStyle/>
+              <a:p>
+                <a:pPr>
+                  <a:defRPr sz="1400" b="1" i="0" u="none" strike="noStrike" kern="1200" cap="all" baseline="0">
+                    <a:solidFill>
+                      <a:schemeClr val="bg1"/>
+                    </a:solidFill>
+                    <a:latin typeface="Gadugi" panose="020B0502040204020203" pitchFamily="34" charset="0"/>
+                    <a:ea typeface="Gadugi" panose="020B0502040204020203" pitchFamily="34" charset="0"/>
+                    <a:cs typeface="+mn-cs"/>
+                  </a:defRPr>
+                </a:pPr>
+                <a:r>
+                  <a:rPr lang="en-IN" sz="1400" dirty="0">
+                    <a:solidFill>
+                      <a:schemeClr val="bg1"/>
+                    </a:solidFill>
+                  </a:rPr>
+                  <a:t>OEM</a:t>
+                </a:r>
+              </a:p>
+            </c:rich>
+          </c:tx>
+          <c:overlay val="0"/>
+          <c:spPr>
+            <a:noFill/>
+            <a:ln>
+              <a:noFill/>
+            </a:ln>
+            <a:effectLst/>
+          </c:spPr>
+          <c:txPr>
+            <a:bodyPr rot="0" spcFirstLastPara="1" vertOverflow="ellipsis" vert="horz" wrap="square" anchor="ctr" anchorCtr="1"/>
+            <a:lstStyle/>
+            <a:p>
+              <a:pPr>
+                <a:defRPr sz="1400" b="1" i="0" u="none" strike="noStrike" kern="1200" cap="all" baseline="0">
+                  <a:solidFill>
+                    <a:schemeClr val="bg1"/>
+                  </a:solidFill>
+                  <a:latin typeface="Gadugi" panose="020B0502040204020203" pitchFamily="34" charset="0"/>
+                  <a:ea typeface="Gadugi" panose="020B0502040204020203" pitchFamily="34" charset="0"/>
+                  <a:cs typeface="+mn-cs"/>
+                </a:defRPr>
+              </a:pPr>
+              <a:endParaRPr lang="en-US"/>
+            </a:p>
+          </c:txPr>
+        </c:title>
         <c:numFmt formatCode="General" sourceLinked="0"/>
         <c:majorTickMark val="none"/>
         <c:minorTickMark val="none"/>
@@ -496,12 +510,7 @@
         <c:spPr>
           <a:noFill/>
           <a:ln w="12700" cap="flat" cmpd="sng" algn="ctr">
-            <a:solidFill>
-              <a:schemeClr val="lt1">
-                <a:lumMod val="95000"/>
-                <a:alpha val="54000"/>
-              </a:schemeClr>
-            </a:solidFill>
+            <a:noFill/>
             <a:round/>
           </a:ln>
           <a:effectLst/>
@@ -513,9 +522,7 @@
             <a:pPr>
               <a:defRPr sz="1197" b="1" i="0" u="none" strike="noStrike" kern="1200" baseline="0">
                 <a:solidFill>
-                  <a:schemeClr val="lt1">
-                    <a:lumMod val="85000"/>
-                  </a:schemeClr>
+                  <a:schemeClr val="bg1"/>
                 </a:solidFill>
                 <a:latin typeface="Gadugi" panose="020B0502040204020203" pitchFamily="34" charset="0"/>
                 <a:ea typeface="Gadugi" panose="020B0502040204020203" pitchFamily="34" charset="0"/>
@@ -543,18 +550,76 @@
           <c:spPr>
             <a:ln w="9525" cap="flat" cmpd="sng" algn="ctr">
               <a:solidFill>
-                <a:schemeClr val="lt1">
-                  <a:lumMod val="95000"/>
-                  <a:alpha val="10000"/>
-                </a:schemeClr>
+                <a:schemeClr val="bg1"/>
               </a:solidFill>
               <a:round/>
             </a:ln>
             <a:effectLst/>
           </c:spPr>
         </c:majorGridlines>
+        <c:title>
+          <c:tx>
+            <c:rich>
+              <a:bodyPr rot="-5400000" spcFirstLastPara="1" vertOverflow="ellipsis" vert="horz" wrap="square" anchor="ctr" anchorCtr="1"/>
+              <a:lstStyle/>
+              <a:p>
+                <a:pPr>
+                  <a:defRPr sz="1400" b="1" i="0" u="none" strike="noStrike" kern="1200" cap="all" baseline="0">
+                    <a:solidFill>
+                      <a:schemeClr val="bg1"/>
+                    </a:solidFill>
+                    <a:latin typeface="Gadugi" panose="020B0502040204020203" pitchFamily="34" charset="0"/>
+                    <a:ea typeface="Gadugi" panose="020B0502040204020203" pitchFamily="34" charset="0"/>
+                    <a:cs typeface="+mn-cs"/>
+                  </a:defRPr>
+                </a:pPr>
+                <a:r>
+                  <a:rPr lang="en-IN" sz="1400" dirty="0">
+                    <a:solidFill>
+                      <a:schemeClr val="bg1"/>
+                    </a:solidFill>
+                  </a:rPr>
+                  <a:t>REVENUE (in ₹ Cr.)</a:t>
+                </a:r>
+              </a:p>
+            </c:rich>
+          </c:tx>
+          <c:layout>
+            <c:manualLayout>
+              <c:xMode val="edge"/>
+              <c:yMode val="edge"/>
+              <c:x val="7.9294875374620721E-3"/>
+              <c:y val="0.18091218264999684"/>
+            </c:manualLayout>
+          </c:layout>
+          <c:overlay val="0"/>
+          <c:spPr>
+            <a:noFill/>
+            <a:ln>
+              <a:noFill/>
+            </a:ln>
+            <a:effectLst/>
+          </c:spPr>
+          <c:txPr>
+            <a:bodyPr rot="-5400000" spcFirstLastPara="1" vertOverflow="ellipsis" vert="horz" wrap="square" anchor="ctr" anchorCtr="1"/>
+            <a:lstStyle/>
+            <a:p>
+              <a:pPr>
+                <a:defRPr sz="1400" b="1" i="0" u="none" strike="noStrike" kern="1200" cap="all" baseline="0">
+                  <a:solidFill>
+                    <a:schemeClr val="bg1"/>
+                  </a:solidFill>
+                  <a:latin typeface="Gadugi" panose="020B0502040204020203" pitchFamily="34" charset="0"/>
+                  <a:ea typeface="Gadugi" panose="020B0502040204020203" pitchFamily="34" charset="0"/>
+                  <a:cs typeface="+mn-cs"/>
+                </a:defRPr>
+              </a:pPr>
+              <a:endParaRPr lang="en-US"/>
+            </a:p>
+          </c:txPr>
+        </c:title>
         <c:numFmt formatCode="0" sourceLinked="0"/>
-        <c:majorTickMark val="none"/>
+        <c:majorTickMark val="out"/>
         <c:minorTickMark val="none"/>
         <c:tickLblPos val="nextTo"/>
         <c:spPr>
@@ -571,9 +636,7 @@
             <a:pPr>
               <a:defRPr sz="1197" b="1" i="0" u="none" strike="noStrike" kern="1200" baseline="0">
                 <a:solidFill>
-                  <a:schemeClr val="lt1">
-                    <a:lumMod val="85000"/>
-                  </a:schemeClr>
+                  <a:schemeClr val="bg1"/>
                 </a:solidFill>
                 <a:latin typeface="Gadugi" panose="020B0502040204020203" pitchFamily="34" charset="0"/>
                 <a:ea typeface="Gadugi" panose="020B0502040204020203" pitchFamily="34" charset="0"/>
@@ -595,31 +658,42 @@
         <a:effectLst/>
       </c:spPr>
     </c:plotArea>
+    <c:legend>
+      <c:legendPos val="r"/>
+      <c:overlay val="0"/>
+      <c:spPr>
+        <a:noFill/>
+        <a:ln>
+          <a:noFill/>
+        </a:ln>
+        <a:effectLst/>
+      </c:spPr>
+      <c:txPr>
+        <a:bodyPr rot="0" spcFirstLastPara="1" vertOverflow="ellipsis" vert="horz" wrap="square" anchor="ctr" anchorCtr="1"/>
+        <a:lstStyle/>
+        <a:p>
+          <a:pPr>
+            <a:defRPr sz="1197" b="1" i="0" u="none" strike="noStrike" kern="1200" baseline="0">
+              <a:solidFill>
+                <a:schemeClr val="bg1"/>
+              </a:solidFill>
+              <a:latin typeface="Gadugi" panose="020B0502040204020203" pitchFamily="34" charset="0"/>
+              <a:ea typeface="Gadugi" panose="020B0502040204020203" pitchFamily="34" charset="0"/>
+              <a:cs typeface="+mn-cs"/>
+            </a:defRPr>
+          </a:pPr>
+          <a:endParaRPr lang="en-US"/>
+        </a:p>
+      </c:txPr>
+    </c:legend>
     <c:plotVisOnly val="1"/>
     <c:dispBlanksAs val="gap"/>
     <c:showDLblsOverMax val="1"/>
   </c:chart>
   <c:spPr>
-    <a:gradFill flip="none" rotWithShape="1">
-      <a:gsLst>
-        <a:gs pos="0">
-          <a:schemeClr val="dk1">
-            <a:lumMod val="65000"/>
-            <a:lumOff val="35000"/>
-          </a:schemeClr>
-        </a:gs>
-        <a:gs pos="100000">
-          <a:schemeClr val="dk1">
-            <a:lumMod val="85000"/>
-            <a:lumOff val="15000"/>
-          </a:schemeClr>
-        </a:gs>
-      </a:gsLst>
-      <a:path path="circle">
-        <a:fillToRect l="50000" t="50000" r="50000" b="50000"/>
-      </a:path>
-      <a:tileRect/>
-    </a:gradFill>
+    <a:solidFill>
+      <a:schemeClr val="tx1"/>
+    </a:solidFill>
     <a:ln>
       <a:noFill/>
     </a:ln>
@@ -667,25 +741,22 @@
             <a:pPr>
               <a:defRPr sz="2128" b="1" i="0" u="none" strike="noStrike" kern="1200" spc="100" baseline="0">
                 <a:solidFill>
-                  <a:schemeClr val="lt1">
-                    <a:lumMod val="95000"/>
-                  </a:schemeClr>
+                  <a:schemeClr val="bg1"/>
                 </a:solidFill>
-                <a:effectLst>
-                  <a:outerShdw blurRad="50800" dist="38100" dir="5400000" algn="t" rotWithShape="0">
-                    <a:prstClr val="black">
-                      <a:alpha val="40000"/>
-                    </a:prstClr>
-                  </a:outerShdw>
-                </a:effectLst>
+                <a:effectLst/>
                 <a:latin typeface="Gadugi" panose="020B0502040204020203" pitchFamily="34" charset="0"/>
                 <a:ea typeface="Gadugi" panose="020B0502040204020203" pitchFamily="34" charset="0"/>
                 <a:cs typeface="+mn-cs"/>
               </a:defRPr>
             </a:pPr>
             <a:r>
-              <a:rPr lang="en-IN"/>
-              <a:t>YoY Revenue Growth</a:t>
+              <a:rPr lang="en-IN">
+                <a:solidFill>
+                  <a:schemeClr val="bg1"/>
+                </a:solidFill>
+                <a:effectLst/>
+              </a:rPr>
+              <a:t>Actual vs Target Revenue</a:t>
             </a:r>
           </a:p>
         </c:rich>
@@ -698,545 +769,6 @@
         </a:ln>
         <a:effectLst/>
       </c:spPr>
-      <c:txPr>
-        <a:bodyPr rot="0" spcFirstLastPara="1" vertOverflow="ellipsis" vert="horz" wrap="square" anchor="ctr" anchorCtr="1"/>
-        <a:lstStyle/>
-        <a:p>
-          <a:pPr>
-            <a:defRPr sz="2128" b="1" i="0" u="none" strike="noStrike" kern="1200" spc="100" baseline="0">
-              <a:solidFill>
-                <a:schemeClr val="lt1">
-                  <a:lumMod val="95000"/>
-                </a:schemeClr>
-              </a:solidFill>
-              <a:effectLst>
-                <a:outerShdw blurRad="50800" dist="38100" dir="5400000" algn="t" rotWithShape="0">
-                  <a:prstClr val="black">
-                    <a:alpha val="40000"/>
-                  </a:prstClr>
-                </a:outerShdw>
-              </a:effectLst>
-              <a:latin typeface="Gadugi" panose="020B0502040204020203" pitchFamily="34" charset="0"/>
-              <a:ea typeface="Gadugi" panose="020B0502040204020203" pitchFamily="34" charset="0"/>
-              <a:cs typeface="+mn-cs"/>
-            </a:defRPr>
-          </a:pPr>
-          <a:endParaRPr lang="en-US"/>
-        </a:p>
-      </c:txPr>
-    </c:title>
-    <c:autoTitleDeleted val="0"/>
-    <c:plotArea>
-      <c:layout/>
-      <c:barChart>
-        <c:barDir val="col"/>
-        <c:grouping val="clustered"/>
-        <c:varyColors val="1"/>
-        <c:ser>
-          <c:idx val="0"/>
-          <c:order val="0"/>
-          <c:tx>
-            <c:strRef>
-              <c:f>Sheet1!$B$1</c:f>
-              <c:strCache>
-                <c:ptCount val="1"/>
-                <c:pt idx="0">
-                  <c:v>YoY Growth (%)</c:v>
-                </c:pt>
-              </c:strCache>
-            </c:strRef>
-          </c:tx>
-          <c:invertIfNegative val="1"/>
-          <c:dPt>
-            <c:idx val="0"/>
-            <c:invertIfNegative val="1"/>
-            <c:bubble3D val="0"/>
-            <c:spPr>
-              <a:gradFill rotWithShape="1">
-                <a:gsLst>
-                  <a:gs pos="0">
-                    <a:schemeClr val="accent1">
-                      <a:tint val="100000"/>
-                      <a:shade val="100000"/>
-                      <a:satMod val="130000"/>
-                    </a:schemeClr>
-                  </a:gs>
-                  <a:gs pos="100000">
-                    <a:schemeClr val="accent1">
-                      <a:tint val="50000"/>
-                      <a:shade val="100000"/>
-                      <a:satMod val="350000"/>
-                    </a:schemeClr>
-                  </a:gs>
-                </a:gsLst>
-                <a:lin ang="16200000" scaled="0"/>
-              </a:gradFill>
-              <a:ln>
-                <a:noFill/>
-              </a:ln>
-              <a:effectLst>
-                <a:outerShdw blurRad="40000" dist="23000" dir="5400000" rotWithShape="0">
-                  <a:srgbClr val="000000">
-                    <a:alpha val="35000"/>
-                  </a:srgbClr>
-                </a:outerShdw>
-              </a:effectLst>
-              <a:scene3d>
-                <a:camera prst="orthographicFront">
-                  <a:rot lat="0" lon="0" rev="0"/>
-                </a:camera>
-                <a:lightRig rig="threePt" dir="t">
-                  <a:rot lat="0" lon="0" rev="1200000"/>
-                </a:lightRig>
-              </a:scene3d>
-              <a:sp3d>
-                <a:bevelT w="63500" h="25400"/>
-              </a:sp3d>
-            </c:spPr>
-          </c:dPt>
-          <c:dPt>
-            <c:idx val="1"/>
-            <c:invertIfNegative val="1"/>
-            <c:bubble3D val="0"/>
-            <c:spPr>
-              <a:gradFill rotWithShape="1">
-                <a:gsLst>
-                  <a:gs pos="0">
-                    <a:schemeClr val="accent2">
-                      <a:tint val="100000"/>
-                      <a:shade val="100000"/>
-                      <a:satMod val="130000"/>
-                    </a:schemeClr>
-                  </a:gs>
-                  <a:gs pos="100000">
-                    <a:schemeClr val="accent2">
-                      <a:tint val="50000"/>
-                      <a:shade val="100000"/>
-                      <a:satMod val="350000"/>
-                    </a:schemeClr>
-                  </a:gs>
-                </a:gsLst>
-                <a:lin ang="16200000" scaled="0"/>
-              </a:gradFill>
-              <a:ln>
-                <a:noFill/>
-              </a:ln>
-              <a:effectLst>
-                <a:outerShdw blurRad="40000" dist="23000" dir="5400000" rotWithShape="0">
-                  <a:srgbClr val="000000">
-                    <a:alpha val="35000"/>
-                  </a:srgbClr>
-                </a:outerShdw>
-              </a:effectLst>
-              <a:scene3d>
-                <a:camera prst="orthographicFront">
-                  <a:rot lat="0" lon="0" rev="0"/>
-                </a:camera>
-                <a:lightRig rig="threePt" dir="t">
-                  <a:rot lat="0" lon="0" rev="1200000"/>
-                </a:lightRig>
-              </a:scene3d>
-              <a:sp3d>
-                <a:bevelT w="63500" h="25400"/>
-              </a:sp3d>
-            </c:spPr>
-          </c:dPt>
-          <c:dPt>
-            <c:idx val="2"/>
-            <c:invertIfNegative val="1"/>
-            <c:bubble3D val="0"/>
-            <c:spPr>
-              <a:gradFill rotWithShape="1">
-                <a:gsLst>
-                  <a:gs pos="0">
-                    <a:schemeClr val="accent3">
-                      <a:tint val="100000"/>
-                      <a:shade val="100000"/>
-                      <a:satMod val="130000"/>
-                    </a:schemeClr>
-                  </a:gs>
-                  <a:gs pos="100000">
-                    <a:schemeClr val="accent3">
-                      <a:tint val="50000"/>
-                      <a:shade val="100000"/>
-                      <a:satMod val="350000"/>
-                    </a:schemeClr>
-                  </a:gs>
-                </a:gsLst>
-                <a:lin ang="16200000" scaled="0"/>
-              </a:gradFill>
-              <a:ln>
-                <a:noFill/>
-              </a:ln>
-              <a:effectLst>
-                <a:outerShdw blurRad="40000" dist="23000" dir="5400000" rotWithShape="0">
-                  <a:srgbClr val="000000">
-                    <a:alpha val="35000"/>
-                  </a:srgbClr>
-                </a:outerShdw>
-              </a:effectLst>
-              <a:scene3d>
-                <a:camera prst="orthographicFront">
-                  <a:rot lat="0" lon="0" rev="0"/>
-                </a:camera>
-                <a:lightRig rig="threePt" dir="t">
-                  <a:rot lat="0" lon="0" rev="1200000"/>
-                </a:lightRig>
-              </a:scene3d>
-              <a:sp3d>
-                <a:bevelT w="63500" h="25400"/>
-              </a:sp3d>
-            </c:spPr>
-          </c:dPt>
-          <c:dPt>
-            <c:idx val="3"/>
-            <c:invertIfNegative val="1"/>
-            <c:bubble3D val="0"/>
-            <c:spPr>
-              <a:gradFill rotWithShape="1">
-                <a:gsLst>
-                  <a:gs pos="0">
-                    <a:schemeClr val="accent4">
-                      <a:tint val="100000"/>
-                      <a:shade val="100000"/>
-                      <a:satMod val="130000"/>
-                    </a:schemeClr>
-                  </a:gs>
-                  <a:gs pos="100000">
-                    <a:schemeClr val="accent4">
-                      <a:tint val="50000"/>
-                      <a:shade val="100000"/>
-                      <a:satMod val="350000"/>
-                    </a:schemeClr>
-                  </a:gs>
-                </a:gsLst>
-                <a:lin ang="16200000" scaled="0"/>
-              </a:gradFill>
-              <a:ln>
-                <a:noFill/>
-              </a:ln>
-              <a:effectLst>
-                <a:outerShdw blurRad="40000" dist="23000" dir="5400000" rotWithShape="0">
-                  <a:srgbClr val="000000">
-                    <a:alpha val="35000"/>
-                  </a:srgbClr>
-                </a:outerShdw>
-              </a:effectLst>
-              <a:scene3d>
-                <a:camera prst="orthographicFront">
-                  <a:rot lat="0" lon="0" rev="0"/>
-                </a:camera>
-                <a:lightRig rig="threePt" dir="t">
-                  <a:rot lat="0" lon="0" rev="1200000"/>
-                </a:lightRig>
-              </a:scene3d>
-              <a:sp3d>
-                <a:bevelT w="63500" h="25400"/>
-              </a:sp3d>
-            </c:spPr>
-          </c:dPt>
-          <c:cat>
-            <c:strRef>
-              <c:f>Sheet1!$A$2:$A$5</c:f>
-              <c:strCache>
-                <c:ptCount val="4"/>
-                <c:pt idx="0">
-                  <c:v>Tata Motors</c:v>
-                </c:pt>
-                <c:pt idx="1">
-                  <c:v>Ashok Leyland</c:v>
-                </c:pt>
-                <c:pt idx="2">
-                  <c:v>Eicher</c:v>
-                </c:pt>
-                <c:pt idx="3">
-                  <c:v>BharatBenz</c:v>
-                </c:pt>
-              </c:strCache>
-            </c:strRef>
-          </c:cat>
-          <c:val>
-            <c:numRef>
-              <c:f>Sheet1!$B$2:$B$5</c:f>
-              <c:numCache>
-                <c:formatCode>General</c:formatCode>
-                <c:ptCount val="4"/>
-                <c:pt idx="0">
-                  <c:v>36.9</c:v>
-                </c:pt>
-                <c:pt idx="1">
-                  <c:v>30</c:v>
-                </c:pt>
-                <c:pt idx="2">
-                  <c:v>15.8</c:v>
-                </c:pt>
-                <c:pt idx="3">
-                  <c:v>14.2</c:v>
-                </c:pt>
-              </c:numCache>
-            </c:numRef>
-          </c:val>
-          <c:extLst>
-            <c:ext xmlns:c16="http://schemas.microsoft.com/office/drawing/2014/chart" uri="{C3380CC4-5D6E-409C-BE32-E72D297353CC}">
-              <c16:uniqueId val="{00000000-A1B1-4137-A83F-F299032B0B11}"/>
-            </c:ext>
-          </c:extLst>
-        </c:ser>
-        <c:dLbls>
-          <c:showLegendKey val="0"/>
-          <c:showVal val="0"/>
-          <c:showCatName val="0"/>
-          <c:showSerName val="0"/>
-          <c:showPercent val="0"/>
-          <c:showBubbleSize val="0"/>
-        </c:dLbls>
-        <c:gapWidth val="100"/>
-        <c:overlap val="-24"/>
-        <c:axId val="-2068027336"/>
-        <c:axId val="-2113994440"/>
-      </c:barChart>
-      <c:catAx>
-        <c:axId val="-2068027336"/>
-        <c:scaling>
-          <c:orientation val="minMax"/>
-        </c:scaling>
-        <c:delete val="0"/>
-        <c:axPos val="b"/>
-        <c:numFmt formatCode="General" sourceLinked="0"/>
-        <c:majorTickMark val="none"/>
-        <c:minorTickMark val="none"/>
-        <c:tickLblPos val="nextTo"/>
-        <c:spPr>
-          <a:noFill/>
-          <a:ln w="12700" cap="flat" cmpd="sng" algn="ctr">
-            <a:solidFill>
-              <a:schemeClr val="lt1">
-                <a:lumMod val="95000"/>
-                <a:alpha val="54000"/>
-              </a:schemeClr>
-            </a:solidFill>
-            <a:round/>
-          </a:ln>
-          <a:effectLst/>
-        </c:spPr>
-        <c:txPr>
-          <a:bodyPr rot="-60000000" spcFirstLastPara="1" vertOverflow="ellipsis" vert="horz" wrap="square" anchor="ctr" anchorCtr="1"/>
-          <a:lstStyle/>
-          <a:p>
-            <a:pPr>
-              <a:defRPr sz="1197" b="1" i="0" u="none" strike="noStrike" kern="1200" baseline="0">
-                <a:solidFill>
-                  <a:schemeClr val="lt1">
-                    <a:lumMod val="85000"/>
-                  </a:schemeClr>
-                </a:solidFill>
-                <a:latin typeface="Gadugi" panose="020B0502040204020203" pitchFamily="34" charset="0"/>
-                <a:ea typeface="Gadugi" panose="020B0502040204020203" pitchFamily="34" charset="0"/>
-                <a:cs typeface="+mn-cs"/>
-              </a:defRPr>
-            </a:pPr>
-            <a:endParaRPr lang="en-US"/>
-          </a:p>
-        </c:txPr>
-        <c:crossAx val="-2113994440"/>
-        <c:crossesAt val="0"/>
-        <c:auto val="1"/>
-        <c:lblAlgn val="ctr"/>
-        <c:lblOffset val="100"/>
-        <c:noMultiLvlLbl val="0"/>
-      </c:catAx>
-      <c:valAx>
-        <c:axId val="-2113994440"/>
-        <c:scaling>
-          <c:orientation val="minMax"/>
-        </c:scaling>
-        <c:delete val="0"/>
-        <c:axPos val="l"/>
-        <c:majorGridlines>
-          <c:spPr>
-            <a:ln w="9525" cap="flat" cmpd="sng" algn="ctr">
-              <a:solidFill>
-                <a:schemeClr val="lt1">
-                  <a:lumMod val="95000"/>
-                  <a:alpha val="10000"/>
-                </a:schemeClr>
-              </a:solidFill>
-              <a:round/>
-            </a:ln>
-            <a:effectLst/>
-          </c:spPr>
-        </c:majorGridlines>
-        <c:numFmt formatCode="0.0" sourceLinked="0"/>
-        <c:majorTickMark val="none"/>
-        <c:minorTickMark val="none"/>
-        <c:tickLblPos val="nextTo"/>
-        <c:spPr>
-          <a:noFill/>
-          <a:ln>
-            <a:noFill/>
-          </a:ln>
-          <a:effectLst/>
-        </c:spPr>
-        <c:txPr>
-          <a:bodyPr rot="-60000000" spcFirstLastPara="1" vertOverflow="ellipsis" vert="horz" wrap="square" anchor="ctr" anchorCtr="1"/>
-          <a:lstStyle/>
-          <a:p>
-            <a:pPr>
-              <a:defRPr sz="1197" b="1" i="0" u="none" strike="noStrike" kern="1200" baseline="0">
-                <a:solidFill>
-                  <a:schemeClr val="lt1">
-                    <a:lumMod val="85000"/>
-                  </a:schemeClr>
-                </a:solidFill>
-                <a:latin typeface="Gadugi" panose="020B0502040204020203" pitchFamily="34" charset="0"/>
-                <a:ea typeface="Gadugi" panose="020B0502040204020203" pitchFamily="34" charset="0"/>
-                <a:cs typeface="+mn-cs"/>
-              </a:defRPr>
-            </a:pPr>
-            <a:endParaRPr lang="en-US"/>
-          </a:p>
-        </c:txPr>
-        <c:crossAx val="-2068027336"/>
-        <c:crosses val="autoZero"/>
-        <c:crossBetween val="between"/>
-      </c:valAx>
-      <c:spPr>
-        <a:noFill/>
-        <a:ln>
-          <a:noFill/>
-        </a:ln>
-        <a:effectLst/>
-      </c:spPr>
-    </c:plotArea>
-    <c:plotVisOnly val="1"/>
-    <c:dispBlanksAs val="gap"/>
-    <c:showDLblsOverMax val="1"/>
-  </c:chart>
-  <c:spPr>
-    <a:gradFill flip="none" rotWithShape="1">
-      <a:gsLst>
-        <a:gs pos="0">
-          <a:schemeClr val="dk1">
-            <a:lumMod val="65000"/>
-            <a:lumOff val="35000"/>
-          </a:schemeClr>
-        </a:gs>
-        <a:gs pos="100000">
-          <a:schemeClr val="dk1">
-            <a:lumMod val="85000"/>
-            <a:lumOff val="15000"/>
-          </a:schemeClr>
-        </a:gs>
-      </a:gsLst>
-      <a:path path="circle">
-        <a:fillToRect l="50000" t="50000" r="50000" b="50000"/>
-      </a:path>
-      <a:tileRect/>
-    </a:gradFill>
-    <a:ln>
-      <a:noFill/>
-    </a:ln>
-    <a:effectLst/>
-  </c:spPr>
-  <c:txPr>
-    <a:bodyPr/>
-    <a:lstStyle/>
-    <a:p>
-      <a:pPr>
-        <a:defRPr b="1">
-          <a:latin typeface="Gadugi" panose="020B0502040204020203" pitchFamily="34" charset="0"/>
-          <a:ea typeface="Gadugi" panose="020B0502040204020203" pitchFamily="34" charset="0"/>
-        </a:defRPr>
-      </a:pPr>
-      <a:endParaRPr lang="en-US"/>
-    </a:p>
-  </c:txPr>
-  <c:externalData r:id="rId3">
-    <c:autoUpdate val="0"/>
-  </c:externalData>
-</c:chartSpace>
-</file>
-
-<file path=ppt/charts/chart3.xml><?xml version="1.0" encoding="utf-8"?>
-<c:chartSpace xmlns:c="http://schemas.openxmlformats.org/drawingml/2006/chart" xmlns:a="http://schemas.openxmlformats.org/drawingml/2006/main" xmlns:r="http://schemas.openxmlformats.org/officeDocument/2006/relationships" xmlns:c16r2="http://schemas.microsoft.com/office/drawing/2015/06/chart">
-  <c:date1904 val="0"/>
-  <c:lang val="en-US"/>
-  <c:roundedCorners val="1"/>
-  <mc:AlternateContent xmlns:mc="http://schemas.openxmlformats.org/markup-compatibility/2006">
-    <mc:Choice xmlns:c14="http://schemas.microsoft.com/office/drawing/2007/8/2/chart" Requires="c14">
-      <c14:style val="102"/>
-    </mc:Choice>
-    <mc:Fallback>
-      <c:style val="2"/>
-    </mc:Fallback>
-  </mc:AlternateContent>
-  <c:chart>
-    <c:title>
-      <c:tx>
-        <c:rich>
-          <a:bodyPr rot="0" spcFirstLastPara="1" vertOverflow="ellipsis" vert="horz" wrap="square" anchor="ctr" anchorCtr="1"/>
-          <a:lstStyle/>
-          <a:p>
-            <a:pPr>
-              <a:defRPr sz="2128" b="1" i="0" u="none" strike="noStrike" kern="1200" spc="100" baseline="0">
-                <a:solidFill>
-                  <a:schemeClr val="lt1">
-                    <a:lumMod val="95000"/>
-                  </a:schemeClr>
-                </a:solidFill>
-                <a:effectLst>
-                  <a:outerShdw blurRad="50800" dist="38100" dir="5400000" algn="t" rotWithShape="0">
-                    <a:prstClr val="black">
-                      <a:alpha val="40000"/>
-                    </a:prstClr>
-                  </a:outerShdw>
-                </a:effectLst>
-                <a:latin typeface="Gadugi" panose="020B0502040204020203" pitchFamily="34" charset="0"/>
-                <a:ea typeface="Gadugi" panose="020B0502040204020203" pitchFamily="34" charset="0"/>
-                <a:cs typeface="+mn-cs"/>
-              </a:defRPr>
-            </a:pPr>
-            <a:r>
-              <a:rPr lang="en-IN"/>
-              <a:t>Actual vs Target Revenue</a:t>
-            </a:r>
-          </a:p>
-        </c:rich>
-      </c:tx>
-      <c:overlay val="0"/>
-      <c:spPr>
-        <a:noFill/>
-        <a:ln>
-          <a:noFill/>
-        </a:ln>
-        <a:effectLst/>
-      </c:spPr>
-      <c:txPr>
-        <a:bodyPr rot="0" spcFirstLastPara="1" vertOverflow="ellipsis" vert="horz" wrap="square" anchor="ctr" anchorCtr="1"/>
-        <a:lstStyle/>
-        <a:p>
-          <a:pPr>
-            <a:defRPr sz="2128" b="1" i="0" u="none" strike="noStrike" kern="1200" spc="100" baseline="0">
-              <a:solidFill>
-                <a:schemeClr val="lt1">
-                  <a:lumMod val="95000"/>
-                </a:schemeClr>
-              </a:solidFill>
-              <a:effectLst>
-                <a:outerShdw blurRad="50800" dist="38100" dir="5400000" algn="t" rotWithShape="0">
-                  <a:prstClr val="black">
-                    <a:alpha val="40000"/>
-                  </a:prstClr>
-                </a:outerShdw>
-              </a:effectLst>
-              <a:latin typeface="Gadugi" panose="020B0502040204020203" pitchFamily="34" charset="0"/>
-              <a:ea typeface="Gadugi" panose="020B0502040204020203" pitchFamily="34" charset="0"/>
-              <a:cs typeface="+mn-cs"/>
-            </a:defRPr>
-          </a:pPr>
-          <a:endParaRPr lang="en-US"/>
-        </a:p>
-      </c:txPr>
     </c:title>
     <c:autoTitleDeleted val="0"/>
     <c:plotArea>
@@ -1260,25 +792,9 @@
             </c:strRef>
           </c:tx>
           <c:spPr>
-            <a:gradFill rotWithShape="1">
-              <a:gsLst>
-                <a:gs pos="0">
-                  <a:schemeClr val="accent1">
-                    <a:tint val="100000"/>
-                    <a:shade val="100000"/>
-                    <a:satMod val="130000"/>
-                  </a:schemeClr>
-                </a:gs>
-                <a:gs pos="100000">
-                  <a:schemeClr val="accent1">
-                    <a:tint val="50000"/>
-                    <a:shade val="100000"/>
-                    <a:satMod val="350000"/>
-                  </a:schemeClr>
-                </a:gs>
-              </a:gsLst>
-              <a:lin ang="16200000" scaled="0"/>
-            </a:gradFill>
+            <a:solidFill>
+              <a:srgbClr val="0000FF"/>
+            </a:solidFill>
             <a:ln>
               <a:noFill/>
             </a:ln>
@@ -1344,6 +860,36 @@
             </c:numRef>
           </c:val>
           <c:extLst>
+            <c:ext xmlns:c14="http://schemas.microsoft.com/office/drawing/2007/8/2/chart" uri="{6F2FDCE9-48DA-4B69-8628-5D25D57E5C99}">
+              <c14:invertSolidFillFmt>
+                <c14:spPr xmlns:c14="http://schemas.microsoft.com/office/drawing/2007/8/2/chart">
+                  <a:solidFill>
+                    <a:srgbClr val="00B050"/>
+                  </a:solidFill>
+                  <a:ln>
+                    <a:noFill/>
+                  </a:ln>
+                  <a:effectLst>
+                    <a:outerShdw blurRad="40000" dist="23000" dir="5400000" rotWithShape="0">
+                      <a:srgbClr val="000000">
+                        <a:alpha val="35000"/>
+                      </a:srgbClr>
+                    </a:outerShdw>
+                  </a:effectLst>
+                  <a:scene3d>
+                    <a:camera prst="orthographicFront">
+                      <a:rot lat="0" lon="0" rev="0"/>
+                    </a:camera>
+                    <a:lightRig rig="threePt" dir="t">
+                      <a:rot lat="0" lon="0" rev="1200000"/>
+                    </a:lightRig>
+                  </a:scene3d>
+                  <a:sp3d>
+                    <a:bevelT w="63500" h="25400"/>
+                  </a:sp3d>
+                </c14:spPr>
+              </c14:invertSolidFillFmt>
+            </c:ext>
             <c:ext xmlns:c16="http://schemas.microsoft.com/office/drawing/2014/chart" uri="{C3380CC4-5D6E-409C-BE32-E72D297353CC}">
               <c16:uniqueId val="{00000000-5ECF-47C6-B372-22213EE6DB1B}"/>
             </c:ext>
@@ -1364,25 +910,9 @@
             </c:strRef>
           </c:tx>
           <c:spPr>
-            <a:gradFill rotWithShape="1">
-              <a:gsLst>
-                <a:gs pos="0">
-                  <a:schemeClr val="accent2">
-                    <a:tint val="100000"/>
-                    <a:shade val="100000"/>
-                    <a:satMod val="130000"/>
-                  </a:schemeClr>
-                </a:gs>
-                <a:gs pos="100000">
-                  <a:schemeClr val="accent2">
-                    <a:tint val="50000"/>
-                    <a:shade val="100000"/>
-                    <a:satMod val="350000"/>
-                  </a:schemeClr>
-                </a:gs>
-              </a:gsLst>
-              <a:lin ang="16200000" scaled="0"/>
-            </a:gradFill>
+            <a:solidFill>
+              <a:srgbClr val="FF6600"/>
+            </a:solidFill>
             <a:ln>
               <a:noFill/>
             </a:ln>
@@ -1448,6 +978,36 @@
             </c:numRef>
           </c:val>
           <c:extLst>
+            <c:ext xmlns:c14="http://schemas.microsoft.com/office/drawing/2007/8/2/chart" uri="{6F2FDCE9-48DA-4B69-8628-5D25D57E5C99}">
+              <c14:invertSolidFillFmt>
+                <c14:spPr xmlns:c14="http://schemas.microsoft.com/office/drawing/2007/8/2/chart">
+                  <a:solidFill>
+                    <a:srgbClr val="FF0000"/>
+                  </a:solidFill>
+                  <a:ln>
+                    <a:noFill/>
+                  </a:ln>
+                  <a:effectLst>
+                    <a:outerShdw blurRad="40000" dist="23000" dir="5400000" rotWithShape="0">
+                      <a:srgbClr val="000000">
+                        <a:alpha val="35000"/>
+                      </a:srgbClr>
+                    </a:outerShdw>
+                  </a:effectLst>
+                  <a:scene3d>
+                    <a:camera prst="orthographicFront">
+                      <a:rot lat="0" lon="0" rev="0"/>
+                    </a:camera>
+                    <a:lightRig rig="threePt" dir="t">
+                      <a:rot lat="0" lon="0" rev="1200000"/>
+                    </a:lightRig>
+                  </a:scene3d>
+                  <a:sp3d>
+                    <a:bevelT w="63500" h="25400"/>
+                  </a:sp3d>
+                </c14:spPr>
+              </c14:invertSolidFillFmt>
+            </c:ext>
             <c:ext xmlns:c16="http://schemas.microsoft.com/office/drawing/2014/chart" uri="{C3380CC4-5D6E-409C-BE32-E72D297353CC}">
               <c16:uniqueId val="{00000001-5ECF-47C6-B372-22213EE6DB1B}"/>
             </c:ext>
@@ -1461,8 +1021,7 @@
           <c:showPercent val="0"/>
           <c:showBubbleSize val="0"/>
         </c:dLbls>
-        <c:gapWidth val="100"/>
-        <c:overlap val="-24"/>
+        <c:gapWidth val="150"/>
         <c:axId val="-2068027336"/>
         <c:axId val="-2113994440"/>
       </c:barChart>
@@ -1473,20 +1032,41 @@
         </c:scaling>
         <c:delete val="0"/>
         <c:axPos val="b"/>
+        <c:title>
+          <c:tx>
+            <c:rich>
+              <a:bodyPr/>
+              <a:lstStyle/>
+              <a:p>
+                <a:pPr>
+                  <a:defRPr sz="1400"/>
+                </a:pPr>
+                <a:r>
+                  <a:rPr lang="en-IN" sz="1400" dirty="0">
+                    <a:solidFill>
+                      <a:schemeClr val="bg1"/>
+                    </a:solidFill>
+                  </a:rPr>
+                  <a:t>OEM</a:t>
+                </a:r>
+              </a:p>
+            </c:rich>
+          </c:tx>
+          <c:overlay val="0"/>
+          <c:spPr>
+            <a:ln>
+              <a:noFill/>
+            </a:ln>
+          </c:spPr>
+        </c:title>
         <c:numFmt formatCode="General" sourceLinked="0"/>
         <c:majorTickMark val="none"/>
         <c:minorTickMark val="none"/>
         <c:tickLblPos val="nextTo"/>
         <c:spPr>
           <a:noFill/>
-          <a:ln w="12700" cap="flat" cmpd="sng" algn="ctr">
-            <a:solidFill>
-              <a:schemeClr val="lt1">
-                <a:lumMod val="95000"/>
-                <a:alpha val="54000"/>
-              </a:schemeClr>
-            </a:solidFill>
-            <a:round/>
+          <a:ln>
+            <a:noFill/>
           </a:ln>
           <a:effectLst/>
         </c:spPr>
@@ -1497,9 +1077,7 @@
             <a:pPr>
               <a:defRPr sz="1197" b="1" i="0" u="none" strike="noStrike" kern="1200" baseline="0">
                 <a:solidFill>
-                  <a:schemeClr val="lt1">
-                    <a:lumMod val="85000"/>
-                  </a:schemeClr>
+                  <a:schemeClr val="bg1"/>
                 </a:solidFill>
                 <a:latin typeface="Gadugi" panose="020B0502040204020203" pitchFamily="34" charset="0"/>
                 <a:ea typeface="Gadugi" panose="020B0502040204020203" pitchFamily="34" charset="0"/>
@@ -1527,25 +1105,69 @@
           <c:spPr>
             <a:ln w="9525" cap="flat" cmpd="sng" algn="ctr">
               <a:solidFill>
-                <a:schemeClr val="lt1">
-                  <a:lumMod val="95000"/>
-                  <a:alpha val="10000"/>
-                </a:schemeClr>
+                <a:schemeClr val="bg1"/>
               </a:solidFill>
               <a:round/>
             </a:ln>
             <a:effectLst/>
           </c:spPr>
         </c:majorGridlines>
+        <c:title>
+          <c:tx>
+            <c:rich>
+              <a:bodyPr/>
+              <a:lstStyle/>
+              <a:p>
+                <a:pPr>
+                  <a:defRPr sz="1400"/>
+                </a:pPr>
+                <a:r>
+                  <a:rPr lang="en-IN" sz="1400" dirty="0">
+                    <a:solidFill>
+                      <a:schemeClr val="bg1"/>
+                    </a:solidFill>
+                  </a:rPr>
+                  <a:t>ACTUAL/TOTAL</a:t>
+                </a:r>
+                <a:r>
+                  <a:rPr lang="en-IN" sz="1400" baseline="0" dirty="0">
+                    <a:solidFill>
+                      <a:schemeClr val="bg1"/>
+                    </a:solidFill>
+                  </a:rPr>
+                  <a:t> REVENUE (IN ₹ CR.)</a:t>
+                </a:r>
+                <a:endParaRPr lang="en-IN" sz="1400" dirty="0">
+                  <a:solidFill>
+                    <a:schemeClr val="bg1"/>
+                  </a:solidFill>
+                </a:endParaRPr>
+              </a:p>
+            </c:rich>
+          </c:tx>
+          <c:layout>
+            <c:manualLayout>
+              <c:xMode val="edge"/>
+              <c:yMode val="edge"/>
+              <c:x val="1.3503086419753086E-2"/>
+              <c:y val="0.1018281196993233"/>
+            </c:manualLayout>
+          </c:layout>
+          <c:overlay val="0"/>
+          <c:spPr>
+            <a:ln>
+              <a:noFill/>
+            </a:ln>
+          </c:spPr>
+        </c:title>
         <c:numFmt formatCode="0" sourceLinked="0"/>
-        <c:majorTickMark val="none"/>
+        <c:majorTickMark val="out"/>
         <c:minorTickMark val="none"/>
         <c:tickLblPos val="nextTo"/>
         <c:spPr>
-          <a:noFill/>
-          <a:ln>
-            <a:noFill/>
-          </a:ln>
+          <a:solidFill>
+            <a:schemeClr val="tx1"/>
+          </a:solidFill>
           <a:effectLst/>
         </c:spPr>
         <c:txPr>
@@ -1555,9 +1177,7 @@
             <a:pPr>
               <a:defRPr sz="1197" b="1" i="0" u="none" strike="noStrike" kern="1200" baseline="0">
                 <a:solidFill>
-                  <a:schemeClr val="lt1">
-                    <a:lumMod val="85000"/>
-                  </a:schemeClr>
+                  <a:schemeClr val="bg1"/>
                 </a:solidFill>
                 <a:latin typeface="Gadugi" panose="020B0502040204020203" pitchFamily="34" charset="0"/>
                 <a:ea typeface="Gadugi" panose="020B0502040204020203" pitchFamily="34" charset="0"/>
@@ -1580,7 +1200,7 @@
       </c:spPr>
     </c:plotArea>
     <c:legend>
-      <c:legendPos val="b"/>
+      <c:legendPos val="r"/>
       <c:overlay val="0"/>
       <c:spPr>
         <a:noFill/>
@@ -1596,9 +1216,7 @@
           <a:pPr>
             <a:defRPr sz="1197" b="1" i="0" u="none" strike="noStrike" kern="1200" baseline="0">
               <a:solidFill>
-                <a:schemeClr val="lt1">
-                  <a:lumMod val="85000"/>
-                </a:schemeClr>
+                <a:schemeClr val="bg1"/>
               </a:solidFill>
               <a:latin typeface="Gadugi" panose="020B0502040204020203" pitchFamily="34" charset="0"/>
               <a:ea typeface="Gadugi" panose="020B0502040204020203" pitchFamily="34" charset="0"/>
@@ -1614,26 +1232,9 @@
     <c:showDLblsOverMax val="1"/>
   </c:chart>
   <c:spPr>
-    <a:gradFill flip="none" rotWithShape="1">
-      <a:gsLst>
-        <a:gs pos="0">
-          <a:schemeClr val="dk1">
-            <a:lumMod val="65000"/>
-            <a:lumOff val="35000"/>
-          </a:schemeClr>
-        </a:gs>
-        <a:gs pos="100000">
-          <a:schemeClr val="dk1">
-            <a:lumMod val="85000"/>
-            <a:lumOff val="15000"/>
-          </a:schemeClr>
-        </a:gs>
-      </a:gsLst>
-      <a:path path="circle">
-        <a:fillToRect l="50000" t="50000" r="50000" b="50000"/>
-      </a:path>
-      <a:tileRect/>
-    </a:gradFill>
+    <a:solidFill>
+      <a:schemeClr val="tx1"/>
+    </a:solidFill>
     <a:ln>
       <a:noFill/>
     </a:ln>
@@ -1652,13 +1253,13 @@
       <a:endParaRPr lang="en-US"/>
     </a:p>
   </c:txPr>
-  <c:externalData r:id="rId3">
+  <c:externalData r:id="rId1">
     <c:autoUpdate val="0"/>
   </c:externalData>
 </c:chartSpace>
 </file>
 
-<file path=ppt/charts/chart4.xml><?xml version="1.0" encoding="utf-8"?>
+<file path=ppt/charts/chart3.xml><?xml version="1.0" encoding="utf-8"?>
 <c:chartSpace xmlns:c="http://schemas.openxmlformats.org/drawingml/2006/chart" xmlns:a="http://schemas.openxmlformats.org/drawingml/2006/main" xmlns:r="http://schemas.openxmlformats.org/officeDocument/2006/relationships" xmlns:c16r2="http://schemas.microsoft.com/office/drawing/2015/06/chart">
   <c:date1904 val="0"/>
   <c:lang val="en-US"/>
@@ -1681,24 +1282,21 @@
             <a:pPr>
               <a:defRPr sz="2128" b="1" i="0" u="none" strike="noStrike" kern="1200" spc="100" baseline="0">
                 <a:solidFill>
-                  <a:schemeClr val="lt1">
-                    <a:lumMod val="95000"/>
-                  </a:schemeClr>
+                  <a:schemeClr val="bg1"/>
                 </a:solidFill>
-                <a:effectLst>
-                  <a:outerShdw blurRad="50800" dist="38100" dir="5400000" algn="t" rotWithShape="0">
-                    <a:prstClr val="black">
-                      <a:alpha val="40000"/>
-                    </a:prstClr>
-                  </a:outerShdw>
-                </a:effectLst>
+                <a:effectLst/>
                 <a:latin typeface="Gadugi" panose="020B0502040204020203" pitchFamily="34" charset="0"/>
                 <a:ea typeface="Gadugi" panose="020B0502040204020203" pitchFamily="34" charset="0"/>
                 <a:cs typeface="+mn-cs"/>
               </a:defRPr>
             </a:pPr>
             <a:r>
-              <a:rPr lang="en-IN"/>
+              <a:rPr lang="en-IN">
+                <a:solidFill>
+                  <a:schemeClr val="bg1"/>
+                </a:solidFill>
+                <a:effectLst/>
+              </a:rPr>
               <a:t>July 2026 Units Sold</a:t>
             </a:r>
           </a:p>
@@ -1719,17 +1317,9 @@
           <a:pPr>
             <a:defRPr sz="2128" b="1" i="0" u="none" strike="noStrike" kern="1200" spc="100" baseline="0">
               <a:solidFill>
-                <a:schemeClr val="lt1">
-                  <a:lumMod val="95000"/>
-                </a:schemeClr>
+                <a:schemeClr val="bg1"/>
               </a:solidFill>
-              <a:effectLst>
-                <a:outerShdw blurRad="50800" dist="38100" dir="5400000" algn="t" rotWithShape="0">
-                  <a:prstClr val="black">
-                    <a:alpha val="40000"/>
-                  </a:prstClr>
-                </a:outerShdw>
-              </a:effectLst>
+              <a:effectLst/>
               <a:latin typeface="Gadugi" panose="020B0502040204020203" pitchFamily="34" charset="0"/>
               <a:ea typeface="Gadugi" panose="020B0502040204020203" pitchFamily="34" charset="0"/>
               <a:cs typeface="+mn-cs"/>
@@ -1760,31 +1350,20 @@
               </c:strCache>
             </c:strRef>
           </c:tx>
+          <c:spPr>
+            <a:ln>
+              <a:noFill/>
+            </a:ln>
+          </c:spPr>
           <c:invertIfNegative val="1"/>
           <c:dPt>
             <c:idx val="0"/>
             <c:invertIfNegative val="1"/>
             <c:bubble3D val="0"/>
             <c:spPr>
-              <a:gradFill rotWithShape="1">
-                <a:gsLst>
-                  <a:gs pos="0">
-                    <a:schemeClr val="accent1">
-                      <a:tint val="100000"/>
-                      <a:shade val="100000"/>
-                      <a:satMod val="130000"/>
-                    </a:schemeClr>
-                  </a:gs>
-                  <a:gs pos="100000">
-                    <a:schemeClr val="accent1">
-                      <a:tint val="50000"/>
-                      <a:shade val="100000"/>
-                      <a:satMod val="350000"/>
-                    </a:schemeClr>
-                  </a:gs>
-                </a:gsLst>
-                <a:lin ang="16200000" scaled="0"/>
-              </a:gradFill>
+              <a:solidFill>
+                <a:srgbClr val="00B0F0"/>
+              </a:solidFill>
               <a:ln>
                 <a:noFill/>
               </a:ln>
@@ -1807,31 +1386,20 @@
                 <a:bevelT w="63500" h="25400"/>
               </a:sp3d>
             </c:spPr>
+            <c:extLst>
+              <c:ext xmlns:c16="http://schemas.microsoft.com/office/drawing/2014/chart" uri="{C3380CC4-5D6E-409C-BE32-E72D297353CC}">
+                <c16:uniqueId val="{00000001-F6EF-41CB-9872-7FF1FE852651}"/>
+              </c:ext>
+            </c:extLst>
           </c:dPt>
           <c:dPt>
             <c:idx val="1"/>
             <c:invertIfNegative val="1"/>
             <c:bubble3D val="0"/>
             <c:spPr>
-              <a:gradFill rotWithShape="1">
-                <a:gsLst>
-                  <a:gs pos="0">
-                    <a:schemeClr val="accent2">
-                      <a:tint val="100000"/>
-                      <a:shade val="100000"/>
-                      <a:satMod val="130000"/>
-                    </a:schemeClr>
-                  </a:gs>
-                  <a:gs pos="100000">
-                    <a:schemeClr val="accent2">
-                      <a:tint val="50000"/>
-                      <a:shade val="100000"/>
-                      <a:satMod val="350000"/>
-                    </a:schemeClr>
-                  </a:gs>
-                </a:gsLst>
-                <a:lin ang="16200000" scaled="0"/>
-              </a:gradFill>
+              <a:solidFill>
+                <a:srgbClr val="FF0000"/>
+              </a:solidFill>
               <a:ln>
                 <a:noFill/>
               </a:ln>
@@ -1854,31 +1422,20 @@
                 <a:bevelT w="63500" h="25400"/>
               </a:sp3d>
             </c:spPr>
+            <c:extLst>
+              <c:ext xmlns:c16="http://schemas.microsoft.com/office/drawing/2014/chart" uri="{C3380CC4-5D6E-409C-BE32-E72D297353CC}">
+                <c16:uniqueId val="{00000003-F6EF-41CB-9872-7FF1FE852651}"/>
+              </c:ext>
+            </c:extLst>
           </c:dPt>
           <c:dPt>
             <c:idx val="2"/>
             <c:invertIfNegative val="1"/>
             <c:bubble3D val="0"/>
             <c:spPr>
-              <a:gradFill rotWithShape="1">
-                <a:gsLst>
-                  <a:gs pos="0">
-                    <a:schemeClr val="accent3">
-                      <a:tint val="100000"/>
-                      <a:shade val="100000"/>
-                      <a:satMod val="130000"/>
-                    </a:schemeClr>
-                  </a:gs>
-                  <a:gs pos="100000">
-                    <a:schemeClr val="accent3">
-                      <a:tint val="50000"/>
-                      <a:shade val="100000"/>
-                      <a:satMod val="350000"/>
-                    </a:schemeClr>
-                  </a:gs>
-                </a:gsLst>
-                <a:lin ang="16200000" scaled="0"/>
-              </a:gradFill>
+              <a:solidFill>
+                <a:srgbClr val="92D050"/>
+              </a:solidFill>
               <a:ln>
                 <a:noFill/>
               </a:ln>
@@ -1901,31 +1458,20 @@
                 <a:bevelT w="63500" h="25400"/>
               </a:sp3d>
             </c:spPr>
+            <c:extLst>
+              <c:ext xmlns:c16="http://schemas.microsoft.com/office/drawing/2014/chart" uri="{C3380CC4-5D6E-409C-BE32-E72D297353CC}">
+                <c16:uniqueId val="{00000005-F6EF-41CB-9872-7FF1FE852651}"/>
+              </c:ext>
+            </c:extLst>
           </c:dPt>
           <c:dPt>
             <c:idx val="3"/>
             <c:invertIfNegative val="1"/>
             <c:bubble3D val="0"/>
             <c:spPr>
-              <a:gradFill rotWithShape="1">
-                <a:gsLst>
-                  <a:gs pos="0">
-                    <a:schemeClr val="accent4">
-                      <a:tint val="100000"/>
-                      <a:shade val="100000"/>
-                      <a:satMod val="130000"/>
-                    </a:schemeClr>
-                  </a:gs>
-                  <a:gs pos="100000">
-                    <a:schemeClr val="accent4">
-                      <a:tint val="50000"/>
-                      <a:shade val="100000"/>
-                      <a:satMod val="350000"/>
-                    </a:schemeClr>
-                  </a:gs>
-                </a:gsLst>
-                <a:lin ang="16200000" scaled="0"/>
-              </a:gradFill>
+              <a:solidFill>
+                <a:srgbClr val="7030A0"/>
+              </a:solidFill>
               <a:ln>
                 <a:noFill/>
               </a:ln>
@@ -1948,7 +1494,65 @@
                 <a:bevelT w="63500" h="25400"/>
               </a:sp3d>
             </c:spPr>
+            <c:extLst>
+              <c:ext xmlns:c16="http://schemas.microsoft.com/office/drawing/2014/chart" uri="{C3380CC4-5D6E-409C-BE32-E72D297353CC}">
+                <c16:uniqueId val="{00000007-F6EF-41CB-9872-7FF1FE852651}"/>
+              </c:ext>
+            </c:extLst>
           </c:dPt>
+          <c:dLbls>
+            <c:spPr>
+              <a:noFill/>
+              <a:ln>
+                <a:noFill/>
+              </a:ln>
+              <a:effectLst/>
+            </c:spPr>
+            <c:txPr>
+              <a:bodyPr rot="0" spcFirstLastPara="1" vertOverflow="ellipsis" vert="horz" wrap="square" lIns="38100" tIns="19050" rIns="38100" bIns="19050" anchor="ctr" anchorCtr="1">
+                <a:spAutoFit/>
+              </a:bodyPr>
+              <a:lstStyle/>
+              <a:p>
+                <a:pPr>
+                  <a:defRPr sz="1197" b="1" i="0" u="none" strike="noStrike" kern="1200" baseline="0">
+                    <a:solidFill>
+                      <a:schemeClr val="bg1"/>
+                    </a:solidFill>
+                    <a:latin typeface="Gadugi" panose="020B0502040204020203" pitchFamily="34" charset="0"/>
+                    <a:ea typeface="Gadugi" panose="020B0502040204020203" pitchFamily="34" charset="0"/>
+                    <a:cs typeface="+mn-cs"/>
+                  </a:defRPr>
+                </a:pPr>
+                <a:endParaRPr lang="en-US"/>
+              </a:p>
+            </c:txPr>
+            <c:showLegendKey val="0"/>
+            <c:showVal val="1"/>
+            <c:showCatName val="0"/>
+            <c:showSerName val="0"/>
+            <c:showPercent val="0"/>
+            <c:showBubbleSize val="0"/>
+            <c:showLeaderLines val="0"/>
+            <c:extLst>
+              <c:ext xmlns:c15="http://schemas.microsoft.com/office/drawing/2012/chart" uri="{CE6537A1-D6FC-4f65-9D91-7224C49458BB}">
+                <c15:showLeaderLines val="1"/>
+                <c15:leaderLines>
+                  <c:spPr>
+                    <a:ln w="9525">
+                      <a:solidFill>
+                        <a:schemeClr val="lt1">
+                          <a:lumMod val="95000"/>
+                          <a:alpha val="54000"/>
+                        </a:schemeClr>
+                      </a:solidFill>
+                    </a:ln>
+                    <a:effectLst/>
+                  </c:spPr>
+                </c15:leaderLines>
+              </c:ext>
+            </c:extLst>
+          </c:dLbls>
           <c:cat>
             <c:strRef>
               <c:f>Sheet1!$A$2:$A$5</c:f>
@@ -1998,14 +1602,14 @@
         </c:ser>
         <c:dLbls>
           <c:showLegendKey val="0"/>
-          <c:showVal val="0"/>
+          <c:showVal val="1"/>
           <c:showCatName val="0"/>
           <c:showSerName val="0"/>
           <c:showPercent val="0"/>
           <c:showBubbleSize val="0"/>
         </c:dLbls>
-        <c:gapWidth val="115"/>
-        <c:overlap val="-20"/>
+        <c:gapWidth val="150"/>
+        <c:overlap val="-25"/>
         <c:axId val="-2068027336"/>
         <c:axId val="-2113994440"/>
       </c:barChart>
@@ -2040,9 +1644,7 @@
             <a:pPr>
               <a:defRPr sz="1197" b="1" i="0" u="none" strike="noStrike" kern="1200" baseline="0">
                 <a:solidFill>
-                  <a:schemeClr val="lt1">
-                    <a:lumMod val="85000"/>
-                  </a:schemeClr>
+                  <a:schemeClr val="bg1"/>
                 </a:solidFill>
                 <a:latin typeface="Gadugi" panose="020B0502040204020203" pitchFamily="34" charset="0"/>
                 <a:ea typeface="Gadugi" panose="020B0502040204020203" pitchFamily="34" charset="0"/>
@@ -2064,52 +1666,12 @@
         <c:scaling>
           <c:orientation val="minMax"/>
         </c:scaling>
-        <c:delete val="0"/>
+        <c:delete val="1"/>
         <c:axPos val="b"/>
-        <c:majorGridlines>
-          <c:spPr>
-            <a:ln w="9525" cap="flat" cmpd="sng" algn="ctr">
-              <a:solidFill>
-                <a:schemeClr val="lt1">
-                  <a:lumMod val="95000"/>
-                  <a:alpha val="10000"/>
-                </a:schemeClr>
-              </a:solidFill>
-              <a:round/>
-            </a:ln>
-            <a:effectLst/>
-          </c:spPr>
-        </c:majorGridlines>
         <c:numFmt formatCode="#,##0" sourceLinked="0"/>
         <c:majorTickMark val="none"/>
         <c:minorTickMark val="none"/>
         <c:tickLblPos val="nextTo"/>
-        <c:spPr>
-          <a:noFill/>
-          <a:ln>
-            <a:noFill/>
-          </a:ln>
-          <a:effectLst/>
-        </c:spPr>
-        <c:txPr>
-          <a:bodyPr rot="-60000000" spcFirstLastPara="1" vertOverflow="ellipsis" vert="horz" wrap="square" anchor="ctr" anchorCtr="1"/>
-          <a:lstStyle/>
-          <a:p>
-            <a:pPr>
-              <a:defRPr sz="1197" b="1" i="0" u="none" strike="noStrike" kern="1200" baseline="0">
-                <a:solidFill>
-                  <a:schemeClr val="lt1">
-                    <a:lumMod val="85000"/>
-                  </a:schemeClr>
-                </a:solidFill>
-                <a:latin typeface="Gadugi" panose="020B0502040204020203" pitchFamily="34" charset="0"/>
-                <a:ea typeface="Gadugi" panose="020B0502040204020203" pitchFamily="34" charset="0"/>
-                <a:cs typeface="+mn-cs"/>
-              </a:defRPr>
-            </a:pPr>
-            <a:endParaRPr lang="en-US"/>
-          </a:p>
-        </c:txPr>
         <c:crossAx val="-2068027336"/>
         <c:crosses val="autoZero"/>
         <c:crossBetween val="between"/>
@@ -2122,31 +1684,42 @@
         <a:effectLst/>
       </c:spPr>
     </c:plotArea>
+    <c:legend>
+      <c:legendPos val="t"/>
+      <c:overlay val="0"/>
+      <c:spPr>
+        <a:noFill/>
+        <a:ln>
+          <a:noFill/>
+        </a:ln>
+        <a:effectLst/>
+      </c:spPr>
+      <c:txPr>
+        <a:bodyPr rot="0" spcFirstLastPara="1" vertOverflow="ellipsis" vert="horz" wrap="square" anchor="ctr" anchorCtr="1"/>
+        <a:lstStyle/>
+        <a:p>
+          <a:pPr>
+            <a:defRPr sz="1197" b="1" i="0" u="none" strike="noStrike" kern="1200" baseline="0">
+              <a:solidFill>
+                <a:schemeClr val="bg1"/>
+              </a:solidFill>
+              <a:latin typeface="Gadugi" panose="020B0502040204020203" pitchFamily="34" charset="0"/>
+              <a:ea typeface="Gadugi" panose="020B0502040204020203" pitchFamily="34" charset="0"/>
+              <a:cs typeface="+mn-cs"/>
+            </a:defRPr>
+          </a:pPr>
+          <a:endParaRPr lang="en-US"/>
+        </a:p>
+      </c:txPr>
+    </c:legend>
     <c:plotVisOnly val="1"/>
     <c:dispBlanksAs val="gap"/>
     <c:showDLblsOverMax val="1"/>
   </c:chart>
   <c:spPr>
-    <a:gradFill flip="none" rotWithShape="1">
-      <a:gsLst>
-        <a:gs pos="0">
-          <a:schemeClr val="dk1">
-            <a:lumMod val="65000"/>
-            <a:lumOff val="35000"/>
-          </a:schemeClr>
-        </a:gs>
-        <a:gs pos="100000">
-          <a:schemeClr val="dk1">
-            <a:lumMod val="85000"/>
-            <a:lumOff val="15000"/>
-          </a:schemeClr>
-        </a:gs>
-      </a:gsLst>
-      <a:path path="circle">
-        <a:fillToRect l="50000" t="50000" r="50000" b="50000"/>
-      </a:path>
-      <a:tileRect/>
-    </a:gradFill>
+    <a:solidFill>
+      <a:schemeClr val="tx1"/>
+    </a:solidFill>
     <a:ln>
       <a:noFill/>
     </a:ln>
@@ -2171,7 +1744,7 @@
 </c:chartSpace>
 </file>
 
-<file path=ppt/charts/chart5.xml><?xml version="1.0" encoding="utf-8"?>
+<file path=ppt/charts/chart4.xml><?xml version="1.0" encoding="utf-8"?>
 <c:chartSpace xmlns:c="http://schemas.openxmlformats.org/drawingml/2006/chart" xmlns:a="http://schemas.openxmlformats.org/drawingml/2006/main" xmlns:r="http://schemas.openxmlformats.org/officeDocument/2006/relationships" xmlns:c16r2="http://schemas.microsoft.com/office/drawing/2015/06/chart">
   <c:date1904 val="0"/>
   <c:lang val="en-US"/>
@@ -2194,24 +1767,21 @@
             <a:pPr>
               <a:defRPr sz="2128" b="1" i="0" u="none" strike="noStrike" kern="1200" spc="100" baseline="0">
                 <a:solidFill>
-                  <a:schemeClr val="lt1">
-                    <a:lumMod val="95000"/>
-                  </a:schemeClr>
+                  <a:schemeClr val="bg1"/>
                 </a:solidFill>
-                <a:effectLst>
-                  <a:outerShdw blurRad="50800" dist="38100" dir="5400000" algn="t" rotWithShape="0">
-                    <a:prstClr val="black">
-                      <a:alpha val="40000"/>
-                    </a:prstClr>
-                  </a:outerShdw>
-                </a:effectLst>
+                <a:effectLst/>
                 <a:latin typeface="Gadugi" panose="020B0502040204020203" pitchFamily="34" charset="0"/>
                 <a:ea typeface="Gadugi" panose="020B0502040204020203" pitchFamily="34" charset="0"/>
                 <a:cs typeface="+mn-cs"/>
               </a:defRPr>
             </a:pPr>
             <a:r>
-              <a:rPr lang="en-IN"/>
+              <a:rPr lang="en-IN">
+                <a:solidFill>
+                  <a:schemeClr val="bg1"/>
+                </a:solidFill>
+                <a:effectLst/>
+              </a:rPr>
               <a:t>Average Selling Price</a:t>
             </a:r>
           </a:p>
@@ -2232,17 +1802,9 @@
           <a:pPr>
             <a:defRPr sz="2128" b="1" i="0" u="none" strike="noStrike" kern="1200" spc="100" baseline="0">
               <a:solidFill>
-                <a:schemeClr val="lt1">
-                  <a:lumMod val="95000"/>
-                </a:schemeClr>
+                <a:schemeClr val="bg1"/>
               </a:solidFill>
-              <a:effectLst>
-                <a:outerShdw blurRad="50800" dist="38100" dir="5400000" algn="t" rotWithShape="0">
-                  <a:prstClr val="black">
-                    <a:alpha val="40000"/>
-                  </a:prstClr>
-                </a:outerShdw>
-              </a:effectLst>
+              <a:effectLst/>
               <a:latin typeface="Gadugi" panose="020B0502040204020203" pitchFamily="34" charset="0"/>
               <a:ea typeface="Gadugi" panose="020B0502040204020203" pitchFamily="34" charset="0"/>
               <a:cs typeface="+mn-cs"/>
@@ -2273,31 +1835,21 @@
               </c:strCache>
             </c:strRef>
           </c:tx>
+          <c:spPr>
+            <a:noFill/>
+            <a:ln>
+              <a:noFill/>
+            </a:ln>
+          </c:spPr>
           <c:invertIfNegative val="1"/>
           <c:dPt>
             <c:idx val="0"/>
             <c:invertIfNegative val="1"/>
             <c:bubble3D val="0"/>
             <c:spPr>
-              <a:gradFill rotWithShape="1">
-                <a:gsLst>
-                  <a:gs pos="0">
-                    <a:schemeClr val="accent1">
-                      <a:tint val="100000"/>
-                      <a:shade val="100000"/>
-                      <a:satMod val="130000"/>
-                    </a:schemeClr>
-                  </a:gs>
-                  <a:gs pos="100000">
-                    <a:schemeClr val="accent1">
-                      <a:tint val="50000"/>
-                      <a:shade val="100000"/>
-                      <a:satMod val="350000"/>
-                    </a:schemeClr>
-                  </a:gs>
-                </a:gsLst>
-                <a:lin ang="16200000" scaled="0"/>
-              </a:gradFill>
+              <a:solidFill>
+                <a:srgbClr val="00B0F0"/>
+              </a:solidFill>
               <a:ln>
                 <a:noFill/>
               </a:ln>
@@ -2320,31 +1872,20 @@
                 <a:bevelT w="63500" h="25400"/>
               </a:sp3d>
             </c:spPr>
+            <c:extLst>
+              <c:ext xmlns:c16="http://schemas.microsoft.com/office/drawing/2014/chart" uri="{C3380CC4-5D6E-409C-BE32-E72D297353CC}">
+                <c16:uniqueId val="{00000001-EAE8-48DF-8108-6E2BDDC0F2D0}"/>
+              </c:ext>
+            </c:extLst>
           </c:dPt>
           <c:dPt>
             <c:idx val="1"/>
             <c:invertIfNegative val="1"/>
             <c:bubble3D val="0"/>
             <c:spPr>
-              <a:gradFill rotWithShape="1">
-                <a:gsLst>
-                  <a:gs pos="0">
-                    <a:schemeClr val="accent2">
-                      <a:tint val="100000"/>
-                      <a:shade val="100000"/>
-                      <a:satMod val="130000"/>
-                    </a:schemeClr>
-                  </a:gs>
-                  <a:gs pos="100000">
-                    <a:schemeClr val="accent2">
-                      <a:tint val="50000"/>
-                      <a:shade val="100000"/>
-                      <a:satMod val="350000"/>
-                    </a:schemeClr>
-                  </a:gs>
-                </a:gsLst>
-                <a:lin ang="16200000" scaled="0"/>
-              </a:gradFill>
+              <a:solidFill>
+                <a:srgbClr val="FF0000"/>
+              </a:solidFill>
               <a:ln>
                 <a:noFill/>
               </a:ln>
@@ -2367,31 +1908,20 @@
                 <a:bevelT w="63500" h="25400"/>
               </a:sp3d>
             </c:spPr>
+            <c:extLst>
+              <c:ext xmlns:c16="http://schemas.microsoft.com/office/drawing/2014/chart" uri="{C3380CC4-5D6E-409C-BE32-E72D297353CC}">
+                <c16:uniqueId val="{00000003-EAE8-48DF-8108-6E2BDDC0F2D0}"/>
+              </c:ext>
+            </c:extLst>
           </c:dPt>
           <c:dPt>
             <c:idx val="2"/>
             <c:invertIfNegative val="1"/>
             <c:bubble3D val="0"/>
             <c:spPr>
-              <a:gradFill rotWithShape="1">
-                <a:gsLst>
-                  <a:gs pos="0">
-                    <a:schemeClr val="accent3">
-                      <a:tint val="100000"/>
-                      <a:shade val="100000"/>
-                      <a:satMod val="130000"/>
-                    </a:schemeClr>
-                  </a:gs>
-                  <a:gs pos="100000">
-                    <a:schemeClr val="accent3">
-                      <a:tint val="50000"/>
-                      <a:shade val="100000"/>
-                      <a:satMod val="350000"/>
-                    </a:schemeClr>
-                  </a:gs>
-                </a:gsLst>
-                <a:lin ang="16200000" scaled="0"/>
-              </a:gradFill>
+              <a:solidFill>
+                <a:srgbClr val="92D050"/>
+              </a:solidFill>
               <a:ln>
                 <a:noFill/>
               </a:ln>
@@ -2414,31 +1944,20 @@
                 <a:bevelT w="63500" h="25400"/>
               </a:sp3d>
             </c:spPr>
+            <c:extLst>
+              <c:ext xmlns:c16="http://schemas.microsoft.com/office/drawing/2014/chart" uri="{C3380CC4-5D6E-409C-BE32-E72D297353CC}">
+                <c16:uniqueId val="{00000005-EAE8-48DF-8108-6E2BDDC0F2D0}"/>
+              </c:ext>
+            </c:extLst>
           </c:dPt>
           <c:dPt>
             <c:idx val="3"/>
             <c:invertIfNegative val="1"/>
             <c:bubble3D val="0"/>
             <c:spPr>
-              <a:gradFill rotWithShape="1">
-                <a:gsLst>
-                  <a:gs pos="0">
-                    <a:schemeClr val="accent4">
-                      <a:tint val="100000"/>
-                      <a:shade val="100000"/>
-                      <a:satMod val="130000"/>
-                    </a:schemeClr>
-                  </a:gs>
-                  <a:gs pos="100000">
-                    <a:schemeClr val="accent4">
-                      <a:tint val="50000"/>
-                      <a:shade val="100000"/>
-                      <a:satMod val="350000"/>
-                    </a:schemeClr>
-                  </a:gs>
-                </a:gsLst>
-                <a:lin ang="16200000" scaled="0"/>
-              </a:gradFill>
+              <a:solidFill>
+                <a:srgbClr val="7030A0"/>
+              </a:solidFill>
               <a:ln>
                 <a:noFill/>
               </a:ln>
@@ -2461,6 +1980,11 @@
                 <a:bevelT w="63500" h="25400"/>
               </a:sp3d>
             </c:spPr>
+            <c:extLst>
+              <c:ext xmlns:c16="http://schemas.microsoft.com/office/drawing/2014/chart" uri="{C3380CC4-5D6E-409C-BE32-E72D297353CC}">
+                <c16:uniqueId val="{00000007-EAE8-48DF-8108-6E2BDDC0F2D0}"/>
+              </c:ext>
+            </c:extLst>
           </c:dPt>
           <c:cat>
             <c:strRef>
@@ -2517,8 +2041,7 @@
           <c:showPercent val="0"/>
           <c:showBubbleSize val="0"/>
         </c:dLbls>
-        <c:gapWidth val="100"/>
-        <c:overlap val="-24"/>
+        <c:gapWidth val="150"/>
         <c:axId val="-2068027336"/>
         <c:axId val="-2113994440"/>
       </c:barChart>
@@ -2529,6 +2052,59 @@
         </c:scaling>
         <c:delete val="0"/>
         <c:axPos val="b"/>
+        <c:title>
+          <c:tx>
+            <c:rich>
+              <a:bodyPr rot="0" spcFirstLastPara="1" vertOverflow="ellipsis" vert="horz" wrap="square" anchor="ctr" anchorCtr="1"/>
+              <a:lstStyle/>
+              <a:p>
+                <a:pPr>
+                  <a:defRPr sz="1400" b="1" i="0" u="none" strike="noStrike" kern="1200" cap="all" baseline="0">
+                    <a:solidFill>
+                      <a:schemeClr val="bg1"/>
+                    </a:solidFill>
+                    <a:latin typeface="Gadugi" panose="020B0502040204020203" pitchFamily="34" charset="0"/>
+                    <a:ea typeface="Gadugi" panose="020B0502040204020203" pitchFamily="34" charset="0"/>
+                    <a:cs typeface="+mn-cs"/>
+                  </a:defRPr>
+                </a:pPr>
+                <a:r>
+                  <a:rPr lang="en-IN" sz="1400" dirty="0">
+                    <a:solidFill>
+                      <a:schemeClr val="bg1"/>
+                    </a:solidFill>
+                  </a:rPr>
+                  <a:t>OEM</a:t>
+                </a:r>
+              </a:p>
+            </c:rich>
+          </c:tx>
+          <c:overlay val="0"/>
+          <c:spPr>
+            <a:noFill/>
+            <a:ln>
+              <a:noFill/>
+            </a:ln>
+            <a:effectLst/>
+          </c:spPr>
+          <c:txPr>
+            <a:bodyPr rot="0" spcFirstLastPara="1" vertOverflow="ellipsis" vert="horz" wrap="square" anchor="ctr" anchorCtr="1"/>
+            <a:lstStyle/>
+            <a:p>
+              <a:pPr>
+                <a:defRPr sz="1400" b="1" i="0" u="none" strike="noStrike" kern="1200" cap="all" baseline="0">
+                  <a:solidFill>
+                    <a:schemeClr val="bg1"/>
+                  </a:solidFill>
+                  <a:latin typeface="Gadugi" panose="020B0502040204020203" pitchFamily="34" charset="0"/>
+                  <a:ea typeface="Gadugi" panose="020B0502040204020203" pitchFamily="34" charset="0"/>
+                  <a:cs typeface="+mn-cs"/>
+                </a:defRPr>
+              </a:pPr>
+              <a:endParaRPr lang="en-US"/>
+            </a:p>
+          </c:txPr>
+        </c:title>
         <c:numFmt formatCode="General" sourceLinked="0"/>
         <c:majorTickMark val="none"/>
         <c:minorTickMark val="none"/>
@@ -2536,12 +2112,7 @@
         <c:spPr>
           <a:noFill/>
           <a:ln w="12700" cap="flat" cmpd="sng" algn="ctr">
-            <a:solidFill>
-              <a:schemeClr val="lt1">
-                <a:lumMod val="95000"/>
-                <a:alpha val="54000"/>
-              </a:schemeClr>
-            </a:solidFill>
+            <a:noFill/>
             <a:round/>
           </a:ln>
           <a:effectLst/>
@@ -2551,11 +2122,9 @@
           <a:lstStyle/>
           <a:p>
             <a:pPr>
-              <a:defRPr sz="1197" b="0" i="0" u="none" strike="noStrike" kern="1200" baseline="0">
+              <a:defRPr sz="1197" b="1" i="0" u="none" strike="noStrike" kern="1200" baseline="0">
                 <a:solidFill>
-                  <a:schemeClr val="lt1">
-                    <a:lumMod val="85000"/>
-                  </a:schemeClr>
+                  <a:schemeClr val="bg1"/>
                 </a:solidFill>
                 <a:latin typeface="Gadugi" panose="020B0502040204020203" pitchFamily="34" charset="0"/>
                 <a:ea typeface="Gadugi" panose="020B0502040204020203" pitchFamily="34" charset="0"/>
@@ -2583,18 +2152,81 @@
           <c:spPr>
             <a:ln w="9525" cap="flat" cmpd="sng" algn="ctr">
               <a:solidFill>
-                <a:schemeClr val="lt1">
-                  <a:lumMod val="95000"/>
-                  <a:alpha val="10000"/>
-                </a:schemeClr>
+                <a:schemeClr val="bg1"/>
               </a:solidFill>
               <a:round/>
             </a:ln>
             <a:effectLst/>
           </c:spPr>
         </c:majorGridlines>
+        <c:title>
+          <c:tx>
+            <c:rich>
+              <a:bodyPr rot="-5400000" spcFirstLastPara="1" vertOverflow="ellipsis" vert="horz" wrap="square" anchor="ctr" anchorCtr="1"/>
+              <a:lstStyle/>
+              <a:p>
+                <a:pPr>
+                  <a:defRPr sz="1400" b="1" i="0" u="none" strike="noStrike" kern="1200" cap="all" baseline="0">
+                    <a:solidFill>
+                      <a:schemeClr val="bg1"/>
+                    </a:solidFill>
+                    <a:latin typeface="Gadugi" panose="020B0502040204020203" pitchFamily="34" charset="0"/>
+                    <a:ea typeface="Gadugi" panose="020B0502040204020203" pitchFamily="34" charset="0"/>
+                    <a:cs typeface="+mn-cs"/>
+                  </a:defRPr>
+                </a:pPr>
+                <a:r>
+                  <a:rPr lang="en-IN" sz="1400" dirty="0">
+                    <a:solidFill>
+                      <a:schemeClr val="bg1"/>
+                    </a:solidFill>
+                  </a:rPr>
+                  <a:t>Average</a:t>
+                </a:r>
+                <a:r>
+                  <a:rPr lang="en-IN" sz="1400" baseline="0" dirty="0">
+                    <a:solidFill>
+                      <a:schemeClr val="bg1"/>
+                    </a:solidFill>
+                  </a:rPr>
+                  <a:t> SP (₹ LAKH)</a:t>
+                </a:r>
+                <a:endParaRPr lang="en-IN" sz="1400" dirty="0">
+                  <a:solidFill>
+                    <a:schemeClr val="bg1"/>
+                  </a:solidFill>
+                </a:endParaRPr>
+              </a:p>
+            </c:rich>
+          </c:tx>
+          <c:overlay val="0"/>
+          <c:spPr>
+            <a:noFill/>
+            <a:ln>
+              <a:noFill/>
+            </a:ln>
+            <a:effectLst/>
+          </c:spPr>
+          <c:txPr>
+            <a:bodyPr rot="-5400000" spcFirstLastPara="1" vertOverflow="ellipsis" vert="horz" wrap="square" anchor="ctr" anchorCtr="1"/>
+            <a:lstStyle/>
+            <a:p>
+              <a:pPr>
+                <a:defRPr sz="1400" b="1" i="0" u="none" strike="noStrike" kern="1200" cap="all" baseline="0">
+                  <a:solidFill>
+                    <a:schemeClr val="bg1"/>
+                  </a:solidFill>
+                  <a:latin typeface="Gadugi" panose="020B0502040204020203" pitchFamily="34" charset="0"/>
+                  <a:ea typeface="Gadugi" panose="020B0502040204020203" pitchFamily="34" charset="0"/>
+                  <a:cs typeface="+mn-cs"/>
+                </a:defRPr>
+              </a:pPr>
+              <a:endParaRPr lang="en-US"/>
+            </a:p>
+          </c:txPr>
+        </c:title>
         <c:numFmt formatCode="0.0" sourceLinked="0"/>
-        <c:majorTickMark val="none"/>
+        <c:majorTickMark val="out"/>
         <c:minorTickMark val="none"/>
         <c:tickLblPos val="nextTo"/>
         <c:spPr>
@@ -2609,7 +2241,7 @@
           <a:lstStyle/>
           <a:p>
             <a:pPr>
-              <a:defRPr sz="1197" b="0" i="0" u="none" strike="noStrike" kern="1200" baseline="0">
+              <a:defRPr sz="1197" b="1" i="0" u="none" strike="noStrike" kern="1200" baseline="0">
                 <a:solidFill>
                   <a:schemeClr val="lt1">
                     <a:lumMod val="85000"/>
@@ -2635,31 +2267,42 @@
         <a:effectLst/>
       </c:spPr>
     </c:plotArea>
+    <c:legend>
+      <c:legendPos val="r"/>
+      <c:overlay val="0"/>
+      <c:spPr>
+        <a:noFill/>
+        <a:ln>
+          <a:noFill/>
+        </a:ln>
+        <a:effectLst/>
+      </c:spPr>
+      <c:txPr>
+        <a:bodyPr rot="0" spcFirstLastPara="1" vertOverflow="ellipsis" vert="horz" wrap="square" anchor="ctr" anchorCtr="1"/>
+        <a:lstStyle/>
+        <a:p>
+          <a:pPr>
+            <a:defRPr sz="1197" b="1" i="0" u="none" strike="noStrike" kern="1200" baseline="0">
+              <a:solidFill>
+                <a:schemeClr val="bg1"/>
+              </a:solidFill>
+              <a:latin typeface="Gadugi" panose="020B0502040204020203" pitchFamily="34" charset="0"/>
+              <a:ea typeface="Gadugi" panose="020B0502040204020203" pitchFamily="34" charset="0"/>
+              <a:cs typeface="+mn-cs"/>
+            </a:defRPr>
+          </a:pPr>
+          <a:endParaRPr lang="en-US"/>
+        </a:p>
+      </c:txPr>
+    </c:legend>
     <c:plotVisOnly val="1"/>
     <c:dispBlanksAs val="gap"/>
     <c:showDLblsOverMax val="1"/>
   </c:chart>
   <c:spPr>
-    <a:gradFill flip="none" rotWithShape="1">
-      <a:gsLst>
-        <a:gs pos="0">
-          <a:schemeClr val="dk1">
-            <a:lumMod val="65000"/>
-            <a:lumOff val="35000"/>
-          </a:schemeClr>
-        </a:gs>
-        <a:gs pos="100000">
-          <a:schemeClr val="dk1">
-            <a:lumMod val="85000"/>
-            <a:lumOff val="15000"/>
-          </a:schemeClr>
-        </a:gs>
-      </a:gsLst>
-      <a:path path="circle">
-        <a:fillToRect l="50000" t="50000" r="50000" b="50000"/>
-      </a:path>
-      <a:tileRect/>
-    </a:gradFill>
+    <a:solidFill>
+      <a:schemeClr val="tx1"/>
+    </a:solidFill>
     <a:ln>
       <a:noFill/>
     </a:ln>
@@ -2670,7 +2313,7 @@
     <a:lstStyle/>
     <a:p>
       <a:pPr>
-        <a:defRPr>
+        <a:defRPr b="1">
           <a:latin typeface="Gadugi" panose="020B0502040204020203" pitchFamily="34" charset="0"/>
           <a:ea typeface="Gadugi" panose="020B0502040204020203" pitchFamily="34" charset="0"/>
         </a:defRPr>
@@ -2684,7 +2327,7 @@
 </c:chartSpace>
 </file>
 
-<file path=ppt/charts/chart6.xml><?xml version="1.0" encoding="utf-8"?>
+<file path=ppt/charts/chart5.xml><?xml version="1.0" encoding="utf-8"?>
 <c:chartSpace xmlns:c="http://schemas.openxmlformats.org/drawingml/2006/chart" xmlns:a="http://schemas.openxmlformats.org/drawingml/2006/main" xmlns:r="http://schemas.openxmlformats.org/officeDocument/2006/relationships" xmlns:c16r2="http://schemas.microsoft.com/office/drawing/2015/06/chart">
   <c:date1904 val="0"/>
   <c:lang val="en-US"/>
@@ -2707,9 +2350,7 @@
             <a:pPr>
               <a:defRPr sz="2128" b="1" i="0" u="none" strike="noStrike" kern="1200" spc="100" baseline="0">
                 <a:solidFill>
-                  <a:schemeClr val="lt1">
-                    <a:lumMod val="95000"/>
-                  </a:schemeClr>
+                  <a:schemeClr val="bg1"/>
                 </a:solidFill>
                 <a:effectLst>
                   <a:outerShdw blurRad="50800" dist="38100" dir="5400000" algn="t" rotWithShape="0">
@@ -2724,7 +2365,11 @@
               </a:defRPr>
             </a:pPr>
             <a:r>
-              <a:rPr lang="en-IN"/>
+              <a:rPr lang="en-IN">
+                <a:solidFill>
+                  <a:schemeClr val="bg1"/>
+                </a:solidFill>
+              </a:rPr>
               <a:t>YoY Revenue Growth</a:t>
             </a:r>
           </a:p>
@@ -2745,9 +2390,7 @@
           <a:pPr>
             <a:defRPr sz="2128" b="1" i="0" u="none" strike="noStrike" kern="1200" spc="100" baseline="0">
               <a:solidFill>
-                <a:schemeClr val="lt1">
-                  <a:lumMod val="95000"/>
-                </a:schemeClr>
+                <a:schemeClr val="bg1"/>
               </a:solidFill>
               <a:effectLst>
                 <a:outerShdw blurRad="50800" dist="38100" dir="5400000" algn="t" rotWithShape="0">
@@ -2781,36 +2424,25 @@
               <c:strCache>
                 <c:ptCount val="1"/>
                 <c:pt idx="0">
-                  <c:v>YoY Revenue Growth (%)</c:v>
+                  <c:v>YoY Growth (%)</c:v>
                 </c:pt>
               </c:strCache>
             </c:strRef>
           </c:tx>
+          <c:spPr>
+            <a:ln>
+              <a:noFill/>
+            </a:ln>
+          </c:spPr>
           <c:invertIfNegative val="1"/>
           <c:dPt>
             <c:idx val="0"/>
             <c:invertIfNegative val="1"/>
             <c:bubble3D val="0"/>
             <c:spPr>
-              <a:gradFill rotWithShape="1">
-                <a:gsLst>
-                  <a:gs pos="0">
-                    <a:schemeClr val="accent1">
-                      <a:tint val="100000"/>
-                      <a:shade val="100000"/>
-                      <a:satMod val="130000"/>
-                    </a:schemeClr>
-                  </a:gs>
-                  <a:gs pos="100000">
-                    <a:schemeClr val="accent1">
-                      <a:tint val="50000"/>
-                      <a:shade val="100000"/>
-                      <a:satMod val="350000"/>
-                    </a:schemeClr>
-                  </a:gs>
-                </a:gsLst>
-                <a:lin ang="16200000" scaled="0"/>
-              </a:gradFill>
+              <a:solidFill>
+                <a:srgbClr val="00B0F0"/>
+              </a:solidFill>
               <a:ln>
                 <a:noFill/>
               </a:ln>
@@ -2833,31 +2465,20 @@
                 <a:bevelT w="63500" h="25400"/>
               </a:sp3d>
             </c:spPr>
+            <c:extLst>
+              <c:ext xmlns:c16="http://schemas.microsoft.com/office/drawing/2014/chart" uri="{C3380CC4-5D6E-409C-BE32-E72D297353CC}">
+                <c16:uniqueId val="{00000001-1F9B-4F12-ADEB-616071C5E622}"/>
+              </c:ext>
+            </c:extLst>
           </c:dPt>
           <c:dPt>
             <c:idx val="1"/>
             <c:invertIfNegative val="1"/>
             <c:bubble3D val="0"/>
             <c:spPr>
-              <a:gradFill rotWithShape="1">
-                <a:gsLst>
-                  <a:gs pos="0">
-                    <a:schemeClr val="accent2">
-                      <a:tint val="100000"/>
-                      <a:shade val="100000"/>
-                      <a:satMod val="130000"/>
-                    </a:schemeClr>
-                  </a:gs>
-                  <a:gs pos="100000">
-                    <a:schemeClr val="accent2">
-                      <a:tint val="50000"/>
-                      <a:shade val="100000"/>
-                      <a:satMod val="350000"/>
-                    </a:schemeClr>
-                  </a:gs>
-                </a:gsLst>
-                <a:lin ang="16200000" scaled="0"/>
-              </a:gradFill>
+              <a:solidFill>
+                <a:srgbClr val="FF0000"/>
+              </a:solidFill>
               <a:ln>
                 <a:noFill/>
               </a:ln>
@@ -2880,31 +2501,20 @@
                 <a:bevelT w="63500" h="25400"/>
               </a:sp3d>
             </c:spPr>
+            <c:extLst>
+              <c:ext xmlns:c16="http://schemas.microsoft.com/office/drawing/2014/chart" uri="{C3380CC4-5D6E-409C-BE32-E72D297353CC}">
+                <c16:uniqueId val="{00000003-1F9B-4F12-ADEB-616071C5E622}"/>
+              </c:ext>
+            </c:extLst>
           </c:dPt>
           <c:dPt>
             <c:idx val="2"/>
             <c:invertIfNegative val="1"/>
             <c:bubble3D val="0"/>
             <c:spPr>
-              <a:gradFill rotWithShape="1">
-                <a:gsLst>
-                  <a:gs pos="0">
-                    <a:schemeClr val="accent3">
-                      <a:tint val="100000"/>
-                      <a:shade val="100000"/>
-                      <a:satMod val="130000"/>
-                    </a:schemeClr>
-                  </a:gs>
-                  <a:gs pos="100000">
-                    <a:schemeClr val="accent3">
-                      <a:tint val="50000"/>
-                      <a:shade val="100000"/>
-                      <a:satMod val="350000"/>
-                    </a:schemeClr>
-                  </a:gs>
-                </a:gsLst>
-                <a:lin ang="16200000" scaled="0"/>
-              </a:gradFill>
+              <a:solidFill>
+                <a:srgbClr val="92D050"/>
+              </a:solidFill>
               <a:ln>
                 <a:noFill/>
               </a:ln>
@@ -2927,31 +2537,20 @@
                 <a:bevelT w="63500" h="25400"/>
               </a:sp3d>
             </c:spPr>
+            <c:extLst>
+              <c:ext xmlns:c16="http://schemas.microsoft.com/office/drawing/2014/chart" uri="{C3380CC4-5D6E-409C-BE32-E72D297353CC}">
+                <c16:uniqueId val="{00000005-1F9B-4F12-ADEB-616071C5E622}"/>
+              </c:ext>
+            </c:extLst>
           </c:dPt>
           <c:dPt>
             <c:idx val="3"/>
             <c:invertIfNegative val="1"/>
             <c:bubble3D val="0"/>
             <c:spPr>
-              <a:gradFill rotWithShape="1">
-                <a:gsLst>
-                  <a:gs pos="0">
-                    <a:schemeClr val="accent4">
-                      <a:tint val="100000"/>
-                      <a:shade val="100000"/>
-                      <a:satMod val="130000"/>
-                    </a:schemeClr>
-                  </a:gs>
-                  <a:gs pos="100000">
-                    <a:schemeClr val="accent4">
-                      <a:tint val="50000"/>
-                      <a:shade val="100000"/>
-                      <a:satMod val="350000"/>
-                    </a:schemeClr>
-                  </a:gs>
-                </a:gsLst>
-                <a:lin ang="16200000" scaled="0"/>
-              </a:gradFill>
+              <a:solidFill>
+                <a:srgbClr val="7030A0"/>
+              </a:solidFill>
               <a:ln>
                 <a:noFill/>
               </a:ln>
@@ -2974,6 +2573,11 @@
                 <a:bevelT w="63500" h="25400"/>
               </a:sp3d>
             </c:spPr>
+            <c:extLst>
+              <c:ext xmlns:c16="http://schemas.microsoft.com/office/drawing/2014/chart" uri="{C3380CC4-5D6E-409C-BE32-E72D297353CC}">
+                <c16:uniqueId val="{00000007-1F9B-4F12-ADEB-616071C5E622}"/>
+              </c:ext>
+            </c:extLst>
           </c:dPt>
           <c:cat>
             <c:strRef>
@@ -3018,7 +2622,7 @@
           </c:val>
           <c:extLst>
             <c:ext xmlns:c16="http://schemas.microsoft.com/office/drawing/2014/chart" uri="{C3380CC4-5D6E-409C-BE32-E72D297353CC}">
-              <c16:uniqueId val="{00000000-B284-4054-BE83-746D27631333}"/>
+              <c16:uniqueId val="{00000008-1F9B-4F12-ADEB-616071C5E622}"/>
             </c:ext>
           </c:extLst>
         </c:ser>
@@ -3030,8 +2634,7 @@
           <c:showPercent val="0"/>
           <c:showBubbleSize val="0"/>
         </c:dLbls>
-        <c:gapWidth val="100"/>
-        <c:overlap val="-24"/>
+        <c:gapWidth val="150"/>
         <c:axId val="-2068027336"/>
         <c:axId val="-2113994440"/>
       </c:barChart>
@@ -3066,9 +2669,7 @@
             <a:pPr>
               <a:defRPr sz="1197" b="1" i="0" u="none" strike="noStrike" kern="1200" baseline="0">
                 <a:solidFill>
-                  <a:schemeClr val="lt1">
-                    <a:lumMod val="85000"/>
-                  </a:schemeClr>
+                  <a:schemeClr val="bg1"/>
                 </a:solidFill>
                 <a:latin typeface="Gadugi" panose="020B0502040204020203" pitchFamily="34" charset="0"/>
                 <a:ea typeface="Gadugi" panose="020B0502040204020203" pitchFamily="34" charset="0"/>
@@ -3079,7 +2680,7 @@
           </a:p>
         </c:txPr>
         <c:crossAx val="-2113994440"/>
-        <c:crosses val="autoZero"/>
+        <c:crossesAt val="0"/>
         <c:auto val="1"/>
         <c:lblAlgn val="ctr"/>
         <c:lblOffset val="100"/>
@@ -3096,16 +2697,66 @@
           <c:spPr>
             <a:ln w="9525" cap="flat" cmpd="sng" algn="ctr">
               <a:solidFill>
-                <a:schemeClr val="lt1">
-                  <a:lumMod val="95000"/>
-                  <a:alpha val="10000"/>
-                </a:schemeClr>
+                <a:schemeClr val="bg1"/>
               </a:solidFill>
               <a:round/>
             </a:ln>
             <a:effectLst/>
           </c:spPr>
         </c:majorGridlines>
+        <c:title>
+          <c:tx>
+            <c:rich>
+              <a:bodyPr rot="-5400000" spcFirstLastPara="1" vertOverflow="ellipsis" vert="horz" wrap="square" anchor="ctr" anchorCtr="1"/>
+              <a:lstStyle/>
+              <a:p>
+                <a:pPr>
+                  <a:defRPr sz="1197" b="1" i="0" u="none" strike="noStrike" kern="1200" cap="all" baseline="0">
+                    <a:solidFill>
+                      <a:schemeClr val="bg1"/>
+                    </a:solidFill>
+                    <a:latin typeface="Gadugi" panose="020B0502040204020203" pitchFamily="34" charset="0"/>
+                    <a:ea typeface="Gadugi" panose="020B0502040204020203" pitchFamily="34" charset="0"/>
+                    <a:cs typeface="+mn-cs"/>
+                  </a:defRPr>
+                </a:pPr>
+                <a:r>
+                  <a:rPr lang="en-IN" dirty="0">
+                    <a:solidFill>
+                      <a:schemeClr val="bg1"/>
+                    </a:solidFill>
+                  </a:rPr>
+                  <a:t>GROWTH RATE (%)</a:t>
+                </a:r>
+              </a:p>
+            </c:rich>
+          </c:tx>
+          <c:overlay val="0"/>
+          <c:spPr>
+            <a:noFill/>
+            <a:ln>
+              <a:noFill/>
+            </a:ln>
+            <a:effectLst/>
+          </c:spPr>
+          <c:txPr>
+            <a:bodyPr rot="-5400000" spcFirstLastPara="1" vertOverflow="ellipsis" vert="horz" wrap="square" anchor="ctr" anchorCtr="1"/>
+            <a:lstStyle/>
+            <a:p>
+              <a:pPr>
+                <a:defRPr sz="1197" b="1" i="0" u="none" strike="noStrike" kern="1200" cap="all" baseline="0">
+                  <a:solidFill>
+                    <a:schemeClr val="bg1"/>
+                  </a:solidFill>
+                  <a:latin typeface="Gadugi" panose="020B0502040204020203" pitchFamily="34" charset="0"/>
+                  <a:ea typeface="Gadugi" panose="020B0502040204020203" pitchFamily="34" charset="0"/>
+                  <a:cs typeface="+mn-cs"/>
+                </a:defRPr>
+              </a:pPr>
+              <a:endParaRPr lang="en-US"/>
+            </a:p>
+          </c:txPr>
+        </c:title>
         <c:numFmt formatCode="0.0" sourceLinked="0"/>
         <c:majorTickMark val="none"/>
         <c:minorTickMark val="none"/>
@@ -3124,9 +2775,7 @@
             <a:pPr>
               <a:defRPr sz="1197" b="1" i="0" u="none" strike="noStrike" kern="1200" baseline="0">
                 <a:solidFill>
-                  <a:schemeClr val="lt1">
-                    <a:lumMod val="85000"/>
-                  </a:schemeClr>
+                  <a:schemeClr val="bg1"/>
                 </a:solidFill>
                 <a:latin typeface="Gadugi" panose="020B0502040204020203" pitchFamily="34" charset="0"/>
                 <a:ea typeface="Gadugi" panose="020B0502040204020203" pitchFamily="34" charset="0"/>
@@ -3140,6 +2789,38 @@
         <c:crosses val="autoZero"/>
         <c:crossBetween val="between"/>
       </c:valAx>
+      <c:dTable>
+        <c:showHorzBorder val="1"/>
+        <c:showVertBorder val="1"/>
+        <c:showOutline val="1"/>
+        <c:showKeys val="1"/>
+        <c:spPr>
+          <a:noFill/>
+          <a:ln w="9525">
+            <a:solidFill>
+              <a:schemeClr val="bg1"/>
+            </a:solidFill>
+          </a:ln>
+          <a:effectLst/>
+        </c:spPr>
+        <c:txPr>
+          <a:bodyPr rot="0" spcFirstLastPara="1" vertOverflow="ellipsis" vert="horz" wrap="square" anchor="ctr" anchorCtr="1"/>
+          <a:lstStyle/>
+          <a:p>
+            <a:pPr rtl="0">
+              <a:defRPr sz="1197" b="1" i="0" u="none" strike="noStrike" kern="1200" baseline="0">
+                <a:solidFill>
+                  <a:schemeClr val="bg1"/>
+                </a:solidFill>
+                <a:latin typeface="Gadugi" panose="020B0502040204020203" pitchFamily="34" charset="0"/>
+                <a:ea typeface="Gadugi" panose="020B0502040204020203" pitchFamily="34" charset="0"/>
+                <a:cs typeface="+mn-cs"/>
+              </a:defRPr>
+            </a:pPr>
+            <a:endParaRPr lang="en-US"/>
+          </a:p>
+        </c:txPr>
+      </c:dTable>
       <c:spPr>
         <a:noFill/>
         <a:ln>
@@ -3153,26 +2834,9 @@
     <c:showDLblsOverMax val="1"/>
   </c:chart>
   <c:spPr>
-    <a:gradFill flip="none" rotWithShape="1">
-      <a:gsLst>
-        <a:gs pos="0">
-          <a:schemeClr val="dk1">
-            <a:lumMod val="65000"/>
-            <a:lumOff val="35000"/>
-          </a:schemeClr>
-        </a:gs>
-        <a:gs pos="100000">
-          <a:schemeClr val="dk1">
-            <a:lumMod val="85000"/>
-            <a:lumOff val="15000"/>
-          </a:schemeClr>
-        </a:gs>
-      </a:gsLst>
-      <a:path path="circle">
-        <a:fillToRect l="50000" t="50000" r="50000" b="50000"/>
-      </a:path>
-      <a:tileRect/>
-    </a:gradFill>
+    <a:solidFill>
+      <a:schemeClr val="tx1"/>
+    </a:solidFill>
     <a:ln>
       <a:noFill/>
     </a:ln>
@@ -3197,7 +2861,7 @@
 </c:chartSpace>
 </file>
 
-<file path=ppt/charts/chart7.xml><?xml version="1.0" encoding="utf-8"?>
+<file path=ppt/charts/chart6.xml><?xml version="1.0" encoding="utf-8"?>
 <c:chartSpace xmlns:c="http://schemas.openxmlformats.org/drawingml/2006/chart" xmlns:a="http://schemas.openxmlformats.org/drawingml/2006/main" xmlns:r="http://schemas.openxmlformats.org/officeDocument/2006/relationships" xmlns:c16r2="http://schemas.microsoft.com/office/drawing/2015/06/chart">
   <c:date1904 val="0"/>
   <c:lang val="en-US"/>
@@ -3220,9 +2884,7 @@
             <a:pPr>
               <a:defRPr sz="2128" b="1" i="0" u="none" strike="noStrike" kern="1200" spc="100" baseline="0">
                 <a:solidFill>
-                  <a:schemeClr val="lt1">
-                    <a:lumMod val="95000"/>
-                  </a:schemeClr>
+                  <a:schemeClr val="bg1"/>
                 </a:solidFill>
                 <a:effectLst>
                   <a:outerShdw blurRad="50800" dist="38100" dir="5400000" algn="t" rotWithShape="0">
@@ -3237,7 +2899,11 @@
               </a:defRPr>
             </a:pPr>
             <a:r>
-              <a:rPr lang="en-IN"/>
+              <a:rPr lang="en-IN">
+                <a:solidFill>
+                  <a:schemeClr val="bg1"/>
+                </a:solidFill>
+              </a:rPr>
               <a:t>Revenue Comparison</a:t>
             </a:r>
           </a:p>
@@ -3251,32 +2917,6 @@
         </a:ln>
         <a:effectLst/>
       </c:spPr>
-      <c:txPr>
-        <a:bodyPr rot="0" spcFirstLastPara="1" vertOverflow="ellipsis" vert="horz" wrap="square" anchor="ctr" anchorCtr="1"/>
-        <a:lstStyle/>
-        <a:p>
-          <a:pPr>
-            <a:defRPr sz="2128" b="1" i="0" u="none" strike="noStrike" kern="1200" spc="100" baseline="0">
-              <a:solidFill>
-                <a:schemeClr val="lt1">
-                  <a:lumMod val="95000"/>
-                </a:schemeClr>
-              </a:solidFill>
-              <a:effectLst>
-                <a:outerShdw blurRad="50800" dist="38100" dir="5400000" algn="t" rotWithShape="0">
-                  <a:prstClr val="black">
-                    <a:alpha val="40000"/>
-                  </a:prstClr>
-                </a:outerShdw>
-              </a:effectLst>
-              <a:latin typeface="Gadugi" panose="020B0502040204020203" pitchFamily="34" charset="0"/>
-              <a:ea typeface="Gadugi" panose="020B0502040204020203" pitchFamily="34" charset="0"/>
-              <a:cs typeface="+mn-cs"/>
-            </a:defRPr>
-          </a:pPr>
-          <a:endParaRPr lang="en-US"/>
-        </a:p>
-      </c:txPr>
     </c:title>
     <c:autoTitleDeleted val="0"/>
     <c:plotArea>
@@ -3300,25 +2940,9 @@
             </c:strRef>
           </c:tx>
           <c:spPr>
-            <a:gradFill rotWithShape="1">
-              <a:gsLst>
-                <a:gs pos="0">
-                  <a:schemeClr val="accent1">
-                    <a:tint val="100000"/>
-                    <a:shade val="100000"/>
-                    <a:satMod val="130000"/>
-                  </a:schemeClr>
-                </a:gs>
-                <a:gs pos="100000">
-                  <a:schemeClr val="accent1">
-                    <a:tint val="50000"/>
-                    <a:shade val="100000"/>
-                    <a:satMod val="350000"/>
-                  </a:schemeClr>
-                </a:gs>
-              </a:gsLst>
-              <a:lin ang="16200000" scaled="0"/>
-            </a:gradFill>
+            <a:solidFill>
+              <a:srgbClr val="008080"/>
+            </a:solidFill>
             <a:ln>
               <a:noFill/>
             </a:ln>
@@ -3384,6 +3008,36 @@
             </c:numRef>
           </c:val>
           <c:extLst>
+            <c:ext xmlns:c14="http://schemas.microsoft.com/office/drawing/2007/8/2/chart" uri="{6F2FDCE9-48DA-4B69-8628-5D25D57E5C99}">
+              <c14:invertSolidFillFmt>
+                <c14:spPr xmlns:c14="http://schemas.microsoft.com/office/drawing/2007/8/2/chart">
+                  <a:solidFill>
+                    <a:srgbClr val="4A452A"/>
+                  </a:solidFill>
+                  <a:ln>
+                    <a:noFill/>
+                  </a:ln>
+                  <a:effectLst>
+                    <a:outerShdw blurRad="40000" dist="23000" dir="5400000" rotWithShape="0">
+                      <a:srgbClr val="000000">
+                        <a:alpha val="35000"/>
+                      </a:srgbClr>
+                    </a:outerShdw>
+                  </a:effectLst>
+                  <a:scene3d>
+                    <a:camera prst="orthographicFront">
+                      <a:rot lat="0" lon="0" rev="0"/>
+                    </a:camera>
+                    <a:lightRig rig="threePt" dir="t">
+                      <a:rot lat="0" lon="0" rev="1200000"/>
+                    </a:lightRig>
+                  </a:scene3d>
+                  <a:sp3d>
+                    <a:bevelT w="63500" h="25400"/>
+                  </a:sp3d>
+                </c14:spPr>
+              </c14:invertSolidFillFmt>
+            </c:ext>
             <c:ext xmlns:c16="http://schemas.microsoft.com/office/drawing/2014/chart" uri="{C3380CC4-5D6E-409C-BE32-E72D297353CC}">
               <c16:uniqueId val="{00000000-8D1B-4CD4-9A8F-F08584A7FEB2}"/>
             </c:ext>
@@ -3404,25 +3058,9 @@
             </c:strRef>
           </c:tx>
           <c:spPr>
-            <a:gradFill rotWithShape="1">
-              <a:gsLst>
-                <a:gs pos="0">
-                  <a:schemeClr val="accent2">
-                    <a:tint val="100000"/>
-                    <a:shade val="100000"/>
-                    <a:satMod val="130000"/>
-                  </a:schemeClr>
-                </a:gs>
-                <a:gs pos="100000">
-                  <a:schemeClr val="accent2">
-                    <a:tint val="50000"/>
-                    <a:shade val="100000"/>
-                    <a:satMod val="350000"/>
-                  </a:schemeClr>
-                </a:gs>
-              </a:gsLst>
-              <a:lin ang="16200000" scaled="0"/>
-            </a:gradFill>
+            <a:solidFill>
+              <a:srgbClr val="660066"/>
+            </a:solidFill>
             <a:ln>
               <a:noFill/>
             </a:ln>
@@ -3488,6 +3126,36 @@
             </c:numRef>
           </c:val>
           <c:extLst>
+            <c:ext xmlns:c14="http://schemas.microsoft.com/office/drawing/2007/8/2/chart" uri="{6F2FDCE9-48DA-4B69-8628-5D25D57E5C99}">
+              <c14:invertSolidFillFmt>
+                <c14:spPr xmlns:c14="http://schemas.microsoft.com/office/drawing/2007/8/2/chart">
+                  <a:solidFill>
+                    <a:srgbClr val="663300"/>
+                  </a:solidFill>
+                  <a:ln>
+                    <a:noFill/>
+                  </a:ln>
+                  <a:effectLst>
+                    <a:outerShdw blurRad="40000" dist="23000" dir="5400000" rotWithShape="0">
+                      <a:srgbClr val="000000">
+                        <a:alpha val="35000"/>
+                      </a:srgbClr>
+                    </a:outerShdw>
+                  </a:effectLst>
+                  <a:scene3d>
+                    <a:camera prst="orthographicFront">
+                      <a:rot lat="0" lon="0" rev="0"/>
+                    </a:camera>
+                    <a:lightRig rig="threePt" dir="t">
+                      <a:rot lat="0" lon="0" rev="1200000"/>
+                    </a:lightRig>
+                  </a:scene3d>
+                  <a:sp3d>
+                    <a:bevelT w="63500" h="25400"/>
+                  </a:sp3d>
+                </c14:spPr>
+              </c14:invertSolidFillFmt>
+            </c:ext>
             <c:ext xmlns:c16="http://schemas.microsoft.com/office/drawing/2014/chart" uri="{C3380CC4-5D6E-409C-BE32-E72D297353CC}">
               <c16:uniqueId val="{00000001-8D1B-4CD4-9A8F-F08584A7FEB2}"/>
             </c:ext>
@@ -3501,8 +3169,7 @@
           <c:showPercent val="0"/>
           <c:showBubbleSize val="0"/>
         </c:dLbls>
-        <c:gapWidth val="100"/>
-        <c:overlap val="-24"/>
+        <c:gapWidth val="150"/>
         <c:axId val="-2068027336"/>
         <c:axId val="-2113994440"/>
       </c:barChart>
@@ -3519,14 +3186,8 @@
         <c:tickLblPos val="nextTo"/>
         <c:spPr>
           <a:noFill/>
-          <a:ln w="12700" cap="flat" cmpd="sng" algn="ctr">
-            <a:solidFill>
-              <a:schemeClr val="lt1">
-                <a:lumMod val="95000"/>
-                <a:alpha val="54000"/>
-              </a:schemeClr>
-            </a:solidFill>
-            <a:round/>
+          <a:ln>
+            <a:noFill/>
           </a:ln>
           <a:effectLst/>
         </c:spPr>
@@ -3537,9 +3198,7 @@
             <a:pPr>
               <a:defRPr sz="1197" b="1" i="0" u="none" strike="noStrike" kern="1200" baseline="0">
                 <a:solidFill>
-                  <a:schemeClr val="lt1">
-                    <a:lumMod val="85000"/>
-                  </a:schemeClr>
+                  <a:schemeClr val="bg1"/>
                 </a:solidFill>
                 <a:latin typeface="Gadugi" panose="020B0502040204020203" pitchFamily="34" charset="0"/>
                 <a:ea typeface="Gadugi" panose="020B0502040204020203" pitchFamily="34" charset="0"/>
@@ -3569,7 +3228,6 @@
               <a:solidFill>
                 <a:schemeClr val="lt1">
                   <a:lumMod val="95000"/>
-                  <a:alpha val="10000"/>
                 </a:schemeClr>
               </a:solidFill>
               <a:round/>
@@ -3595,9 +3253,7 @@
             <a:pPr>
               <a:defRPr sz="1197" b="1" i="0" u="none" strike="noStrike" kern="1200" baseline="0">
                 <a:solidFill>
-                  <a:schemeClr val="lt1">
-                    <a:lumMod val="85000"/>
-                  </a:schemeClr>
+                  <a:schemeClr val="bg1"/>
                 </a:solidFill>
                 <a:latin typeface="Gadugi" panose="020B0502040204020203" pitchFamily="34" charset="0"/>
                 <a:ea typeface="Gadugi" panose="020B0502040204020203" pitchFamily="34" charset="0"/>
@@ -3620,7 +3276,7 @@
       </c:spPr>
     </c:plotArea>
     <c:legend>
-      <c:legendPos val="b"/>
+      <c:legendPos val="r"/>
       <c:overlay val="0"/>
       <c:spPr>
         <a:noFill/>
@@ -3636,9 +3292,7 @@
           <a:pPr>
             <a:defRPr sz="1197" b="1" i="0" u="none" strike="noStrike" kern="1200" baseline="0">
               <a:solidFill>
-                <a:schemeClr val="lt1">
-                  <a:lumMod val="85000"/>
-                </a:schemeClr>
+                <a:schemeClr val="bg1"/>
               </a:solidFill>
               <a:latin typeface="Gadugi" panose="020B0502040204020203" pitchFamily="34" charset="0"/>
               <a:ea typeface="Gadugi" panose="020B0502040204020203" pitchFamily="34" charset="0"/>
@@ -3654,26 +3308,9 @@
     <c:showDLblsOverMax val="1"/>
   </c:chart>
   <c:spPr>
-    <a:gradFill flip="none" rotWithShape="1">
-      <a:gsLst>
-        <a:gs pos="0">
-          <a:schemeClr val="dk1">
-            <a:lumMod val="65000"/>
-            <a:lumOff val="35000"/>
-          </a:schemeClr>
-        </a:gs>
-        <a:gs pos="100000">
-          <a:schemeClr val="dk1">
-            <a:lumMod val="85000"/>
-            <a:lumOff val="15000"/>
-          </a:schemeClr>
-        </a:gs>
-      </a:gsLst>
-      <a:path path="circle">
-        <a:fillToRect l="50000" t="50000" r="50000" b="50000"/>
-      </a:path>
-      <a:tileRect/>
-    </a:gradFill>
+    <a:solidFill>
+      <a:schemeClr val="tx1"/>
+    </a:solidFill>
     <a:ln>
       <a:noFill/>
     </a:ln>
@@ -3692,7 +3329,7 @@
       <a:endParaRPr lang="en-US"/>
     </a:p>
   </c:txPr>
-  <c:externalData r:id="rId3">
+  <c:externalData r:id="rId1">
     <c:autoUpdate val="0"/>
   </c:externalData>
 </c:chartSpace>
@@ -3819,126 +3456,6 @@
 </file>
 
 <file path=ppt/charts/colors4.xml><?xml version="1.0" encoding="utf-8"?>
-<cs:colorStyle xmlns:cs="http://schemas.microsoft.com/office/drawing/2012/chartStyle" xmlns:a="http://schemas.openxmlformats.org/drawingml/2006/main" meth="cycle" id="10">
-  <a:schemeClr val="accent1"/>
-  <a:schemeClr val="accent2"/>
-  <a:schemeClr val="accent3"/>
-  <a:schemeClr val="accent4"/>
-  <a:schemeClr val="accent5"/>
-  <a:schemeClr val="accent6"/>
-  <cs:variation/>
-  <cs:variation>
-    <a:lumMod val="60000"/>
-  </cs:variation>
-  <cs:variation>
-    <a:lumMod val="80000"/>
-    <a:lumOff val="20000"/>
-  </cs:variation>
-  <cs:variation>
-    <a:lumMod val="80000"/>
-  </cs:variation>
-  <cs:variation>
-    <a:lumMod val="60000"/>
-    <a:lumOff val="40000"/>
-  </cs:variation>
-  <cs:variation>
-    <a:lumMod val="50000"/>
-  </cs:variation>
-  <cs:variation>
-    <a:lumMod val="70000"/>
-    <a:lumOff val="30000"/>
-  </cs:variation>
-  <cs:variation>
-    <a:lumMod val="70000"/>
-  </cs:variation>
-  <cs:variation>
-    <a:lumMod val="50000"/>
-    <a:lumOff val="50000"/>
-  </cs:variation>
-</cs:colorStyle>
-</file>
-
-<file path=ppt/charts/colors5.xml><?xml version="1.0" encoding="utf-8"?>
-<cs:colorStyle xmlns:cs="http://schemas.microsoft.com/office/drawing/2012/chartStyle" xmlns:a="http://schemas.openxmlformats.org/drawingml/2006/main" meth="cycle" id="10">
-  <a:schemeClr val="accent1"/>
-  <a:schemeClr val="accent2"/>
-  <a:schemeClr val="accent3"/>
-  <a:schemeClr val="accent4"/>
-  <a:schemeClr val="accent5"/>
-  <a:schemeClr val="accent6"/>
-  <cs:variation/>
-  <cs:variation>
-    <a:lumMod val="60000"/>
-  </cs:variation>
-  <cs:variation>
-    <a:lumMod val="80000"/>
-    <a:lumOff val="20000"/>
-  </cs:variation>
-  <cs:variation>
-    <a:lumMod val="80000"/>
-  </cs:variation>
-  <cs:variation>
-    <a:lumMod val="60000"/>
-    <a:lumOff val="40000"/>
-  </cs:variation>
-  <cs:variation>
-    <a:lumMod val="50000"/>
-  </cs:variation>
-  <cs:variation>
-    <a:lumMod val="70000"/>
-    <a:lumOff val="30000"/>
-  </cs:variation>
-  <cs:variation>
-    <a:lumMod val="70000"/>
-  </cs:variation>
-  <cs:variation>
-    <a:lumMod val="50000"/>
-    <a:lumOff val="50000"/>
-  </cs:variation>
-</cs:colorStyle>
-</file>
-
-<file path=ppt/charts/colors6.xml><?xml version="1.0" encoding="utf-8"?>
-<cs:colorStyle xmlns:cs="http://schemas.microsoft.com/office/drawing/2012/chartStyle" xmlns:a="http://schemas.openxmlformats.org/drawingml/2006/main" meth="cycle" id="10">
-  <a:schemeClr val="accent1"/>
-  <a:schemeClr val="accent2"/>
-  <a:schemeClr val="accent3"/>
-  <a:schemeClr val="accent4"/>
-  <a:schemeClr val="accent5"/>
-  <a:schemeClr val="accent6"/>
-  <cs:variation/>
-  <cs:variation>
-    <a:lumMod val="60000"/>
-  </cs:variation>
-  <cs:variation>
-    <a:lumMod val="80000"/>
-    <a:lumOff val="20000"/>
-  </cs:variation>
-  <cs:variation>
-    <a:lumMod val="80000"/>
-  </cs:variation>
-  <cs:variation>
-    <a:lumMod val="60000"/>
-    <a:lumOff val="40000"/>
-  </cs:variation>
-  <cs:variation>
-    <a:lumMod val="50000"/>
-  </cs:variation>
-  <cs:variation>
-    <a:lumMod val="70000"/>
-    <a:lumOff val="30000"/>
-  </cs:variation>
-  <cs:variation>
-    <a:lumMod val="70000"/>
-  </cs:variation>
-  <cs:variation>
-    <a:lumMod val="50000"/>
-    <a:lumOff val="50000"/>
-  </cs:variation>
-</cs:colorStyle>
-</file>
-
-<file path=ppt/charts/colors7.xml><?xml version="1.0" encoding="utf-8"?>
 <cs:colorStyle xmlns:cs="http://schemas.microsoft.com/office/drawing/2012/chartStyle" xmlns:a="http://schemas.openxmlformats.org/drawingml/2006/main" meth="cycle" id="10">
   <a:schemeClr val="accent1"/>
   <a:schemeClr val="accent2"/>
@@ -4475,7 +3992,7 @@
 </file>
 
 <file path=ppt/charts/style2.xml><?xml version="1.0" encoding="utf-8"?>
-<cs:chartStyle xmlns:cs="http://schemas.microsoft.com/office/drawing/2012/chartStyle" xmlns:a="http://schemas.openxmlformats.org/drawingml/2006/main" id="209">
+<cs:chartStyle xmlns:cs="http://schemas.microsoft.com/office/drawing/2012/chartStyle" xmlns:a="http://schemas.openxmlformats.org/drawingml/2006/main" id="222">
   <cs:axisTitle>
     <cs:lnRef idx="0"/>
     <cs:fillRef idx="0"/>
@@ -4578,7 +4095,7 @@
     </cs:fillRef>
     <cs:effectRef idx="3"/>
     <cs:fontRef idx="minor">
-      <a:schemeClr val="lt1"/>
+      <a:schemeClr val="tx1"/>
     </cs:fontRef>
   </cs:dataPoint>
   <cs:dataPoint3D>
@@ -4588,7 +4105,7 @@
     </cs:fillRef>
     <cs:effectRef idx="3"/>
     <cs:fontRef idx="minor">
-      <a:schemeClr val="lt1"/>
+      <a:schemeClr val="tx1"/>
     </cs:fontRef>
   </cs:dataPoint3D>
   <cs:dataPointLine>
@@ -4598,7 +4115,7 @@
     <cs:fillRef idx="3"/>
     <cs:effectRef idx="3"/>
     <cs:fontRef idx="minor">
-      <a:schemeClr val="lt1"/>
+      <a:schemeClr val="tx1"/>
     </cs:fontRef>
     <cs:spPr>
       <a:ln w="34925" cap="rnd">
@@ -4618,7 +4135,7 @@
     </cs:fillRef>
     <cs:effectRef idx="3"/>
     <cs:fontRef idx="minor">
-      <a:schemeClr val="lt1"/>
+      <a:schemeClr val="tx1"/>
     </cs:fontRef>
     <cs:spPr>
       <a:ln w="9525">
@@ -4629,7 +4146,7 @@
       </a:ln>
     </cs:spPr>
   </cs:dataPointMarker>
-  <cs:dataPointMarkerLayout symbol="circle" size="6"/>
+  <cs:dataPointMarkerLayout size="5"/>
   <cs:dataPointWireframe>
     <cs:lnRef idx="0">
       <cs:styleClr val="auto"/>
@@ -4637,7 +4154,7 @@
     <cs:fillRef idx="3"/>
     <cs:effectRef idx="3"/>
     <cs:fontRef idx="minor">
-      <a:schemeClr val="lt1"/>
+      <a:schemeClr val="tx1"/>
     </cs:fontRef>
     <cs:spPr>
       <a:ln w="9525" cap="rnd">
@@ -4674,7 +4191,7 @@
     <cs:fillRef idx="0"/>
     <cs:effectRef idx="0"/>
     <cs:fontRef idx="minor">
-      <a:schemeClr val="lt1"/>
+      <a:schemeClr val="tx1"/>
     </cs:fontRef>
     <cs:spPr>
       <a:solidFill>
@@ -4698,7 +4215,7 @@
     <cs:fillRef idx="0"/>
     <cs:effectRef idx="0"/>
     <cs:fontRef idx="minor">
-      <a:schemeClr val="lt1"/>
+      <a:schemeClr val="tx1"/>
     </cs:fontRef>
     <cs:spPr>
       <a:ln w="9525">
@@ -4717,7 +4234,7 @@
     <cs:fillRef idx="0"/>
     <cs:effectRef idx="0"/>
     <cs:fontRef idx="minor">
-      <a:schemeClr val="lt1"/>
+      <a:schemeClr val="tx1"/>
     </cs:fontRef>
     <cs:spPr>
       <a:ln w="9525" cap="flat" cmpd="sng" algn="ctr">
@@ -4735,7 +4252,7 @@
     <cs:fillRef idx="0"/>
     <cs:effectRef idx="0"/>
     <cs:fontRef idx="minor">
-      <a:schemeClr val="lt1"/>
+      <a:schemeClr val="tx1"/>
     </cs:fontRef>
   </cs:floor>
   <cs:gridlineMajor>
@@ -4743,7 +4260,7 @@
     <cs:fillRef idx="0"/>
     <cs:effectRef idx="0"/>
     <cs:fontRef idx="minor">
-      <a:schemeClr val="lt1"/>
+      <a:schemeClr val="tx1"/>
     </cs:fontRef>
     <cs:spPr>
       <a:ln w="9525" cap="flat" cmpd="sng" algn="ctr">
@@ -4762,7 +4279,7 @@
     <cs:fillRef idx="0"/>
     <cs:effectRef idx="0"/>
     <cs:fontRef idx="minor">
-      <a:schemeClr val="lt1"/>
+      <a:schemeClr val="tx1"/>
     </cs:fontRef>
     <cs:spPr>
       <a:ln>
@@ -4780,7 +4297,7 @@
     <cs:fillRef idx="0"/>
     <cs:effectRef idx="0"/>
     <cs:fontRef idx="minor">
-      <a:schemeClr val="lt1"/>
+      <a:schemeClr val="tx1"/>
     </cs:fontRef>
     <cs:spPr>
       <a:ln w="9525">
@@ -4799,7 +4316,7 @@
     <cs:fillRef idx="0"/>
     <cs:effectRef idx="0"/>
     <cs:fontRef idx="minor">
-      <a:schemeClr val="lt1"/>
+      <a:schemeClr val="tx1"/>
     </cs:fontRef>
     <cs:spPr>
       <a:ln w="9525">
@@ -4828,7 +4345,7 @@
     <cs:fillRef idx="0"/>
     <cs:effectRef idx="0"/>
     <cs:fontRef idx="minor">
-      <a:schemeClr val="lt1"/>
+      <a:schemeClr val="tx1"/>
     </cs:fontRef>
   </cs:plotArea>
   <cs:plotArea3D>
@@ -4836,7 +4353,7 @@
     <cs:fillRef idx="0"/>
     <cs:effectRef idx="0"/>
     <cs:fontRef idx="minor">
-      <a:schemeClr val="lt1"/>
+      <a:schemeClr val="tx1"/>
     </cs:fontRef>
   </cs:plotArea3D>
   <cs:seriesAxis>
@@ -4906,7 +4423,7 @@
     <cs:fillRef idx="0"/>
     <cs:effectRef idx="0"/>
     <cs:fontRef idx="minor">
-      <a:schemeClr val="lt1"/>
+      <a:schemeClr val="tx1"/>
     </cs:fontRef>
     <cs:spPr>
       <a:ln w="19050" cap="rnd">
@@ -4932,7 +4449,7 @@
     <cs:fillRef idx="0"/>
     <cs:effectRef idx="0"/>
     <cs:fontRef idx="minor">
-      <a:schemeClr val="lt1"/>
+      <a:schemeClr val="tx1"/>
     </cs:fontRef>
     <cs:spPr>
       <a:solidFill>
@@ -4964,7 +4481,7 @@
     <cs:fillRef idx="0"/>
     <cs:effectRef idx="0"/>
     <cs:fontRef idx="minor">
-      <a:schemeClr val="lt1"/>
+      <a:schemeClr val="tx1"/>
     </cs:fontRef>
   </cs:wall>
 </cs:chartStyle>
@@ -5467,1494 +4984,6 @@
 </file>
 
 <file path=ppt/charts/style4.xml><?xml version="1.0" encoding="utf-8"?>
-<cs:chartStyle xmlns:cs="http://schemas.microsoft.com/office/drawing/2012/chartStyle" xmlns:a="http://schemas.openxmlformats.org/drawingml/2006/main" id="222">
-  <cs:axisTitle>
-    <cs:lnRef idx="0"/>
-    <cs:fillRef idx="0"/>
-    <cs:effectRef idx="0"/>
-    <cs:fontRef idx="minor">
-      <a:schemeClr val="lt1">
-        <a:lumMod val="85000"/>
-      </a:schemeClr>
-    </cs:fontRef>
-    <cs:defRPr sz="1197" b="1" kern="1200" cap="all"/>
-  </cs:axisTitle>
-  <cs:categoryAxis>
-    <cs:lnRef idx="0"/>
-    <cs:fillRef idx="0"/>
-    <cs:effectRef idx="0"/>
-    <cs:fontRef idx="minor">
-      <a:schemeClr val="lt1">
-        <a:lumMod val="85000"/>
-      </a:schemeClr>
-    </cs:fontRef>
-    <cs:spPr>
-      <a:ln w="12700" cap="flat" cmpd="sng" algn="ctr">
-        <a:solidFill>
-          <a:schemeClr val="lt1">
-            <a:lumMod val="95000"/>
-            <a:alpha val="54000"/>
-          </a:schemeClr>
-        </a:solidFill>
-        <a:round/>
-      </a:ln>
-    </cs:spPr>
-    <cs:defRPr sz="1197" kern="1200"/>
-  </cs:categoryAxis>
-  <cs:chartArea>
-    <cs:lnRef idx="0"/>
-    <cs:fillRef idx="0"/>
-    <cs:effectRef idx="0"/>
-    <cs:fontRef idx="minor">
-      <a:schemeClr val="dk1"/>
-    </cs:fontRef>
-    <cs:spPr>
-      <a:gradFill flip="none" rotWithShape="1">
-        <a:gsLst>
-          <a:gs pos="0">
-            <a:schemeClr val="dk1">
-              <a:lumMod val="65000"/>
-              <a:lumOff val="35000"/>
-            </a:schemeClr>
-          </a:gs>
-          <a:gs pos="100000">
-            <a:schemeClr val="dk1">
-              <a:lumMod val="85000"/>
-              <a:lumOff val="15000"/>
-            </a:schemeClr>
-          </a:gs>
-        </a:gsLst>
-        <a:path path="circle">
-          <a:fillToRect l="50000" t="50000" r="50000" b="50000"/>
-        </a:path>
-        <a:tileRect/>
-      </a:gradFill>
-    </cs:spPr>
-    <cs:defRPr sz="1330" kern="1200"/>
-  </cs:chartArea>
-  <cs:dataLabel>
-    <cs:lnRef idx="0"/>
-    <cs:fillRef idx="0"/>
-    <cs:effectRef idx="0"/>
-    <cs:fontRef idx="minor">
-      <a:schemeClr val="lt1">
-        <a:lumMod val="85000"/>
-      </a:schemeClr>
-    </cs:fontRef>
-    <cs:defRPr sz="1197" kern="1200"/>
-  </cs:dataLabel>
-  <cs:dataLabelCallout>
-    <cs:lnRef idx="0"/>
-    <cs:fillRef idx="0"/>
-    <cs:effectRef idx="0"/>
-    <cs:fontRef idx="minor">
-      <a:schemeClr val="dk1">
-        <a:lumMod val="65000"/>
-        <a:lumOff val="35000"/>
-      </a:schemeClr>
-    </cs:fontRef>
-    <cs:spPr>
-      <a:solidFill>
-        <a:schemeClr val="lt1"/>
-      </a:solidFill>
-    </cs:spPr>
-    <cs:defRPr sz="1197" kern="1200"/>
-    <cs:bodyPr rot="0" spcFirstLastPara="1" vertOverflow="clip" horzOverflow="clip" vert="horz" wrap="square" lIns="36576" tIns="18288" rIns="36576" bIns="18288" anchor="ctr" anchorCtr="1">
-      <a:spAutoFit/>
-    </cs:bodyPr>
-  </cs:dataLabelCallout>
-  <cs:dataPoint>
-    <cs:lnRef idx="0"/>
-    <cs:fillRef idx="3">
-      <cs:styleClr val="auto"/>
-    </cs:fillRef>
-    <cs:effectRef idx="3"/>
-    <cs:fontRef idx="minor">
-      <a:schemeClr val="tx1"/>
-    </cs:fontRef>
-  </cs:dataPoint>
-  <cs:dataPoint3D>
-    <cs:lnRef idx="0"/>
-    <cs:fillRef idx="3">
-      <cs:styleClr val="auto"/>
-    </cs:fillRef>
-    <cs:effectRef idx="3"/>
-    <cs:fontRef idx="minor">
-      <a:schemeClr val="tx1"/>
-    </cs:fontRef>
-  </cs:dataPoint3D>
-  <cs:dataPointLine>
-    <cs:lnRef idx="0">
-      <cs:styleClr val="auto"/>
-    </cs:lnRef>
-    <cs:fillRef idx="3"/>
-    <cs:effectRef idx="3"/>
-    <cs:fontRef idx="minor">
-      <a:schemeClr val="tx1"/>
-    </cs:fontRef>
-    <cs:spPr>
-      <a:ln w="34925" cap="rnd">
-        <a:solidFill>
-          <a:schemeClr val="phClr"/>
-        </a:solidFill>
-        <a:round/>
-      </a:ln>
-    </cs:spPr>
-  </cs:dataPointLine>
-  <cs:dataPointMarker>
-    <cs:lnRef idx="0">
-      <cs:styleClr val="auto"/>
-    </cs:lnRef>
-    <cs:fillRef idx="3">
-      <cs:styleClr val="auto"/>
-    </cs:fillRef>
-    <cs:effectRef idx="3"/>
-    <cs:fontRef idx="minor">
-      <a:schemeClr val="tx1"/>
-    </cs:fontRef>
-    <cs:spPr>
-      <a:ln w="9525">
-        <a:solidFill>
-          <a:schemeClr val="phClr"/>
-        </a:solidFill>
-        <a:round/>
-      </a:ln>
-    </cs:spPr>
-  </cs:dataPointMarker>
-  <cs:dataPointMarkerLayout size="5"/>
-  <cs:dataPointWireframe>
-    <cs:lnRef idx="0">
-      <cs:styleClr val="auto"/>
-    </cs:lnRef>
-    <cs:fillRef idx="3"/>
-    <cs:effectRef idx="3"/>
-    <cs:fontRef idx="minor">
-      <a:schemeClr val="tx1"/>
-    </cs:fontRef>
-    <cs:spPr>
-      <a:ln w="9525" cap="rnd">
-        <a:solidFill>
-          <a:schemeClr val="phClr"/>
-        </a:solidFill>
-        <a:round/>
-      </a:ln>
-    </cs:spPr>
-  </cs:dataPointWireframe>
-  <cs:dataTable>
-    <cs:lnRef idx="0"/>
-    <cs:fillRef idx="0"/>
-    <cs:effectRef idx="0"/>
-    <cs:fontRef idx="minor">
-      <a:schemeClr val="lt1">
-        <a:lumMod val="85000"/>
-      </a:schemeClr>
-    </cs:fontRef>
-    <cs:spPr>
-      <a:ln w="9525">
-        <a:solidFill>
-          <a:schemeClr val="lt1">
-            <a:lumMod val="95000"/>
-            <a:alpha val="54000"/>
-          </a:schemeClr>
-        </a:solidFill>
-      </a:ln>
-    </cs:spPr>
-    <cs:defRPr sz="1197" kern="1200"/>
-  </cs:dataTable>
-  <cs:downBar>
-    <cs:lnRef idx="0"/>
-    <cs:fillRef idx="0"/>
-    <cs:effectRef idx="0"/>
-    <cs:fontRef idx="minor">
-      <a:schemeClr val="tx1"/>
-    </cs:fontRef>
-    <cs:spPr>
-      <a:solidFill>
-        <a:schemeClr val="dk1">
-          <a:lumMod val="75000"/>
-          <a:lumOff val="25000"/>
-        </a:schemeClr>
-      </a:solidFill>
-      <a:ln w="9525">
-        <a:solidFill>
-          <a:schemeClr val="lt1">
-            <a:lumMod val="95000"/>
-            <a:alpha val="54000"/>
-          </a:schemeClr>
-        </a:solidFill>
-      </a:ln>
-    </cs:spPr>
-  </cs:downBar>
-  <cs:dropLine>
-    <cs:lnRef idx="0"/>
-    <cs:fillRef idx="0"/>
-    <cs:effectRef idx="0"/>
-    <cs:fontRef idx="minor">
-      <a:schemeClr val="tx1"/>
-    </cs:fontRef>
-    <cs:spPr>
-      <a:ln w="9525">
-        <a:solidFill>
-          <a:schemeClr val="lt1">
-            <a:lumMod val="95000"/>
-            <a:alpha val="54000"/>
-          </a:schemeClr>
-        </a:solidFill>
-        <a:prstDash val="dash"/>
-      </a:ln>
-    </cs:spPr>
-  </cs:dropLine>
-  <cs:errorBar>
-    <cs:lnRef idx="0"/>
-    <cs:fillRef idx="0"/>
-    <cs:effectRef idx="0"/>
-    <cs:fontRef idx="minor">
-      <a:schemeClr val="tx1"/>
-    </cs:fontRef>
-    <cs:spPr>
-      <a:ln w="9525" cap="flat" cmpd="sng" algn="ctr">
-        <a:solidFill>
-          <a:schemeClr val="lt1">
-            <a:lumMod val="95000"/>
-          </a:schemeClr>
-        </a:solidFill>
-        <a:round/>
-      </a:ln>
-    </cs:spPr>
-  </cs:errorBar>
-  <cs:floor>
-    <cs:lnRef idx="0"/>
-    <cs:fillRef idx="0"/>
-    <cs:effectRef idx="0"/>
-    <cs:fontRef idx="minor">
-      <a:schemeClr val="tx1"/>
-    </cs:fontRef>
-  </cs:floor>
-  <cs:gridlineMajor>
-    <cs:lnRef idx="0"/>
-    <cs:fillRef idx="0"/>
-    <cs:effectRef idx="0"/>
-    <cs:fontRef idx="minor">
-      <a:schemeClr val="tx1"/>
-    </cs:fontRef>
-    <cs:spPr>
-      <a:ln w="9525" cap="flat" cmpd="sng" algn="ctr">
-        <a:solidFill>
-          <a:schemeClr val="lt1">
-            <a:lumMod val="95000"/>
-            <a:alpha val="10000"/>
-          </a:schemeClr>
-        </a:solidFill>
-        <a:round/>
-      </a:ln>
-    </cs:spPr>
-  </cs:gridlineMajor>
-  <cs:gridlineMinor>
-    <cs:lnRef idx="0"/>
-    <cs:fillRef idx="0"/>
-    <cs:effectRef idx="0"/>
-    <cs:fontRef idx="minor">
-      <a:schemeClr val="tx1"/>
-    </cs:fontRef>
-    <cs:spPr>
-      <a:ln>
-        <a:solidFill>
-          <a:schemeClr val="lt1">
-            <a:lumMod val="95000"/>
-            <a:alpha val="5000"/>
-          </a:schemeClr>
-        </a:solidFill>
-      </a:ln>
-    </cs:spPr>
-  </cs:gridlineMinor>
-  <cs:hiLoLine>
-    <cs:lnRef idx="0"/>
-    <cs:fillRef idx="0"/>
-    <cs:effectRef idx="0"/>
-    <cs:fontRef idx="minor">
-      <a:schemeClr val="tx1"/>
-    </cs:fontRef>
-    <cs:spPr>
-      <a:ln w="9525">
-        <a:solidFill>
-          <a:schemeClr val="lt1">
-            <a:lumMod val="95000"/>
-            <a:alpha val="54000"/>
-          </a:schemeClr>
-        </a:solidFill>
-        <a:prstDash val="dash"/>
-      </a:ln>
-    </cs:spPr>
-  </cs:hiLoLine>
-  <cs:leaderLine>
-    <cs:lnRef idx="0"/>
-    <cs:fillRef idx="0"/>
-    <cs:effectRef idx="0"/>
-    <cs:fontRef idx="minor">
-      <a:schemeClr val="tx1"/>
-    </cs:fontRef>
-    <cs:spPr>
-      <a:ln w="9525">
-        <a:solidFill>
-          <a:schemeClr val="lt1">
-            <a:lumMod val="95000"/>
-            <a:alpha val="54000"/>
-          </a:schemeClr>
-        </a:solidFill>
-      </a:ln>
-    </cs:spPr>
-  </cs:leaderLine>
-  <cs:legend>
-    <cs:lnRef idx="0"/>
-    <cs:fillRef idx="0"/>
-    <cs:effectRef idx="0"/>
-    <cs:fontRef idx="minor">
-      <a:schemeClr val="lt1">
-        <a:lumMod val="85000"/>
-      </a:schemeClr>
-    </cs:fontRef>
-    <cs:defRPr sz="1197" kern="1200"/>
-  </cs:legend>
-  <cs:plotArea>
-    <cs:lnRef idx="0"/>
-    <cs:fillRef idx="0"/>
-    <cs:effectRef idx="0"/>
-    <cs:fontRef idx="minor">
-      <a:schemeClr val="tx1"/>
-    </cs:fontRef>
-  </cs:plotArea>
-  <cs:plotArea3D>
-    <cs:lnRef idx="0"/>
-    <cs:fillRef idx="0"/>
-    <cs:effectRef idx="0"/>
-    <cs:fontRef idx="minor">
-      <a:schemeClr val="tx1"/>
-    </cs:fontRef>
-  </cs:plotArea3D>
-  <cs:seriesAxis>
-    <cs:lnRef idx="0"/>
-    <cs:fillRef idx="0"/>
-    <cs:effectRef idx="0"/>
-    <cs:fontRef idx="minor">
-      <a:schemeClr val="lt1">
-        <a:lumMod val="85000"/>
-      </a:schemeClr>
-    </cs:fontRef>
-    <cs:spPr>
-      <a:ln w="12700" cap="flat" cmpd="sng" algn="ctr">
-        <a:solidFill>
-          <a:schemeClr val="lt1">
-            <a:lumMod val="95000"/>
-            <a:alpha val="54000"/>
-          </a:schemeClr>
-        </a:solidFill>
-        <a:round/>
-      </a:ln>
-    </cs:spPr>
-    <cs:defRPr sz="1197" kern="1200"/>
-  </cs:seriesAxis>
-  <cs:seriesLine>
-    <cs:lnRef idx="0"/>
-    <cs:fillRef idx="0"/>
-    <cs:effectRef idx="0"/>
-    <cs:fontRef idx="minor">
-      <a:schemeClr val="lt1"/>
-    </cs:fontRef>
-    <cs:spPr>
-      <a:ln w="9525" cap="flat" cmpd="sng" algn="ctr">
-        <a:solidFill>
-          <a:schemeClr val="lt1">
-            <a:lumMod val="95000"/>
-            <a:alpha val="54000"/>
-          </a:schemeClr>
-        </a:solidFill>
-        <a:round/>
-      </a:ln>
-    </cs:spPr>
-  </cs:seriesLine>
-  <cs:title>
-    <cs:lnRef idx="0"/>
-    <cs:fillRef idx="0"/>
-    <cs:effectRef idx="0"/>
-    <cs:fontRef idx="minor">
-      <a:schemeClr val="lt1">
-        <a:lumMod val="95000"/>
-      </a:schemeClr>
-    </cs:fontRef>
-    <cs:defRPr sz="2128" b="1" kern="1200" spc="100" baseline="0">
-      <a:effectLst>
-        <a:outerShdw blurRad="50800" dist="38100" dir="5400000" algn="t" rotWithShape="0">
-          <a:prstClr val="black">
-            <a:alpha val="40000"/>
-          </a:prstClr>
-        </a:outerShdw>
-      </a:effectLst>
-    </cs:defRPr>
-  </cs:title>
-  <cs:trendline>
-    <cs:lnRef idx="0">
-      <cs:styleClr val="auto"/>
-    </cs:lnRef>
-    <cs:fillRef idx="0"/>
-    <cs:effectRef idx="0"/>
-    <cs:fontRef idx="minor">
-      <a:schemeClr val="tx1"/>
-    </cs:fontRef>
-    <cs:spPr>
-      <a:ln w="19050" cap="rnd">
-        <a:solidFill>
-          <a:schemeClr val="phClr"/>
-        </a:solidFill>
-      </a:ln>
-    </cs:spPr>
-  </cs:trendline>
-  <cs:trendlineLabel>
-    <cs:lnRef idx="0"/>
-    <cs:fillRef idx="0"/>
-    <cs:effectRef idx="0"/>
-    <cs:fontRef idx="minor">
-      <a:schemeClr val="lt1">
-        <a:lumMod val="85000"/>
-      </a:schemeClr>
-    </cs:fontRef>
-    <cs:defRPr sz="1197" kern="1200"/>
-  </cs:trendlineLabel>
-  <cs:upBar>
-    <cs:lnRef idx="0"/>
-    <cs:fillRef idx="0"/>
-    <cs:effectRef idx="0"/>
-    <cs:fontRef idx="minor">
-      <a:schemeClr val="tx1"/>
-    </cs:fontRef>
-    <cs:spPr>
-      <a:solidFill>
-        <a:schemeClr val="lt1"/>
-      </a:solidFill>
-      <a:ln w="9525">
-        <a:solidFill>
-          <a:schemeClr val="lt1">
-            <a:lumMod val="95000"/>
-            <a:alpha val="54000"/>
-          </a:schemeClr>
-        </a:solidFill>
-      </a:ln>
-    </cs:spPr>
-  </cs:upBar>
-  <cs:valueAxis>
-    <cs:lnRef idx="0"/>
-    <cs:fillRef idx="0"/>
-    <cs:effectRef idx="0"/>
-    <cs:fontRef idx="minor">
-      <a:schemeClr val="lt1">
-        <a:lumMod val="85000"/>
-      </a:schemeClr>
-    </cs:fontRef>
-    <cs:defRPr sz="1197" kern="1200"/>
-  </cs:valueAxis>
-  <cs:wall>
-    <cs:lnRef idx="0"/>
-    <cs:fillRef idx="0"/>
-    <cs:effectRef idx="0"/>
-    <cs:fontRef idx="minor">
-      <a:schemeClr val="tx1"/>
-    </cs:fontRef>
-  </cs:wall>
-</cs:chartStyle>
-</file>
-
-<file path=ppt/charts/style5.xml><?xml version="1.0" encoding="utf-8"?>
-<cs:chartStyle xmlns:cs="http://schemas.microsoft.com/office/drawing/2012/chartStyle" xmlns:a="http://schemas.openxmlformats.org/drawingml/2006/main" id="209">
-  <cs:axisTitle>
-    <cs:lnRef idx="0"/>
-    <cs:fillRef idx="0"/>
-    <cs:effectRef idx="0"/>
-    <cs:fontRef idx="minor">
-      <a:schemeClr val="lt1">
-        <a:lumMod val="85000"/>
-      </a:schemeClr>
-    </cs:fontRef>
-    <cs:defRPr sz="1197" b="1" kern="1200" cap="all"/>
-  </cs:axisTitle>
-  <cs:categoryAxis>
-    <cs:lnRef idx="0"/>
-    <cs:fillRef idx="0"/>
-    <cs:effectRef idx="0"/>
-    <cs:fontRef idx="minor">
-      <a:schemeClr val="lt1">
-        <a:lumMod val="85000"/>
-      </a:schemeClr>
-    </cs:fontRef>
-    <cs:spPr>
-      <a:ln w="12700" cap="flat" cmpd="sng" algn="ctr">
-        <a:solidFill>
-          <a:schemeClr val="lt1">
-            <a:lumMod val="95000"/>
-            <a:alpha val="54000"/>
-          </a:schemeClr>
-        </a:solidFill>
-        <a:round/>
-      </a:ln>
-    </cs:spPr>
-    <cs:defRPr sz="1197" kern="1200"/>
-  </cs:categoryAxis>
-  <cs:chartArea>
-    <cs:lnRef idx="0"/>
-    <cs:fillRef idx="0"/>
-    <cs:effectRef idx="0"/>
-    <cs:fontRef idx="minor">
-      <a:schemeClr val="dk1"/>
-    </cs:fontRef>
-    <cs:spPr>
-      <a:gradFill flip="none" rotWithShape="1">
-        <a:gsLst>
-          <a:gs pos="0">
-            <a:schemeClr val="dk1">
-              <a:lumMod val="65000"/>
-              <a:lumOff val="35000"/>
-            </a:schemeClr>
-          </a:gs>
-          <a:gs pos="100000">
-            <a:schemeClr val="dk1">
-              <a:lumMod val="85000"/>
-              <a:lumOff val="15000"/>
-            </a:schemeClr>
-          </a:gs>
-        </a:gsLst>
-        <a:path path="circle">
-          <a:fillToRect l="50000" t="50000" r="50000" b="50000"/>
-        </a:path>
-        <a:tileRect/>
-      </a:gradFill>
-    </cs:spPr>
-    <cs:defRPr sz="1330" kern="1200"/>
-  </cs:chartArea>
-  <cs:dataLabel>
-    <cs:lnRef idx="0"/>
-    <cs:fillRef idx="0"/>
-    <cs:effectRef idx="0"/>
-    <cs:fontRef idx="minor">
-      <a:schemeClr val="lt1">
-        <a:lumMod val="85000"/>
-      </a:schemeClr>
-    </cs:fontRef>
-    <cs:defRPr sz="1197" kern="1200"/>
-  </cs:dataLabel>
-  <cs:dataLabelCallout>
-    <cs:lnRef idx="0"/>
-    <cs:fillRef idx="0"/>
-    <cs:effectRef idx="0"/>
-    <cs:fontRef idx="minor">
-      <a:schemeClr val="dk1">
-        <a:lumMod val="65000"/>
-        <a:lumOff val="35000"/>
-      </a:schemeClr>
-    </cs:fontRef>
-    <cs:spPr>
-      <a:solidFill>
-        <a:schemeClr val="lt1"/>
-      </a:solidFill>
-    </cs:spPr>
-    <cs:defRPr sz="1197" kern="1200"/>
-    <cs:bodyPr rot="0" spcFirstLastPara="1" vertOverflow="clip" horzOverflow="clip" vert="horz" wrap="square" lIns="36576" tIns="18288" rIns="36576" bIns="18288" anchor="ctr" anchorCtr="1">
-      <a:spAutoFit/>
-    </cs:bodyPr>
-  </cs:dataLabelCallout>
-  <cs:dataPoint>
-    <cs:lnRef idx="0"/>
-    <cs:fillRef idx="3">
-      <cs:styleClr val="auto"/>
-    </cs:fillRef>
-    <cs:effectRef idx="3"/>
-    <cs:fontRef idx="minor">
-      <a:schemeClr val="lt1"/>
-    </cs:fontRef>
-  </cs:dataPoint>
-  <cs:dataPoint3D>
-    <cs:lnRef idx="0"/>
-    <cs:fillRef idx="3">
-      <cs:styleClr val="auto"/>
-    </cs:fillRef>
-    <cs:effectRef idx="3"/>
-    <cs:fontRef idx="minor">
-      <a:schemeClr val="lt1"/>
-    </cs:fontRef>
-  </cs:dataPoint3D>
-  <cs:dataPointLine>
-    <cs:lnRef idx="0">
-      <cs:styleClr val="auto"/>
-    </cs:lnRef>
-    <cs:fillRef idx="3"/>
-    <cs:effectRef idx="3"/>
-    <cs:fontRef idx="minor">
-      <a:schemeClr val="lt1"/>
-    </cs:fontRef>
-    <cs:spPr>
-      <a:ln w="34925" cap="rnd">
-        <a:solidFill>
-          <a:schemeClr val="phClr"/>
-        </a:solidFill>
-        <a:round/>
-      </a:ln>
-    </cs:spPr>
-  </cs:dataPointLine>
-  <cs:dataPointMarker>
-    <cs:lnRef idx="0">
-      <cs:styleClr val="auto"/>
-    </cs:lnRef>
-    <cs:fillRef idx="3">
-      <cs:styleClr val="auto"/>
-    </cs:fillRef>
-    <cs:effectRef idx="3"/>
-    <cs:fontRef idx="minor">
-      <a:schemeClr val="lt1"/>
-    </cs:fontRef>
-    <cs:spPr>
-      <a:ln w="9525">
-        <a:solidFill>
-          <a:schemeClr val="phClr"/>
-        </a:solidFill>
-        <a:round/>
-      </a:ln>
-    </cs:spPr>
-  </cs:dataPointMarker>
-  <cs:dataPointMarkerLayout symbol="circle" size="6"/>
-  <cs:dataPointWireframe>
-    <cs:lnRef idx="0">
-      <cs:styleClr val="auto"/>
-    </cs:lnRef>
-    <cs:fillRef idx="3"/>
-    <cs:effectRef idx="3"/>
-    <cs:fontRef idx="minor">
-      <a:schemeClr val="lt1"/>
-    </cs:fontRef>
-    <cs:spPr>
-      <a:ln w="9525" cap="rnd">
-        <a:solidFill>
-          <a:schemeClr val="phClr"/>
-        </a:solidFill>
-        <a:round/>
-      </a:ln>
-    </cs:spPr>
-  </cs:dataPointWireframe>
-  <cs:dataTable>
-    <cs:lnRef idx="0"/>
-    <cs:fillRef idx="0"/>
-    <cs:effectRef idx="0"/>
-    <cs:fontRef idx="minor">
-      <a:schemeClr val="lt1">
-        <a:lumMod val="85000"/>
-      </a:schemeClr>
-    </cs:fontRef>
-    <cs:spPr>
-      <a:ln w="9525">
-        <a:solidFill>
-          <a:schemeClr val="lt1">
-            <a:lumMod val="95000"/>
-            <a:alpha val="54000"/>
-          </a:schemeClr>
-        </a:solidFill>
-      </a:ln>
-    </cs:spPr>
-    <cs:defRPr sz="1197" kern="1200"/>
-  </cs:dataTable>
-  <cs:downBar>
-    <cs:lnRef idx="0"/>
-    <cs:fillRef idx="0"/>
-    <cs:effectRef idx="0"/>
-    <cs:fontRef idx="minor">
-      <a:schemeClr val="lt1"/>
-    </cs:fontRef>
-    <cs:spPr>
-      <a:solidFill>
-        <a:schemeClr val="dk1">
-          <a:lumMod val="75000"/>
-          <a:lumOff val="25000"/>
-        </a:schemeClr>
-      </a:solidFill>
-      <a:ln w="9525">
-        <a:solidFill>
-          <a:schemeClr val="lt1">
-            <a:lumMod val="95000"/>
-            <a:alpha val="54000"/>
-          </a:schemeClr>
-        </a:solidFill>
-      </a:ln>
-    </cs:spPr>
-  </cs:downBar>
-  <cs:dropLine>
-    <cs:lnRef idx="0"/>
-    <cs:fillRef idx="0"/>
-    <cs:effectRef idx="0"/>
-    <cs:fontRef idx="minor">
-      <a:schemeClr val="lt1"/>
-    </cs:fontRef>
-    <cs:spPr>
-      <a:ln w="9525">
-        <a:solidFill>
-          <a:schemeClr val="lt1">
-            <a:lumMod val="95000"/>
-            <a:alpha val="54000"/>
-          </a:schemeClr>
-        </a:solidFill>
-        <a:prstDash val="dash"/>
-      </a:ln>
-    </cs:spPr>
-  </cs:dropLine>
-  <cs:errorBar>
-    <cs:lnRef idx="0"/>
-    <cs:fillRef idx="0"/>
-    <cs:effectRef idx="0"/>
-    <cs:fontRef idx="minor">
-      <a:schemeClr val="lt1"/>
-    </cs:fontRef>
-    <cs:spPr>
-      <a:ln w="9525" cap="flat" cmpd="sng" algn="ctr">
-        <a:solidFill>
-          <a:schemeClr val="lt1">
-            <a:lumMod val="95000"/>
-          </a:schemeClr>
-        </a:solidFill>
-        <a:round/>
-      </a:ln>
-    </cs:spPr>
-  </cs:errorBar>
-  <cs:floor>
-    <cs:lnRef idx="0"/>
-    <cs:fillRef idx="0"/>
-    <cs:effectRef idx="0"/>
-    <cs:fontRef idx="minor">
-      <a:schemeClr val="lt1"/>
-    </cs:fontRef>
-  </cs:floor>
-  <cs:gridlineMajor>
-    <cs:lnRef idx="0"/>
-    <cs:fillRef idx="0"/>
-    <cs:effectRef idx="0"/>
-    <cs:fontRef idx="minor">
-      <a:schemeClr val="lt1"/>
-    </cs:fontRef>
-    <cs:spPr>
-      <a:ln w="9525" cap="flat" cmpd="sng" algn="ctr">
-        <a:solidFill>
-          <a:schemeClr val="lt1">
-            <a:lumMod val="95000"/>
-            <a:alpha val="10000"/>
-          </a:schemeClr>
-        </a:solidFill>
-        <a:round/>
-      </a:ln>
-    </cs:spPr>
-  </cs:gridlineMajor>
-  <cs:gridlineMinor>
-    <cs:lnRef idx="0"/>
-    <cs:fillRef idx="0"/>
-    <cs:effectRef idx="0"/>
-    <cs:fontRef idx="minor">
-      <a:schemeClr val="lt1"/>
-    </cs:fontRef>
-    <cs:spPr>
-      <a:ln>
-        <a:solidFill>
-          <a:schemeClr val="lt1">
-            <a:lumMod val="95000"/>
-            <a:alpha val="5000"/>
-          </a:schemeClr>
-        </a:solidFill>
-      </a:ln>
-    </cs:spPr>
-  </cs:gridlineMinor>
-  <cs:hiLoLine>
-    <cs:lnRef idx="0"/>
-    <cs:fillRef idx="0"/>
-    <cs:effectRef idx="0"/>
-    <cs:fontRef idx="minor">
-      <a:schemeClr val="lt1"/>
-    </cs:fontRef>
-    <cs:spPr>
-      <a:ln w="9525">
-        <a:solidFill>
-          <a:schemeClr val="lt1">
-            <a:lumMod val="95000"/>
-            <a:alpha val="54000"/>
-          </a:schemeClr>
-        </a:solidFill>
-        <a:prstDash val="dash"/>
-      </a:ln>
-    </cs:spPr>
-  </cs:hiLoLine>
-  <cs:leaderLine>
-    <cs:lnRef idx="0"/>
-    <cs:fillRef idx="0"/>
-    <cs:effectRef idx="0"/>
-    <cs:fontRef idx="minor">
-      <a:schemeClr val="lt1"/>
-    </cs:fontRef>
-    <cs:spPr>
-      <a:ln w="9525">
-        <a:solidFill>
-          <a:schemeClr val="lt1">
-            <a:lumMod val="95000"/>
-            <a:alpha val="54000"/>
-          </a:schemeClr>
-        </a:solidFill>
-      </a:ln>
-    </cs:spPr>
-  </cs:leaderLine>
-  <cs:legend>
-    <cs:lnRef idx="0"/>
-    <cs:fillRef idx="0"/>
-    <cs:effectRef idx="0"/>
-    <cs:fontRef idx="minor">
-      <a:schemeClr val="lt1">
-        <a:lumMod val="85000"/>
-      </a:schemeClr>
-    </cs:fontRef>
-    <cs:defRPr sz="1197" kern="1200"/>
-  </cs:legend>
-  <cs:plotArea>
-    <cs:lnRef idx="0"/>
-    <cs:fillRef idx="0"/>
-    <cs:effectRef idx="0"/>
-    <cs:fontRef idx="minor">
-      <a:schemeClr val="lt1"/>
-    </cs:fontRef>
-  </cs:plotArea>
-  <cs:plotArea3D>
-    <cs:lnRef idx="0"/>
-    <cs:fillRef idx="0"/>
-    <cs:effectRef idx="0"/>
-    <cs:fontRef idx="minor">
-      <a:schemeClr val="lt1"/>
-    </cs:fontRef>
-  </cs:plotArea3D>
-  <cs:seriesAxis>
-    <cs:lnRef idx="0"/>
-    <cs:fillRef idx="0"/>
-    <cs:effectRef idx="0"/>
-    <cs:fontRef idx="minor">
-      <a:schemeClr val="lt1">
-        <a:lumMod val="85000"/>
-      </a:schemeClr>
-    </cs:fontRef>
-    <cs:spPr>
-      <a:ln w="12700" cap="flat" cmpd="sng" algn="ctr">
-        <a:solidFill>
-          <a:schemeClr val="lt1">
-            <a:lumMod val="95000"/>
-            <a:alpha val="54000"/>
-          </a:schemeClr>
-        </a:solidFill>
-        <a:round/>
-      </a:ln>
-    </cs:spPr>
-    <cs:defRPr sz="1197" kern="1200"/>
-  </cs:seriesAxis>
-  <cs:seriesLine>
-    <cs:lnRef idx="0"/>
-    <cs:fillRef idx="0"/>
-    <cs:effectRef idx="0"/>
-    <cs:fontRef idx="minor">
-      <a:schemeClr val="lt1"/>
-    </cs:fontRef>
-    <cs:spPr>
-      <a:ln w="9525" cap="flat" cmpd="sng" algn="ctr">
-        <a:solidFill>
-          <a:schemeClr val="lt1">
-            <a:lumMod val="95000"/>
-            <a:alpha val="54000"/>
-          </a:schemeClr>
-        </a:solidFill>
-        <a:round/>
-      </a:ln>
-    </cs:spPr>
-  </cs:seriesLine>
-  <cs:title>
-    <cs:lnRef idx="0"/>
-    <cs:fillRef idx="0"/>
-    <cs:effectRef idx="0"/>
-    <cs:fontRef idx="minor">
-      <a:schemeClr val="lt1">
-        <a:lumMod val="95000"/>
-      </a:schemeClr>
-    </cs:fontRef>
-    <cs:defRPr sz="2128" b="1" kern="1200" spc="100" baseline="0">
-      <a:effectLst>
-        <a:outerShdw blurRad="50800" dist="38100" dir="5400000" algn="t" rotWithShape="0">
-          <a:prstClr val="black">
-            <a:alpha val="40000"/>
-          </a:prstClr>
-        </a:outerShdw>
-      </a:effectLst>
-    </cs:defRPr>
-  </cs:title>
-  <cs:trendline>
-    <cs:lnRef idx="0">
-      <cs:styleClr val="auto"/>
-    </cs:lnRef>
-    <cs:fillRef idx="0"/>
-    <cs:effectRef idx="0"/>
-    <cs:fontRef idx="minor">
-      <a:schemeClr val="lt1"/>
-    </cs:fontRef>
-    <cs:spPr>
-      <a:ln w="19050" cap="rnd">
-        <a:solidFill>
-          <a:schemeClr val="phClr"/>
-        </a:solidFill>
-      </a:ln>
-    </cs:spPr>
-  </cs:trendline>
-  <cs:trendlineLabel>
-    <cs:lnRef idx="0"/>
-    <cs:fillRef idx="0"/>
-    <cs:effectRef idx="0"/>
-    <cs:fontRef idx="minor">
-      <a:schemeClr val="lt1">
-        <a:lumMod val="85000"/>
-      </a:schemeClr>
-    </cs:fontRef>
-    <cs:defRPr sz="1197" kern="1200"/>
-  </cs:trendlineLabel>
-  <cs:upBar>
-    <cs:lnRef idx="0"/>
-    <cs:fillRef idx="0"/>
-    <cs:effectRef idx="0"/>
-    <cs:fontRef idx="minor">
-      <a:schemeClr val="lt1"/>
-    </cs:fontRef>
-    <cs:spPr>
-      <a:solidFill>
-        <a:schemeClr val="lt1"/>
-      </a:solidFill>
-      <a:ln w="9525">
-        <a:solidFill>
-          <a:schemeClr val="lt1">
-            <a:lumMod val="95000"/>
-            <a:alpha val="54000"/>
-          </a:schemeClr>
-        </a:solidFill>
-      </a:ln>
-    </cs:spPr>
-  </cs:upBar>
-  <cs:valueAxis>
-    <cs:lnRef idx="0"/>
-    <cs:fillRef idx="0"/>
-    <cs:effectRef idx="0"/>
-    <cs:fontRef idx="minor">
-      <a:schemeClr val="lt1">
-        <a:lumMod val="85000"/>
-      </a:schemeClr>
-    </cs:fontRef>
-    <cs:defRPr sz="1197" kern="1200"/>
-  </cs:valueAxis>
-  <cs:wall>
-    <cs:lnRef idx="0"/>
-    <cs:fillRef idx="0"/>
-    <cs:effectRef idx="0"/>
-    <cs:fontRef idx="minor">
-      <a:schemeClr val="lt1"/>
-    </cs:fontRef>
-  </cs:wall>
-</cs:chartStyle>
-</file>
-
-<file path=ppt/charts/style6.xml><?xml version="1.0" encoding="utf-8"?>
-<cs:chartStyle xmlns:cs="http://schemas.microsoft.com/office/drawing/2012/chartStyle" xmlns:a="http://schemas.openxmlformats.org/drawingml/2006/main" id="209">
-  <cs:axisTitle>
-    <cs:lnRef idx="0"/>
-    <cs:fillRef idx="0"/>
-    <cs:effectRef idx="0"/>
-    <cs:fontRef idx="minor">
-      <a:schemeClr val="lt1">
-        <a:lumMod val="85000"/>
-      </a:schemeClr>
-    </cs:fontRef>
-    <cs:defRPr sz="1197" b="1" kern="1200" cap="all"/>
-  </cs:axisTitle>
-  <cs:categoryAxis>
-    <cs:lnRef idx="0"/>
-    <cs:fillRef idx="0"/>
-    <cs:effectRef idx="0"/>
-    <cs:fontRef idx="minor">
-      <a:schemeClr val="lt1">
-        <a:lumMod val="85000"/>
-      </a:schemeClr>
-    </cs:fontRef>
-    <cs:spPr>
-      <a:ln w="12700" cap="flat" cmpd="sng" algn="ctr">
-        <a:solidFill>
-          <a:schemeClr val="lt1">
-            <a:lumMod val="95000"/>
-            <a:alpha val="54000"/>
-          </a:schemeClr>
-        </a:solidFill>
-        <a:round/>
-      </a:ln>
-    </cs:spPr>
-    <cs:defRPr sz="1197" kern="1200"/>
-  </cs:categoryAxis>
-  <cs:chartArea>
-    <cs:lnRef idx="0"/>
-    <cs:fillRef idx="0"/>
-    <cs:effectRef idx="0"/>
-    <cs:fontRef idx="minor">
-      <a:schemeClr val="dk1"/>
-    </cs:fontRef>
-    <cs:spPr>
-      <a:gradFill flip="none" rotWithShape="1">
-        <a:gsLst>
-          <a:gs pos="0">
-            <a:schemeClr val="dk1">
-              <a:lumMod val="65000"/>
-              <a:lumOff val="35000"/>
-            </a:schemeClr>
-          </a:gs>
-          <a:gs pos="100000">
-            <a:schemeClr val="dk1">
-              <a:lumMod val="85000"/>
-              <a:lumOff val="15000"/>
-            </a:schemeClr>
-          </a:gs>
-        </a:gsLst>
-        <a:path path="circle">
-          <a:fillToRect l="50000" t="50000" r="50000" b="50000"/>
-        </a:path>
-        <a:tileRect/>
-      </a:gradFill>
-    </cs:spPr>
-    <cs:defRPr sz="1330" kern="1200"/>
-  </cs:chartArea>
-  <cs:dataLabel>
-    <cs:lnRef idx="0"/>
-    <cs:fillRef idx="0"/>
-    <cs:effectRef idx="0"/>
-    <cs:fontRef idx="minor">
-      <a:schemeClr val="lt1">
-        <a:lumMod val="85000"/>
-      </a:schemeClr>
-    </cs:fontRef>
-    <cs:defRPr sz="1197" kern="1200"/>
-  </cs:dataLabel>
-  <cs:dataLabelCallout>
-    <cs:lnRef idx="0"/>
-    <cs:fillRef idx="0"/>
-    <cs:effectRef idx="0"/>
-    <cs:fontRef idx="minor">
-      <a:schemeClr val="dk1">
-        <a:lumMod val="65000"/>
-        <a:lumOff val="35000"/>
-      </a:schemeClr>
-    </cs:fontRef>
-    <cs:spPr>
-      <a:solidFill>
-        <a:schemeClr val="lt1"/>
-      </a:solidFill>
-    </cs:spPr>
-    <cs:defRPr sz="1197" kern="1200"/>
-    <cs:bodyPr rot="0" spcFirstLastPara="1" vertOverflow="clip" horzOverflow="clip" vert="horz" wrap="square" lIns="36576" tIns="18288" rIns="36576" bIns="18288" anchor="ctr" anchorCtr="1">
-      <a:spAutoFit/>
-    </cs:bodyPr>
-  </cs:dataLabelCallout>
-  <cs:dataPoint>
-    <cs:lnRef idx="0"/>
-    <cs:fillRef idx="3">
-      <cs:styleClr val="auto"/>
-    </cs:fillRef>
-    <cs:effectRef idx="3"/>
-    <cs:fontRef idx="minor">
-      <a:schemeClr val="lt1"/>
-    </cs:fontRef>
-  </cs:dataPoint>
-  <cs:dataPoint3D>
-    <cs:lnRef idx="0"/>
-    <cs:fillRef idx="3">
-      <cs:styleClr val="auto"/>
-    </cs:fillRef>
-    <cs:effectRef idx="3"/>
-    <cs:fontRef idx="minor">
-      <a:schemeClr val="lt1"/>
-    </cs:fontRef>
-  </cs:dataPoint3D>
-  <cs:dataPointLine>
-    <cs:lnRef idx="0">
-      <cs:styleClr val="auto"/>
-    </cs:lnRef>
-    <cs:fillRef idx="3"/>
-    <cs:effectRef idx="3"/>
-    <cs:fontRef idx="minor">
-      <a:schemeClr val="lt1"/>
-    </cs:fontRef>
-    <cs:spPr>
-      <a:ln w="34925" cap="rnd">
-        <a:solidFill>
-          <a:schemeClr val="phClr"/>
-        </a:solidFill>
-        <a:round/>
-      </a:ln>
-    </cs:spPr>
-  </cs:dataPointLine>
-  <cs:dataPointMarker>
-    <cs:lnRef idx="0">
-      <cs:styleClr val="auto"/>
-    </cs:lnRef>
-    <cs:fillRef idx="3">
-      <cs:styleClr val="auto"/>
-    </cs:fillRef>
-    <cs:effectRef idx="3"/>
-    <cs:fontRef idx="minor">
-      <a:schemeClr val="lt1"/>
-    </cs:fontRef>
-    <cs:spPr>
-      <a:ln w="9525">
-        <a:solidFill>
-          <a:schemeClr val="phClr"/>
-        </a:solidFill>
-        <a:round/>
-      </a:ln>
-    </cs:spPr>
-  </cs:dataPointMarker>
-  <cs:dataPointMarkerLayout symbol="circle" size="6"/>
-  <cs:dataPointWireframe>
-    <cs:lnRef idx="0">
-      <cs:styleClr val="auto"/>
-    </cs:lnRef>
-    <cs:fillRef idx="3"/>
-    <cs:effectRef idx="3"/>
-    <cs:fontRef idx="minor">
-      <a:schemeClr val="lt1"/>
-    </cs:fontRef>
-    <cs:spPr>
-      <a:ln w="9525" cap="rnd">
-        <a:solidFill>
-          <a:schemeClr val="phClr"/>
-        </a:solidFill>
-        <a:round/>
-      </a:ln>
-    </cs:spPr>
-  </cs:dataPointWireframe>
-  <cs:dataTable>
-    <cs:lnRef idx="0"/>
-    <cs:fillRef idx="0"/>
-    <cs:effectRef idx="0"/>
-    <cs:fontRef idx="minor">
-      <a:schemeClr val="lt1">
-        <a:lumMod val="85000"/>
-      </a:schemeClr>
-    </cs:fontRef>
-    <cs:spPr>
-      <a:ln w="9525">
-        <a:solidFill>
-          <a:schemeClr val="lt1">
-            <a:lumMod val="95000"/>
-            <a:alpha val="54000"/>
-          </a:schemeClr>
-        </a:solidFill>
-      </a:ln>
-    </cs:spPr>
-    <cs:defRPr sz="1197" kern="1200"/>
-  </cs:dataTable>
-  <cs:downBar>
-    <cs:lnRef idx="0"/>
-    <cs:fillRef idx="0"/>
-    <cs:effectRef idx="0"/>
-    <cs:fontRef idx="minor">
-      <a:schemeClr val="lt1"/>
-    </cs:fontRef>
-    <cs:spPr>
-      <a:solidFill>
-        <a:schemeClr val="dk1">
-          <a:lumMod val="75000"/>
-          <a:lumOff val="25000"/>
-        </a:schemeClr>
-      </a:solidFill>
-      <a:ln w="9525">
-        <a:solidFill>
-          <a:schemeClr val="lt1">
-            <a:lumMod val="95000"/>
-            <a:alpha val="54000"/>
-          </a:schemeClr>
-        </a:solidFill>
-      </a:ln>
-    </cs:spPr>
-  </cs:downBar>
-  <cs:dropLine>
-    <cs:lnRef idx="0"/>
-    <cs:fillRef idx="0"/>
-    <cs:effectRef idx="0"/>
-    <cs:fontRef idx="minor">
-      <a:schemeClr val="lt1"/>
-    </cs:fontRef>
-    <cs:spPr>
-      <a:ln w="9525">
-        <a:solidFill>
-          <a:schemeClr val="lt1">
-            <a:lumMod val="95000"/>
-            <a:alpha val="54000"/>
-          </a:schemeClr>
-        </a:solidFill>
-        <a:prstDash val="dash"/>
-      </a:ln>
-    </cs:spPr>
-  </cs:dropLine>
-  <cs:errorBar>
-    <cs:lnRef idx="0"/>
-    <cs:fillRef idx="0"/>
-    <cs:effectRef idx="0"/>
-    <cs:fontRef idx="minor">
-      <a:schemeClr val="lt1"/>
-    </cs:fontRef>
-    <cs:spPr>
-      <a:ln w="9525" cap="flat" cmpd="sng" algn="ctr">
-        <a:solidFill>
-          <a:schemeClr val="lt1">
-            <a:lumMod val="95000"/>
-          </a:schemeClr>
-        </a:solidFill>
-        <a:round/>
-      </a:ln>
-    </cs:spPr>
-  </cs:errorBar>
-  <cs:floor>
-    <cs:lnRef idx="0"/>
-    <cs:fillRef idx="0"/>
-    <cs:effectRef idx="0"/>
-    <cs:fontRef idx="minor">
-      <a:schemeClr val="lt1"/>
-    </cs:fontRef>
-  </cs:floor>
-  <cs:gridlineMajor>
-    <cs:lnRef idx="0"/>
-    <cs:fillRef idx="0"/>
-    <cs:effectRef idx="0"/>
-    <cs:fontRef idx="minor">
-      <a:schemeClr val="lt1"/>
-    </cs:fontRef>
-    <cs:spPr>
-      <a:ln w="9525" cap="flat" cmpd="sng" algn="ctr">
-        <a:solidFill>
-          <a:schemeClr val="lt1">
-            <a:lumMod val="95000"/>
-            <a:alpha val="10000"/>
-          </a:schemeClr>
-        </a:solidFill>
-        <a:round/>
-      </a:ln>
-    </cs:spPr>
-  </cs:gridlineMajor>
-  <cs:gridlineMinor>
-    <cs:lnRef idx="0"/>
-    <cs:fillRef idx="0"/>
-    <cs:effectRef idx="0"/>
-    <cs:fontRef idx="minor">
-      <a:schemeClr val="lt1"/>
-    </cs:fontRef>
-    <cs:spPr>
-      <a:ln>
-        <a:solidFill>
-          <a:schemeClr val="lt1">
-            <a:lumMod val="95000"/>
-            <a:alpha val="5000"/>
-          </a:schemeClr>
-        </a:solidFill>
-      </a:ln>
-    </cs:spPr>
-  </cs:gridlineMinor>
-  <cs:hiLoLine>
-    <cs:lnRef idx="0"/>
-    <cs:fillRef idx="0"/>
-    <cs:effectRef idx="0"/>
-    <cs:fontRef idx="minor">
-      <a:schemeClr val="lt1"/>
-    </cs:fontRef>
-    <cs:spPr>
-      <a:ln w="9525">
-        <a:solidFill>
-          <a:schemeClr val="lt1">
-            <a:lumMod val="95000"/>
-            <a:alpha val="54000"/>
-          </a:schemeClr>
-        </a:solidFill>
-        <a:prstDash val="dash"/>
-      </a:ln>
-    </cs:spPr>
-  </cs:hiLoLine>
-  <cs:leaderLine>
-    <cs:lnRef idx="0"/>
-    <cs:fillRef idx="0"/>
-    <cs:effectRef idx="0"/>
-    <cs:fontRef idx="minor">
-      <a:schemeClr val="lt1"/>
-    </cs:fontRef>
-    <cs:spPr>
-      <a:ln w="9525">
-        <a:solidFill>
-          <a:schemeClr val="lt1">
-            <a:lumMod val="95000"/>
-            <a:alpha val="54000"/>
-          </a:schemeClr>
-        </a:solidFill>
-      </a:ln>
-    </cs:spPr>
-  </cs:leaderLine>
-  <cs:legend>
-    <cs:lnRef idx="0"/>
-    <cs:fillRef idx="0"/>
-    <cs:effectRef idx="0"/>
-    <cs:fontRef idx="minor">
-      <a:schemeClr val="lt1">
-        <a:lumMod val="85000"/>
-      </a:schemeClr>
-    </cs:fontRef>
-    <cs:defRPr sz="1197" kern="1200"/>
-  </cs:legend>
-  <cs:plotArea>
-    <cs:lnRef idx="0"/>
-    <cs:fillRef idx="0"/>
-    <cs:effectRef idx="0"/>
-    <cs:fontRef idx="minor">
-      <a:schemeClr val="lt1"/>
-    </cs:fontRef>
-  </cs:plotArea>
-  <cs:plotArea3D>
-    <cs:lnRef idx="0"/>
-    <cs:fillRef idx="0"/>
-    <cs:effectRef idx="0"/>
-    <cs:fontRef idx="minor">
-      <a:schemeClr val="lt1"/>
-    </cs:fontRef>
-  </cs:plotArea3D>
-  <cs:seriesAxis>
-    <cs:lnRef idx="0"/>
-    <cs:fillRef idx="0"/>
-    <cs:effectRef idx="0"/>
-    <cs:fontRef idx="minor">
-      <a:schemeClr val="lt1">
-        <a:lumMod val="85000"/>
-      </a:schemeClr>
-    </cs:fontRef>
-    <cs:spPr>
-      <a:ln w="12700" cap="flat" cmpd="sng" algn="ctr">
-        <a:solidFill>
-          <a:schemeClr val="lt1">
-            <a:lumMod val="95000"/>
-            <a:alpha val="54000"/>
-          </a:schemeClr>
-        </a:solidFill>
-        <a:round/>
-      </a:ln>
-    </cs:spPr>
-    <cs:defRPr sz="1197" kern="1200"/>
-  </cs:seriesAxis>
-  <cs:seriesLine>
-    <cs:lnRef idx="0"/>
-    <cs:fillRef idx="0"/>
-    <cs:effectRef idx="0"/>
-    <cs:fontRef idx="minor">
-      <a:schemeClr val="lt1"/>
-    </cs:fontRef>
-    <cs:spPr>
-      <a:ln w="9525" cap="flat" cmpd="sng" algn="ctr">
-        <a:solidFill>
-          <a:schemeClr val="lt1">
-            <a:lumMod val="95000"/>
-            <a:alpha val="54000"/>
-          </a:schemeClr>
-        </a:solidFill>
-        <a:round/>
-      </a:ln>
-    </cs:spPr>
-  </cs:seriesLine>
-  <cs:title>
-    <cs:lnRef idx="0"/>
-    <cs:fillRef idx="0"/>
-    <cs:effectRef idx="0"/>
-    <cs:fontRef idx="minor">
-      <a:schemeClr val="lt1">
-        <a:lumMod val="95000"/>
-      </a:schemeClr>
-    </cs:fontRef>
-    <cs:defRPr sz="2128" b="1" kern="1200" spc="100" baseline="0">
-      <a:effectLst>
-        <a:outerShdw blurRad="50800" dist="38100" dir="5400000" algn="t" rotWithShape="0">
-          <a:prstClr val="black">
-            <a:alpha val="40000"/>
-          </a:prstClr>
-        </a:outerShdw>
-      </a:effectLst>
-    </cs:defRPr>
-  </cs:title>
-  <cs:trendline>
-    <cs:lnRef idx="0">
-      <cs:styleClr val="auto"/>
-    </cs:lnRef>
-    <cs:fillRef idx="0"/>
-    <cs:effectRef idx="0"/>
-    <cs:fontRef idx="minor">
-      <a:schemeClr val="lt1"/>
-    </cs:fontRef>
-    <cs:spPr>
-      <a:ln w="19050" cap="rnd">
-        <a:solidFill>
-          <a:schemeClr val="phClr"/>
-        </a:solidFill>
-      </a:ln>
-    </cs:spPr>
-  </cs:trendline>
-  <cs:trendlineLabel>
-    <cs:lnRef idx="0"/>
-    <cs:fillRef idx="0"/>
-    <cs:effectRef idx="0"/>
-    <cs:fontRef idx="minor">
-      <a:schemeClr val="lt1">
-        <a:lumMod val="85000"/>
-      </a:schemeClr>
-    </cs:fontRef>
-    <cs:defRPr sz="1197" kern="1200"/>
-  </cs:trendlineLabel>
-  <cs:upBar>
-    <cs:lnRef idx="0"/>
-    <cs:fillRef idx="0"/>
-    <cs:effectRef idx="0"/>
-    <cs:fontRef idx="minor">
-      <a:schemeClr val="lt1"/>
-    </cs:fontRef>
-    <cs:spPr>
-      <a:solidFill>
-        <a:schemeClr val="lt1"/>
-      </a:solidFill>
-      <a:ln w="9525">
-        <a:solidFill>
-          <a:schemeClr val="lt1">
-            <a:lumMod val="95000"/>
-            <a:alpha val="54000"/>
-          </a:schemeClr>
-        </a:solidFill>
-      </a:ln>
-    </cs:spPr>
-  </cs:upBar>
-  <cs:valueAxis>
-    <cs:lnRef idx="0"/>
-    <cs:fillRef idx="0"/>
-    <cs:effectRef idx="0"/>
-    <cs:fontRef idx="minor">
-      <a:schemeClr val="lt1">
-        <a:lumMod val="85000"/>
-      </a:schemeClr>
-    </cs:fontRef>
-    <cs:defRPr sz="1197" kern="1200"/>
-  </cs:valueAxis>
-  <cs:wall>
-    <cs:lnRef idx="0"/>
-    <cs:fillRef idx="0"/>
-    <cs:effectRef idx="0"/>
-    <cs:fontRef idx="minor">
-      <a:schemeClr val="lt1"/>
-    </cs:fontRef>
-  </cs:wall>
-</cs:chartStyle>
-</file>
-
-<file path=ppt/charts/style7.xml><?xml version="1.0" encoding="utf-8"?>
 <cs:chartStyle xmlns:cs="http://schemas.microsoft.com/office/drawing/2012/chartStyle" xmlns:a="http://schemas.openxmlformats.org/drawingml/2006/main" id="209">
   <cs:axisTitle>
     <cs:lnRef idx="0"/>
@@ -7629,7 +5658,7 @@
           <a:p>
             <a:fld id="{5BCAD085-E8A6-8845-BD4E-CB4CCA059FC4}" type="datetimeFigureOut">
               <a:rPr lang="en-US" smtClean="0"/>
-              <a:t>29-Aug-26</a:t>
+              <a:t>01-Sep-26</a:t>
             </a:fld>
             <a:endParaRPr lang="en-US"/>
           </a:p>
@@ -7797,7 +5826,7 @@
           <a:p>
             <a:fld id="{5BCAD085-E8A6-8845-BD4E-CB4CCA059FC4}" type="datetimeFigureOut">
               <a:rPr lang="en-US" smtClean="0"/>
-              <a:t>29-Aug-26</a:t>
+              <a:t>01-Sep-26</a:t>
             </a:fld>
             <a:endParaRPr lang="en-US"/>
           </a:p>
@@ -7975,7 +6004,7 @@
           <a:p>
             <a:fld id="{5BCAD085-E8A6-8845-BD4E-CB4CCA059FC4}" type="datetimeFigureOut">
               <a:rPr lang="en-US" smtClean="0"/>
-              <a:t>29-Aug-26</a:t>
+              <a:t>01-Sep-26</a:t>
             </a:fld>
             <a:endParaRPr lang="en-US"/>
           </a:p>
@@ -8143,7 +6172,7 @@
           <a:p>
             <a:fld id="{5BCAD085-E8A6-8845-BD4E-CB4CCA059FC4}" type="datetimeFigureOut">
               <a:rPr lang="en-US" smtClean="0"/>
-              <a:t>29-Aug-26</a:t>
+              <a:t>01-Sep-26</a:t>
             </a:fld>
             <a:endParaRPr lang="en-US"/>
           </a:p>
@@ -8388,7 +6417,7 @@
           <a:p>
             <a:fld id="{5BCAD085-E8A6-8845-BD4E-CB4CCA059FC4}" type="datetimeFigureOut">
               <a:rPr lang="en-US" smtClean="0"/>
-              <a:t>29-Aug-26</a:t>
+              <a:t>01-Sep-26</a:t>
             </a:fld>
             <a:endParaRPr lang="en-US"/>
           </a:p>
@@ -8673,7 +6702,7 @@
           <a:p>
             <a:fld id="{5BCAD085-E8A6-8845-BD4E-CB4CCA059FC4}" type="datetimeFigureOut">
               <a:rPr lang="en-US" smtClean="0"/>
-              <a:t>29-Aug-26</a:t>
+              <a:t>01-Sep-26</a:t>
             </a:fld>
             <a:endParaRPr lang="en-US"/>
           </a:p>
@@ -9092,7 +7121,7 @@
           <a:p>
             <a:fld id="{5BCAD085-E8A6-8845-BD4E-CB4CCA059FC4}" type="datetimeFigureOut">
               <a:rPr lang="en-US" smtClean="0"/>
-              <a:t>29-Aug-26</a:t>
+              <a:t>01-Sep-26</a:t>
             </a:fld>
             <a:endParaRPr lang="en-US"/>
           </a:p>
@@ -9209,7 +7238,7 @@
           <a:p>
             <a:fld id="{5BCAD085-E8A6-8845-BD4E-CB4CCA059FC4}" type="datetimeFigureOut">
               <a:rPr lang="en-US" smtClean="0"/>
-              <a:t>29-Aug-26</a:t>
+              <a:t>01-Sep-26</a:t>
             </a:fld>
             <a:endParaRPr lang="en-US"/>
           </a:p>
@@ -9304,7 +7333,7 @@
           <a:p>
             <a:fld id="{5BCAD085-E8A6-8845-BD4E-CB4CCA059FC4}" type="datetimeFigureOut">
               <a:rPr lang="en-US" smtClean="0"/>
-              <a:t>29-Aug-26</a:t>
+              <a:t>01-Sep-26</a:t>
             </a:fld>
             <a:endParaRPr lang="en-US"/>
           </a:p>
@@ -9579,7 +7608,7 @@
           <a:p>
             <a:fld id="{5BCAD085-E8A6-8845-BD4E-CB4CCA059FC4}" type="datetimeFigureOut">
               <a:rPr lang="en-US" smtClean="0"/>
-              <a:t>29-Aug-26</a:t>
+              <a:t>01-Sep-26</a:t>
             </a:fld>
             <a:endParaRPr lang="en-US"/>
           </a:p>
@@ -9831,7 +7860,7 @@
           <a:p>
             <a:fld id="{5BCAD085-E8A6-8845-BD4E-CB4CCA059FC4}" type="datetimeFigureOut">
               <a:rPr lang="en-US" smtClean="0"/>
-              <a:t>29-Aug-26</a:t>
+              <a:t>01-Sep-26</a:t>
             </a:fld>
             <a:endParaRPr lang="en-US"/>
           </a:p>
@@ -10042,7 +8071,7 @@
           <a:p>
             <a:fld id="{5BCAD085-E8A6-8845-BD4E-CB4CCA059FC4}" type="datetimeFigureOut">
               <a:rPr lang="en-US" smtClean="0"/>
-              <a:t>29-Aug-26</a:t>
+              <a:t>01-Sep-26</a:t>
             </a:fld>
             <a:endParaRPr lang="en-US"/>
           </a:p>
@@ -10794,7 +8823,7 @@
               </a:defRPr>
             </a:pPr>
             <a:r>
-              <a:rPr b="1">
+              <a:rPr b="1" dirty="0">
                 <a:latin typeface="Gadugi" panose="020B0502040204020203" pitchFamily="34" charset="0"/>
                 <a:ea typeface="Gadugi" panose="020B0502040204020203" pitchFamily="34" charset="0"/>
               </a:rPr>
@@ -10985,7 +9014,7 @@
         </p:nvSpPr>
         <p:spPr>
           <a:xfrm>
-            <a:off x="3566160" y="4873752"/>
+            <a:off x="3532634" y="4873752"/>
             <a:ext cx="856325" cy="230832"/>
           </a:xfrm>
           <a:prstGeom prst="rect">
@@ -11024,7 +9053,7 @@
         </p:nvSpPr>
         <p:spPr>
           <a:xfrm>
-            <a:off x="3566160" y="5212080"/>
+            <a:off x="3524999" y="5221414"/>
             <a:ext cx="1114408" cy="446276"/>
           </a:xfrm>
           <a:prstGeom prst="rect">
@@ -11046,7 +9075,7 @@
               </a:defRPr>
             </a:pPr>
             <a:r>
-              <a:rPr b="1">
+              <a:rPr b="1" dirty="0">
                 <a:latin typeface="Gadugi" panose="020B0502040204020203" pitchFamily="34" charset="0"/>
                 <a:ea typeface="Gadugi" panose="020B0502040204020203" pitchFamily="34" charset="0"/>
               </a:rPr>
@@ -11063,7 +9092,7 @@
         </p:nvSpPr>
         <p:spPr>
           <a:xfrm>
-            <a:off x="3557016" y="5058460"/>
+            <a:off x="3532634" y="5074907"/>
             <a:ext cx="668773" cy="223138"/>
           </a:xfrm>
           <a:prstGeom prst="rect">
@@ -11198,7 +9227,7 @@
         </p:nvSpPr>
         <p:spPr>
           <a:xfrm>
-            <a:off x="6190488" y="4873752"/>
+            <a:off x="6156962" y="4873752"/>
             <a:ext cx="1228221" cy="230832"/>
           </a:xfrm>
           <a:prstGeom prst="rect">
@@ -11220,7 +9249,7 @@
               </a:defRPr>
             </a:pPr>
             <a:r>
-              <a:rPr b="1">
+              <a:rPr b="1" dirty="0">
                 <a:latin typeface="Gadugi" panose="020B0502040204020203" pitchFamily="34" charset="0"/>
                 <a:ea typeface="Gadugi" panose="020B0502040204020203" pitchFamily="34" charset="0"/>
               </a:rPr>
@@ -11237,7 +9266,7 @@
         </p:nvSpPr>
         <p:spPr>
           <a:xfrm>
-            <a:off x="6190488" y="5212080"/>
+            <a:off x="6142417" y="5219469"/>
             <a:ext cx="1031051" cy="446276"/>
           </a:xfrm>
           <a:prstGeom prst="rect">
@@ -11259,7 +9288,7 @@
               </a:defRPr>
             </a:pPr>
             <a:r>
-              <a:rPr b="1">
+              <a:rPr b="1" dirty="0">
                 <a:latin typeface="Gadugi" panose="020B0502040204020203" pitchFamily="34" charset="0"/>
                 <a:ea typeface="Gadugi" panose="020B0502040204020203" pitchFamily="34" charset="0"/>
               </a:rPr>
@@ -11411,7 +9440,7 @@
         </p:nvSpPr>
         <p:spPr>
           <a:xfrm>
-            <a:off x="8814816" y="4873752"/>
+            <a:off x="8781954" y="4873752"/>
             <a:ext cx="1266693" cy="230832"/>
           </a:xfrm>
           <a:prstGeom prst="rect">
@@ -11433,7 +9462,7 @@
               </a:defRPr>
             </a:pPr>
             <a:r>
-              <a:rPr b="1">
+              <a:rPr b="1" dirty="0">
                 <a:latin typeface="Gadugi" panose="020B0502040204020203" pitchFamily="34" charset="0"/>
                 <a:ea typeface="Gadugi" panose="020B0502040204020203" pitchFamily="34" charset="0"/>
               </a:rPr>
@@ -11450,7 +9479,7 @@
         </p:nvSpPr>
         <p:spPr>
           <a:xfrm>
-            <a:off x="8814816" y="5212080"/>
+            <a:off x="8781954" y="5212080"/>
             <a:ext cx="1200970" cy="446276"/>
           </a:xfrm>
           <a:prstGeom prst="rect">
@@ -11472,7 +9501,7 @@
               </a:defRPr>
             </a:pPr>
             <a:r>
-              <a:rPr b="1">
+              <a:rPr b="1" dirty="0">
                 <a:latin typeface="Gadugi" panose="020B0502040204020203" pitchFamily="34" charset="0"/>
                 <a:ea typeface="Gadugi" panose="020B0502040204020203" pitchFamily="34" charset="0"/>
               </a:rPr>
@@ -11646,6 +9675,168 @@
         </p:txBody>
       </p:sp>
     </p:spTree>
+  </p:cSld>
+  <p:clrMapOvr>
+    <a:masterClrMapping/>
+  </p:clrMapOvr>
+</p:sld>
+</file>
+
+<file path=ppt/slides/slide10.xml><?xml version="1.0" encoding="utf-8"?>
+<p:sld xmlns:a="http://schemas.openxmlformats.org/drawingml/2006/main" xmlns:r="http://schemas.openxmlformats.org/officeDocument/2006/relationships" xmlns:p="http://schemas.openxmlformats.org/presentationml/2006/main">
+  <p:cSld>
+    <p:spTree>
+      <p:nvGrpSpPr>
+        <p:cNvPr id="1" name=""/>
+        <p:cNvGrpSpPr/>
+        <p:nvPr/>
+      </p:nvGrpSpPr>
+      <p:grpSpPr>
+        <a:xfrm>
+          <a:off x="0" y="0"/>
+          <a:ext cx="0" cy="0"/>
+          <a:chOff x="0" y="0"/>
+          <a:chExt cx="0" cy="0"/>
+        </a:xfrm>
+      </p:grpSpPr>
+      <p:sp>
+        <p:nvSpPr>
+          <p:cNvPr id="3" name="Rectangle 2">
+            <a:extLst>
+              <a:ext uri="{FF2B5EF4-FFF2-40B4-BE49-F238E27FC236}">
+                <a16:creationId xmlns:a16="http://schemas.microsoft.com/office/drawing/2014/main" id="{CAF64636-9500-DDED-FBD8-9784C6B4CDC6}"/>
+              </a:ext>
+            </a:extLst>
+          </p:cNvPr>
+          <p:cNvSpPr/>
+          <p:nvPr/>
+        </p:nvSpPr>
+        <p:spPr>
+          <a:xfrm>
+            <a:off x="0" y="0"/>
+            <a:ext cx="12191695" cy="6858000"/>
+          </a:xfrm>
+          <a:prstGeom prst="rect">
+            <a:avLst/>
+          </a:prstGeom>
+          <a:solidFill>
+            <a:srgbClr val="FFFFFF"/>
+          </a:solidFill>
+          <a:ln>
+            <a:noFill/>
+          </a:ln>
+        </p:spPr>
+        <p:style>
+          <a:lnRef idx="1">
+            <a:schemeClr val="accent1"/>
+          </a:lnRef>
+          <a:fillRef idx="3">
+            <a:schemeClr val="accent1"/>
+          </a:fillRef>
+          <a:effectRef idx="2">
+            <a:schemeClr val="accent1"/>
+          </a:effectRef>
+          <a:fontRef idx="minor">
+            <a:schemeClr val="lt1"/>
+          </a:fontRef>
+        </p:style>
+        <p:txBody>
+          <a:bodyPr rtlCol="0" anchor="ctr"/>
+          <a:lstStyle/>
+          <a:p>
+            <a:pPr algn="ctr"/>
+            <a:endParaRPr b="1" dirty="0">
+              <a:latin typeface="Gadugi" panose="020B0502040204020203" pitchFamily="34" charset="0"/>
+              <a:ea typeface="Gadugi" panose="020B0502040204020203" pitchFamily="34" charset="0"/>
+            </a:endParaRPr>
+          </a:p>
+        </p:txBody>
+      </p:sp>
+      <p:pic>
+        <p:nvPicPr>
+          <p:cNvPr id="5" name="Picture 4" descr="3087406e-fe61-44ad-b0da-f0ce26188aac.png">
+            <a:extLst>
+              <a:ext uri="{FF2B5EF4-FFF2-40B4-BE49-F238E27FC236}">
+                <a16:creationId xmlns:a16="http://schemas.microsoft.com/office/drawing/2014/main" id="{221A4652-706F-DC2C-8548-37ED6C4304A7}"/>
+              </a:ext>
+            </a:extLst>
+          </p:cNvPr>
+          <p:cNvPicPr>
+            <a:picLocks noChangeAspect="1"/>
+          </p:cNvPicPr>
+          <p:nvPr/>
+        </p:nvPicPr>
+        <p:blipFill>
+          <a:blip r:embed="rId2"/>
+          <a:stretch>
+            <a:fillRect/>
+          </a:stretch>
+        </p:blipFill>
+        <p:spPr>
+          <a:xfrm>
+            <a:off x="10287000" y="109728"/>
+            <a:ext cx="1572768" cy="643405"/>
+          </a:xfrm>
+          <a:prstGeom prst="rect">
+            <a:avLst/>
+          </a:prstGeom>
+        </p:spPr>
+      </p:pic>
+      <p:sp>
+        <p:nvSpPr>
+          <p:cNvPr id="7" name="TextBox 6">
+            <a:extLst>
+              <a:ext uri="{FF2B5EF4-FFF2-40B4-BE49-F238E27FC236}">
+                <a16:creationId xmlns:a16="http://schemas.microsoft.com/office/drawing/2014/main" id="{7D07D351-5D4D-F6F3-F55B-909685D2A453}"/>
+              </a:ext>
+            </a:extLst>
+          </p:cNvPr>
+          <p:cNvSpPr txBox="1"/>
+          <p:nvPr/>
+        </p:nvSpPr>
+        <p:spPr>
+          <a:xfrm>
+            <a:off x="4993262" y="3089359"/>
+            <a:ext cx="2205476" cy="507831"/>
+          </a:xfrm>
+          <a:prstGeom prst="rect">
+            <a:avLst/>
+          </a:prstGeom>
+          <a:noFill/>
+        </p:spPr>
+        <p:txBody>
+          <a:bodyPr wrap="none">
+            <a:spAutoFit/>
+          </a:bodyPr>
+          <a:lstStyle/>
+          <a:p>
+            <a:pPr>
+              <a:defRPr sz="2700" b="1">
+                <a:solidFill>
+                  <a:srgbClr val="18355E"/>
+                </a:solidFill>
+              </a:defRPr>
+            </a:pPr>
+            <a:r>
+              <a:rPr lang="en-IN" dirty="0">
+                <a:latin typeface="Gadugi" panose="020B0502040204020203" pitchFamily="34" charset="0"/>
+                <a:ea typeface="Gadugi" panose="020B0502040204020203" pitchFamily="34" charset="0"/>
+              </a:rPr>
+              <a:t>THANK YOU</a:t>
+            </a:r>
+            <a:endParaRPr dirty="0">
+              <a:latin typeface="Gadugi" panose="020B0502040204020203" pitchFamily="34" charset="0"/>
+              <a:ea typeface="Gadugi" panose="020B0502040204020203" pitchFamily="34" charset="0"/>
+            </a:endParaRPr>
+          </a:p>
+        </p:txBody>
+      </p:sp>
+    </p:spTree>
+    <p:extLst>
+      <p:ext uri="{BB962C8B-B14F-4D97-AF65-F5344CB8AC3E}">
+        <p14:creationId xmlns:p14="http://schemas.microsoft.com/office/powerpoint/2010/main" val="1264207517"/>
+      </p:ext>
+    </p:extLst>
   </p:cSld>
   <p:clrMapOvr>
     <a:masterClrMapping/>
@@ -11750,7 +9941,7 @@
         <p:spPr>
           <a:xfrm>
             <a:off x="548640" y="384048"/>
-            <a:ext cx="3580211" cy="507831"/>
+            <a:ext cx="883575" cy="507831"/>
           </a:xfrm>
           <a:prstGeom prst="rect">
             <a:avLst/>
@@ -11771,12 +9962,16 @@
               </a:defRPr>
             </a:pPr>
             <a:r>
-              <a:rPr b="1">
+              <a:rPr lang="en-IN" b="1" dirty="0">
                 <a:latin typeface="Gadugi" panose="020B0502040204020203" pitchFamily="34" charset="0"/>
                 <a:ea typeface="Gadugi" panose="020B0502040204020203" pitchFamily="34" charset="0"/>
               </a:rPr>
-              <a:t>Executive Dashboard</a:t>
-            </a:r>
+              <a:t>KPIs</a:t>
+            </a:r>
+            <a:endParaRPr b="1" dirty="0">
+              <a:latin typeface="Gadugi" panose="020B0502040204020203" pitchFamily="34" charset="0"/>
+              <a:ea typeface="Gadugi" panose="020B0502040204020203" pitchFamily="34" charset="0"/>
+            </a:endParaRPr>
           </a:p>
         </p:txBody>
       </p:sp>
@@ -12680,42 +10875,18 @@
           <p:nvPr>
             <p:extLst>
               <p:ext uri="{D42A27DB-BD31-4B8C-83A1-F6EECF244321}">
-                <p14:modId xmlns:p14="http://schemas.microsoft.com/office/powerpoint/2010/main" val="3987347738"/>
+                <p14:modId xmlns:p14="http://schemas.microsoft.com/office/powerpoint/2010/main" val="2901397137"/>
               </p:ext>
             </p:extLst>
           </p:nvPr>
         </p:nvGraphicFramePr>
         <p:xfrm>
-          <a:off x="640080" y="2880360"/>
-          <a:ext cx="5486400" cy="2971800"/>
+          <a:off x="640080" y="2880359"/>
+          <a:ext cx="10744200" cy="3091815"/>
         </p:xfrm>
         <a:graphic>
           <a:graphicData uri="http://schemas.openxmlformats.org/drawingml/2006/chart">
             <c:chart xmlns:c="http://schemas.openxmlformats.org/drawingml/2006/chart" xmlns:r="http://schemas.openxmlformats.org/officeDocument/2006/relationships" r:id="rId3"/>
-          </a:graphicData>
-        </a:graphic>
-      </p:graphicFrame>
-      <p:graphicFrame>
-        <p:nvGraphicFramePr>
-          <p:cNvPr id="27" name="Chart 26"/>
-          <p:cNvGraphicFramePr>
-            <a:graphicFrameLocks noGrp="1"/>
-          </p:cNvGraphicFramePr>
-          <p:nvPr>
-            <p:extLst>
-              <p:ext uri="{D42A27DB-BD31-4B8C-83A1-F6EECF244321}">
-                <p14:modId xmlns:p14="http://schemas.microsoft.com/office/powerpoint/2010/main" val="3525076401"/>
-              </p:ext>
-            </p:extLst>
-          </p:nvPr>
-        </p:nvGraphicFramePr>
-        <p:xfrm>
-          <a:off x="6355080" y="2880360"/>
-          <a:ext cx="5166360" cy="2971800"/>
-        </p:xfrm>
-        <a:graphic>
-          <a:graphicData uri="http://schemas.openxmlformats.org/drawingml/2006/chart">
-            <c:chart xmlns:c="http://schemas.openxmlformats.org/drawingml/2006/chart" xmlns:r="http://schemas.openxmlformats.org/officeDocument/2006/relationships" r:id="rId4"/>
           </a:graphicData>
         </a:graphic>
       </p:graphicFrame>
@@ -12796,7 +10967,7 @@
               </a:defRPr>
             </a:pPr>
             <a:r>
-              <a:rPr b="1">
+              <a:rPr b="1" dirty="0">
                 <a:latin typeface="Gadugi" panose="020B0502040204020203" pitchFamily="34" charset="0"/>
                 <a:ea typeface="Gadugi" panose="020B0502040204020203" pitchFamily="34" charset="0"/>
               </a:rPr>
@@ -14393,7 +12564,7 @@
               </a:defRPr>
             </a:pPr>
             <a:r>
-              <a:rPr b="1">
+              <a:rPr b="1" dirty="0">
                 <a:latin typeface="Gadugi" panose="020B0502040204020203" pitchFamily="34" charset="0"/>
                 <a:ea typeface="Gadugi" panose="020B0502040204020203" pitchFamily="34" charset="0"/>
               </a:rPr>
@@ -14585,7 +12756,7 @@
         <p:spPr>
           <a:xfrm>
             <a:off x="566928" y="960120"/>
-            <a:ext cx="2844048" cy="261610"/>
+            <a:ext cx="2985113" cy="261610"/>
           </a:xfrm>
           <a:prstGeom prst="rect">
             <a:avLst/>
@@ -14606,7 +12777,7 @@
               </a:defRPr>
             </a:pPr>
             <a:r>
-              <a:rPr>
+              <a:rPr b="1" dirty="0">
                 <a:latin typeface="Gadugi" panose="020B0502040204020203" pitchFamily="34" charset="0"/>
                 <a:ea typeface="Gadugi" panose="020B0502040204020203" pitchFamily="34" charset="0"/>
               </a:rPr>
@@ -14624,7 +12795,7 @@
           <p:nvPr>
             <p:extLst>
               <p:ext uri="{D42A27DB-BD31-4B8C-83A1-F6EECF244321}">
-                <p14:modId xmlns:p14="http://schemas.microsoft.com/office/powerpoint/2010/main" val="3753017179"/>
+                <p14:modId xmlns:p14="http://schemas.microsoft.com/office/powerpoint/2010/main" val="444164254"/>
               </p:ext>
             </p:extLst>
           </p:nvPr>
@@ -14775,7 +12946,7 @@
         <p:spPr>
           <a:xfrm>
             <a:off x="7845552" y="1938528"/>
-            <a:ext cx="2002471" cy="223138"/>
+            <a:ext cx="2119491" cy="223138"/>
           </a:xfrm>
           <a:prstGeom prst="rect">
             <a:avLst/>
@@ -14796,7 +12967,7 @@
               </a:defRPr>
             </a:pPr>
             <a:r>
-              <a:rPr dirty="0">
+              <a:rPr b="1" dirty="0">
                 <a:latin typeface="Gadugi" panose="020B0502040204020203" pitchFamily="34" charset="0"/>
                 <a:ea typeface="Gadugi" panose="020B0502040204020203" pitchFamily="34" charset="0"/>
               </a:rPr>
@@ -14941,7 +13112,7 @@
         <p:spPr>
           <a:xfrm>
             <a:off x="7845552" y="2926080"/>
-            <a:ext cx="2002471" cy="223138"/>
+            <a:ext cx="2119491" cy="223138"/>
           </a:xfrm>
           <a:prstGeom prst="rect">
             <a:avLst/>
@@ -14962,7 +13133,7 @@
               </a:defRPr>
             </a:pPr>
             <a:r>
-              <a:rPr>
+              <a:rPr b="1" dirty="0">
                 <a:latin typeface="Gadugi" panose="020B0502040204020203" pitchFamily="34" charset="0"/>
                 <a:ea typeface="Gadugi" panose="020B0502040204020203" pitchFamily="34" charset="0"/>
               </a:rPr>
@@ -15107,7 +13278,7 @@
         <p:spPr>
           <a:xfrm>
             <a:off x="7845552" y="3913632"/>
-            <a:ext cx="2002471" cy="223138"/>
+            <a:ext cx="2119491" cy="223138"/>
           </a:xfrm>
           <a:prstGeom prst="rect">
             <a:avLst/>
@@ -15128,7 +13299,7 @@
               </a:defRPr>
             </a:pPr>
             <a:r>
-              <a:rPr>
+              <a:rPr b="1" dirty="0">
                 <a:latin typeface="Gadugi" panose="020B0502040204020203" pitchFamily="34" charset="0"/>
                 <a:ea typeface="Gadugi" panose="020B0502040204020203" pitchFamily="34" charset="0"/>
               </a:rPr>
@@ -15273,7 +13444,7 @@
         <p:spPr>
           <a:xfrm>
             <a:off x="7845552" y="4901184"/>
-            <a:ext cx="1835759" cy="223138"/>
+            <a:ext cx="1936749" cy="223138"/>
           </a:xfrm>
           <a:prstGeom prst="rect">
             <a:avLst/>
@@ -15294,7 +13465,7 @@
               </a:defRPr>
             </a:pPr>
             <a:r>
-              <a:rPr>
+              <a:rPr b="1" dirty="0">
                 <a:latin typeface="Gadugi" panose="020B0502040204020203" pitchFamily="34" charset="0"/>
                 <a:ea typeface="Gadugi" panose="020B0502040204020203" pitchFamily="34" charset="0"/>
               </a:rPr>
@@ -15554,7 +13725,7 @@
               </a:defRPr>
             </a:pPr>
             <a:r>
-              <a:rPr>
+              <a:rPr dirty="0">
                 <a:latin typeface="Gadugi" panose="020B0502040204020203" pitchFamily="34" charset="0"/>
                 <a:ea typeface="Gadugi" panose="020B0502040204020203" pitchFamily="34" charset="0"/>
               </a:rPr>
@@ -15572,7 +13743,7 @@
         <p:spPr>
           <a:xfrm>
             <a:off x="566928" y="960120"/>
-            <a:ext cx="3985386" cy="261610"/>
+            <a:ext cx="4238661" cy="261610"/>
           </a:xfrm>
           <a:prstGeom prst="rect">
             <a:avLst/>
@@ -15593,7 +13764,7 @@
               </a:defRPr>
             </a:pPr>
             <a:r>
-              <a:rPr>
+              <a:rPr b="1" dirty="0">
                 <a:latin typeface="Gadugi" panose="020B0502040204020203" pitchFamily="34" charset="0"/>
                 <a:ea typeface="Gadugi" panose="020B0502040204020203" pitchFamily="34" charset="0"/>
               </a:rPr>
@@ -15611,7 +13782,7 @@
           <p:nvPr>
             <p:extLst>
               <p:ext uri="{D42A27DB-BD31-4B8C-83A1-F6EECF244321}">
-                <p14:modId xmlns:p14="http://schemas.microsoft.com/office/powerpoint/2010/main" val="4020343478"/>
+                <p14:modId xmlns:p14="http://schemas.microsoft.com/office/powerpoint/2010/main" val="3039201738"/>
               </p:ext>
             </p:extLst>
           </p:nvPr>
@@ -15635,7 +13806,7 @@
           <p:nvPr>
             <p:extLst>
               <p:ext uri="{D42A27DB-BD31-4B8C-83A1-F6EECF244321}">
-                <p14:modId xmlns:p14="http://schemas.microsoft.com/office/powerpoint/2010/main" val="4173368374"/>
+                <p14:modId xmlns:p14="http://schemas.microsoft.com/office/powerpoint/2010/main" val="923606192"/>
               </p:ext>
             </p:extLst>
           </p:nvPr>
@@ -15659,7 +13830,7 @@
         <p:spPr>
           <a:xfrm>
             <a:off x="713232" y="5897880"/>
-            <a:ext cx="4612160" cy="230832"/>
+            <a:ext cx="4964821" cy="230832"/>
           </a:xfrm>
           <a:prstGeom prst="rect">
             <a:avLst/>
@@ -15680,7 +13851,7 @@
               </a:defRPr>
             </a:pPr>
             <a:r>
-              <a:rPr>
+              <a:rPr b="1" dirty="0">
                 <a:latin typeface="Gadugi" panose="020B0502040204020203" pitchFamily="34" charset="0"/>
                 <a:ea typeface="Gadugi" panose="020B0502040204020203" pitchFamily="34" charset="0"/>
               </a:rPr>
@@ -15745,7 +13916,7 @@
         <p:spPr>
           <a:xfrm>
             <a:off x="530352" y="6547104"/>
-            <a:ext cx="4208203" cy="215444"/>
+            <a:ext cx="4487126" cy="215444"/>
           </a:xfrm>
           <a:prstGeom prst="rect">
             <a:avLst/>
@@ -15766,7 +13937,7 @@
               </a:defRPr>
             </a:pPr>
             <a:r>
-              <a:rPr>
+              <a:rPr b="1" dirty="0">
                 <a:latin typeface="Gadugi" panose="020B0502040204020203" pitchFamily="34" charset="0"/>
                 <a:ea typeface="Gadugi" panose="020B0502040204020203" pitchFamily="34" charset="0"/>
               </a:rPr>
@@ -15783,8 +13954,8 @@
         </p:nvSpPr>
         <p:spPr>
           <a:xfrm>
-            <a:off x="11372108" y="6528816"/>
-            <a:ext cx="240772" cy="215444"/>
+            <a:off x="11368902" y="6528816"/>
+            <a:ext cx="243978" cy="215444"/>
           </a:xfrm>
           <a:prstGeom prst="rect">
             <a:avLst/>
@@ -15805,7 +13976,7 @@
               </a:defRPr>
             </a:pPr>
             <a:r>
-              <a:rPr>
+              <a:rPr b="1" dirty="0">
                 <a:latin typeface="Gadugi" panose="020B0502040204020203" pitchFamily="34" charset="0"/>
                 <a:ea typeface="Gadugi" panose="020B0502040204020203" pitchFamily="34" charset="0"/>
               </a:rPr>
@@ -15879,7 +14050,7 @@
           <a:lstStyle/>
           <a:p>
             <a:pPr algn="ctr"/>
-            <a:endParaRPr>
+            <a:endParaRPr b="1">
               <a:latin typeface="Gadugi" panose="020B0502040204020203" pitchFamily="34" charset="0"/>
               <a:ea typeface="Gadugi" panose="020B0502040204020203" pitchFamily="34" charset="0"/>
             </a:endParaRPr>
@@ -15940,7 +14111,7 @@
               </a:defRPr>
             </a:pPr>
             <a:r>
-              <a:rPr>
+              <a:rPr b="1">
                 <a:latin typeface="Gadugi" panose="020B0502040204020203" pitchFamily="34" charset="0"/>
                 <a:ea typeface="Gadugi" panose="020B0502040204020203" pitchFamily="34" charset="0"/>
               </a:rPr>
@@ -15958,7 +14129,7 @@
         <p:spPr>
           <a:xfrm>
             <a:off x="566928" y="960120"/>
-            <a:ext cx="2961067" cy="261610"/>
+            <a:ext cx="3156633" cy="261610"/>
           </a:xfrm>
           <a:prstGeom prst="rect">
             <a:avLst/>
@@ -15979,7 +14150,7 @@
               </a:defRPr>
             </a:pPr>
             <a:r>
-              <a:rPr>
+              <a:rPr b="1">
                 <a:latin typeface="Gadugi" panose="020B0502040204020203" pitchFamily="34" charset="0"/>
                 <a:ea typeface="Gadugi" panose="020B0502040204020203" pitchFamily="34" charset="0"/>
               </a:rPr>
@@ -15988,30 +14159,6 @@
           </a:p>
         </p:txBody>
       </p:sp>
-      <p:graphicFrame>
-        <p:nvGraphicFramePr>
-          <p:cNvPr id="6" name="Chart 5"/>
-          <p:cNvGraphicFramePr>
-            <a:graphicFrameLocks noGrp="1"/>
-          </p:cNvGraphicFramePr>
-          <p:nvPr>
-            <p:extLst>
-              <p:ext uri="{D42A27DB-BD31-4B8C-83A1-F6EECF244321}">
-                <p14:modId xmlns:p14="http://schemas.microsoft.com/office/powerpoint/2010/main" val="1298891276"/>
-              </p:ext>
-            </p:extLst>
-          </p:nvPr>
-        </p:nvGraphicFramePr>
-        <p:xfrm>
-          <a:off x="640080" y="1417320"/>
-          <a:ext cx="6675120" cy="4526280"/>
-        </p:xfrm>
-        <a:graphic>
-          <a:graphicData uri="http://schemas.openxmlformats.org/drawingml/2006/chart">
-            <c:chart xmlns:c="http://schemas.openxmlformats.org/drawingml/2006/chart" xmlns:r="http://schemas.openxmlformats.org/officeDocument/2006/relationships" r:id="rId3"/>
-          </a:graphicData>
-        </a:graphic>
-      </p:graphicFrame>
       <p:sp>
         <p:nvSpPr>
           <p:cNvPr id="7" name="Rounded Rectangle 6"/>
@@ -16030,9 +14177,7 @@
             <a:srgbClr val="F4F7FA"/>
           </a:solidFill>
           <a:ln>
-            <a:solidFill>
-              <a:srgbClr val="E0E5EA"/>
-            </a:solidFill>
+            <a:noFill/>
           </a:ln>
         </p:spPr>
         <p:style>
@@ -16054,127 +14199,43 @@
           <a:lstStyle/>
           <a:p>
             <a:pPr algn="ctr"/>
-            <a:endParaRPr>
-              <a:latin typeface="Gadugi" panose="020B0502040204020203" pitchFamily="34" charset="0"/>
-              <a:ea typeface="Gadugi" panose="020B0502040204020203" pitchFamily="34" charset="0"/>
-            </a:endParaRPr>
-          </a:p>
-        </p:txBody>
-      </p:sp>
-      <p:sp>
-        <p:nvSpPr>
-          <p:cNvPr id="8" name="TextBox 7"/>
-          <p:cNvSpPr txBox="1"/>
-          <p:nvPr/>
-        </p:nvSpPr>
-        <p:spPr>
-          <a:xfrm>
-            <a:off x="7899648" y="1700784"/>
-            <a:ext cx="303288" cy="338554"/>
-          </a:xfrm>
-          <a:prstGeom prst="rect">
-            <a:avLst/>
-          </a:prstGeom>
-          <a:noFill/>
-        </p:spPr>
-        <p:txBody>
-          <a:bodyPr wrap="none">
-            <a:spAutoFit/>
-          </a:bodyPr>
-          <a:lstStyle/>
-          <a:p>
-            <a:pPr algn="ctr">
-              <a:defRPr sz="1600" b="1">
+            <a:r>
+              <a:rPr lang="en-IN" b="1" dirty="0">
                 <a:solidFill>
-                  <a:srgbClr val="00A7A4"/>
+                  <a:srgbClr val="00CC99"/>
                 </a:solidFill>
-              </a:defRPr>
-            </a:pPr>
-            <a:r>
-              <a:rPr>
                 <a:latin typeface="Gadugi" panose="020B0502040204020203" pitchFamily="34" charset="0"/>
                 <a:ea typeface="Gadugi" panose="020B0502040204020203" pitchFamily="34" charset="0"/>
               </a:rPr>
-              <a:t>1</a:t>
-            </a:r>
-          </a:p>
-        </p:txBody>
-      </p:sp>
-      <p:sp>
-        <p:nvSpPr>
-          <p:cNvPr id="9" name="TextBox 8"/>
-          <p:cNvSpPr txBox="1"/>
-          <p:nvPr/>
-        </p:nvSpPr>
-        <p:spPr>
-          <a:xfrm>
-            <a:off x="8366760" y="1673352"/>
-            <a:ext cx="992579" cy="261610"/>
-          </a:xfrm>
-          <a:prstGeom prst="rect">
-            <a:avLst/>
-          </a:prstGeom>
-          <a:noFill/>
-        </p:spPr>
-        <p:txBody>
-          <a:bodyPr wrap="none">
-            <a:spAutoFit/>
-          </a:bodyPr>
-          <a:lstStyle/>
-          <a:p>
-            <a:pPr>
-              <a:defRPr sz="1100" b="1">
+              <a:t>1. </a:t>
+            </a:r>
+            <a:r>
+              <a:rPr lang="en-IN" b="1" dirty="0">
                 <a:solidFill>
-                  <a:srgbClr val="232A32"/>
+                  <a:schemeClr val="tx1"/>
                 </a:solidFill>
-              </a:defRPr>
-            </a:pPr>
-            <a:r>
-              <a:rPr>
                 <a:latin typeface="Gadugi" panose="020B0502040204020203" pitchFamily="34" charset="0"/>
                 <a:ea typeface="Gadugi" panose="020B0502040204020203" pitchFamily="34" charset="0"/>
               </a:rPr>
-              <a:t>Tata Motors</a:t>
-            </a:r>
-          </a:p>
-        </p:txBody>
-      </p:sp>
-      <p:sp>
-        <p:nvSpPr>
-          <p:cNvPr id="10" name="TextBox 9"/>
-          <p:cNvSpPr txBox="1"/>
-          <p:nvPr/>
-        </p:nvSpPr>
-        <p:spPr>
-          <a:xfrm>
-            <a:off x="10465301" y="1664207"/>
-            <a:ext cx="736099" cy="323165"/>
-          </a:xfrm>
-          <a:prstGeom prst="rect">
-            <a:avLst/>
-          </a:prstGeom>
-          <a:noFill/>
-        </p:spPr>
-        <p:txBody>
-          <a:bodyPr wrap="none">
-            <a:spAutoFit/>
-          </a:bodyPr>
-          <a:lstStyle/>
-          <a:p>
-            <a:pPr algn="r">
-              <a:defRPr sz="1500" b="1">
+              <a:t>Tata Motors                    </a:t>
+            </a:r>
+            <a:r>
+              <a:rPr lang="en-IN" b="1" dirty="0">
                 <a:solidFill>
-                  <a:srgbClr val="18355E"/>
+                  <a:srgbClr val="000066"/>
                 </a:solidFill>
-              </a:defRPr>
-            </a:pPr>
-            <a:r>
-              <a:rPr dirty="0">
                 <a:latin typeface="Gadugi" panose="020B0502040204020203" pitchFamily="34" charset="0"/>
                 <a:ea typeface="Gadugi" panose="020B0502040204020203" pitchFamily="34" charset="0"/>
               </a:rPr>
               <a:t>36.9%</a:t>
             </a:r>
+            <a:endParaRPr b="1" dirty="0">
+              <a:solidFill>
+                <a:srgbClr val="000066"/>
+              </a:solidFill>
+              <a:latin typeface="Gadugi" panose="020B0502040204020203" pitchFamily="34" charset="0"/>
+              <a:ea typeface="Gadugi" panose="020B0502040204020203" pitchFamily="34" charset="0"/>
+            </a:endParaRPr>
           </a:p>
         </p:txBody>
       </p:sp>
@@ -16196,9 +14257,7 @@
             <a:srgbClr val="F4F7FA"/>
           </a:solidFill>
           <a:ln>
-            <a:solidFill>
-              <a:srgbClr val="E0E5EA"/>
-            </a:solidFill>
+            <a:noFill/>
           </a:ln>
         </p:spPr>
         <p:style>
@@ -16220,122 +14279,31 @@
           <a:lstStyle/>
           <a:p>
             <a:pPr algn="ctr"/>
-            <a:endParaRPr>
-              <a:latin typeface="Gadugi" panose="020B0502040204020203" pitchFamily="34" charset="0"/>
-              <a:ea typeface="Gadugi" panose="020B0502040204020203" pitchFamily="34" charset="0"/>
-            </a:endParaRPr>
-          </a:p>
-        </p:txBody>
-      </p:sp>
-      <p:sp>
-        <p:nvSpPr>
-          <p:cNvPr id="12" name="TextBox 11"/>
-          <p:cNvSpPr txBox="1"/>
-          <p:nvPr/>
-        </p:nvSpPr>
-        <p:spPr>
-          <a:xfrm>
-            <a:off x="7899648" y="2688336"/>
-            <a:ext cx="303288" cy="338554"/>
-          </a:xfrm>
-          <a:prstGeom prst="rect">
-            <a:avLst/>
-          </a:prstGeom>
-          <a:noFill/>
-        </p:spPr>
-        <p:txBody>
-          <a:bodyPr wrap="none">
-            <a:spAutoFit/>
-          </a:bodyPr>
-          <a:lstStyle/>
-          <a:p>
-            <a:pPr algn="ctr">
-              <a:defRPr sz="1600" b="1">
+            <a:r>
+              <a:rPr lang="en-IN" b="1" dirty="0">
                 <a:solidFill>
-                  <a:srgbClr val="00A7A4"/>
+                  <a:srgbClr val="00CC99"/>
                 </a:solidFill>
-              </a:defRPr>
-            </a:pPr>
-            <a:r>
-              <a:rPr>
                 <a:latin typeface="Gadugi" panose="020B0502040204020203" pitchFamily="34" charset="0"/>
                 <a:ea typeface="Gadugi" panose="020B0502040204020203" pitchFamily="34" charset="0"/>
               </a:rPr>
-              <a:t>2</a:t>
-            </a:r>
-          </a:p>
-        </p:txBody>
-      </p:sp>
-      <p:sp>
-        <p:nvSpPr>
-          <p:cNvPr id="13" name="TextBox 12"/>
-          <p:cNvSpPr txBox="1"/>
-          <p:nvPr/>
-        </p:nvSpPr>
-        <p:spPr>
-          <a:xfrm>
-            <a:off x="8366760" y="2660904"/>
-            <a:ext cx="1146468" cy="261610"/>
-          </a:xfrm>
-          <a:prstGeom prst="rect">
-            <a:avLst/>
-          </a:prstGeom>
-          <a:noFill/>
-        </p:spPr>
-        <p:txBody>
-          <a:bodyPr wrap="none">
-            <a:spAutoFit/>
-          </a:bodyPr>
-          <a:lstStyle/>
-          <a:p>
-            <a:pPr>
-              <a:defRPr sz="1100" b="1">
+              <a:t>2. </a:t>
+            </a:r>
+            <a:r>
+              <a:rPr lang="en-IN" b="1" dirty="0">
                 <a:solidFill>
-                  <a:srgbClr val="232A32"/>
+                  <a:schemeClr val="tx1"/>
                 </a:solidFill>
-              </a:defRPr>
-            </a:pPr>
-            <a:r>
-              <a:rPr>
                 <a:latin typeface="Gadugi" panose="020B0502040204020203" pitchFamily="34" charset="0"/>
                 <a:ea typeface="Gadugi" panose="020B0502040204020203" pitchFamily="34" charset="0"/>
               </a:rPr>
-              <a:t>Ashok Leyland</a:t>
-            </a:r>
-          </a:p>
-        </p:txBody>
-      </p:sp>
-      <p:sp>
-        <p:nvSpPr>
-          <p:cNvPr id="14" name="TextBox 13"/>
-          <p:cNvSpPr txBox="1"/>
-          <p:nvPr/>
-        </p:nvSpPr>
-        <p:spPr>
-          <a:xfrm>
-            <a:off x="10465301" y="2651760"/>
-            <a:ext cx="736099" cy="323165"/>
-          </a:xfrm>
-          <a:prstGeom prst="rect">
-            <a:avLst/>
-          </a:prstGeom>
-          <a:noFill/>
-        </p:spPr>
-        <p:txBody>
-          <a:bodyPr wrap="none">
-            <a:spAutoFit/>
-          </a:bodyPr>
-          <a:lstStyle/>
-          <a:p>
-            <a:pPr algn="r">
-              <a:defRPr sz="1500" b="1">
+              <a:t>Ashok Leyland                </a:t>
+            </a:r>
+            <a:r>
+              <a:rPr lang="en-IN" b="1" dirty="0">
                 <a:solidFill>
-                  <a:srgbClr val="18355E"/>
+                  <a:srgbClr val="000066"/>
                 </a:solidFill>
-              </a:defRPr>
-            </a:pPr>
-            <a:r>
-              <a:rPr>
                 <a:latin typeface="Gadugi" panose="020B0502040204020203" pitchFamily="34" charset="0"/>
                 <a:ea typeface="Gadugi" panose="020B0502040204020203" pitchFamily="34" charset="0"/>
               </a:rPr>
@@ -16362,9 +14330,7 @@
             <a:srgbClr val="F4F7FA"/>
           </a:solidFill>
           <a:ln>
-            <a:solidFill>
-              <a:srgbClr val="E0E5EA"/>
-            </a:solidFill>
+            <a:noFill/>
           </a:ln>
         </p:spPr>
         <p:style>
@@ -16386,122 +14352,31 @@
           <a:lstStyle/>
           <a:p>
             <a:pPr algn="ctr"/>
-            <a:endParaRPr>
-              <a:latin typeface="Gadugi" panose="020B0502040204020203" pitchFamily="34" charset="0"/>
-              <a:ea typeface="Gadugi" panose="020B0502040204020203" pitchFamily="34" charset="0"/>
-            </a:endParaRPr>
-          </a:p>
-        </p:txBody>
-      </p:sp>
-      <p:sp>
-        <p:nvSpPr>
-          <p:cNvPr id="16" name="TextBox 15"/>
-          <p:cNvSpPr txBox="1"/>
-          <p:nvPr/>
-        </p:nvSpPr>
-        <p:spPr>
-          <a:xfrm>
-            <a:off x="7899648" y="3675888"/>
-            <a:ext cx="303288" cy="338554"/>
-          </a:xfrm>
-          <a:prstGeom prst="rect">
-            <a:avLst/>
-          </a:prstGeom>
-          <a:noFill/>
-        </p:spPr>
-        <p:txBody>
-          <a:bodyPr wrap="none">
-            <a:spAutoFit/>
-          </a:bodyPr>
-          <a:lstStyle/>
-          <a:p>
-            <a:pPr algn="ctr">
-              <a:defRPr sz="1600" b="1">
+            <a:r>
+              <a:rPr lang="en-IN" b="1" dirty="0">
                 <a:solidFill>
-                  <a:srgbClr val="00A7A4"/>
+                  <a:srgbClr val="00CC99"/>
                 </a:solidFill>
-              </a:defRPr>
-            </a:pPr>
-            <a:r>
-              <a:rPr>
                 <a:latin typeface="Gadugi" panose="020B0502040204020203" pitchFamily="34" charset="0"/>
                 <a:ea typeface="Gadugi" panose="020B0502040204020203" pitchFamily="34" charset="0"/>
               </a:rPr>
-              <a:t>3</a:t>
-            </a:r>
-          </a:p>
-        </p:txBody>
-      </p:sp>
-      <p:sp>
-        <p:nvSpPr>
-          <p:cNvPr id="17" name="TextBox 16"/>
-          <p:cNvSpPr txBox="1"/>
-          <p:nvPr/>
-        </p:nvSpPr>
-        <p:spPr>
-          <a:xfrm>
-            <a:off x="8366760" y="3648456"/>
-            <a:ext cx="1079142" cy="261610"/>
-          </a:xfrm>
-          <a:prstGeom prst="rect">
-            <a:avLst/>
-          </a:prstGeom>
-          <a:noFill/>
-        </p:spPr>
-        <p:txBody>
-          <a:bodyPr wrap="none">
-            <a:spAutoFit/>
-          </a:bodyPr>
-          <a:lstStyle/>
-          <a:p>
-            <a:pPr>
-              <a:defRPr sz="1100" b="1">
+              <a:t>3. </a:t>
+            </a:r>
+            <a:r>
+              <a:rPr lang="en-IN" b="1" dirty="0">
                 <a:solidFill>
-                  <a:srgbClr val="232A32"/>
+                  <a:schemeClr val="tx1"/>
                 </a:solidFill>
-              </a:defRPr>
-            </a:pPr>
-            <a:r>
-              <a:rPr>
                 <a:latin typeface="Gadugi" panose="020B0502040204020203" pitchFamily="34" charset="0"/>
                 <a:ea typeface="Gadugi" panose="020B0502040204020203" pitchFamily="34" charset="0"/>
               </a:rPr>
-              <a:t>Eicher (VECV)</a:t>
-            </a:r>
-          </a:p>
-        </p:txBody>
-      </p:sp>
-      <p:sp>
-        <p:nvSpPr>
-          <p:cNvPr id="18" name="TextBox 17"/>
-          <p:cNvSpPr txBox="1"/>
-          <p:nvPr/>
-        </p:nvSpPr>
-        <p:spPr>
-          <a:xfrm>
-            <a:off x="10465301" y="3639312"/>
-            <a:ext cx="736099" cy="323165"/>
-          </a:xfrm>
-          <a:prstGeom prst="rect">
-            <a:avLst/>
-          </a:prstGeom>
-          <a:noFill/>
-        </p:spPr>
-        <p:txBody>
-          <a:bodyPr wrap="none">
-            <a:spAutoFit/>
-          </a:bodyPr>
-          <a:lstStyle/>
-          <a:p>
-            <a:pPr algn="r">
-              <a:defRPr sz="1500" b="1">
+              <a:t>Eicher (VECV)                  </a:t>
+            </a:r>
+            <a:r>
+              <a:rPr lang="en-IN" b="1" dirty="0">
                 <a:solidFill>
-                  <a:srgbClr val="18355E"/>
+                  <a:srgbClr val="000066"/>
                 </a:solidFill>
-              </a:defRPr>
-            </a:pPr>
-            <a:r>
-              <a:rPr>
                 <a:latin typeface="Gadugi" panose="020B0502040204020203" pitchFamily="34" charset="0"/>
                 <a:ea typeface="Gadugi" panose="020B0502040204020203" pitchFamily="34" charset="0"/>
               </a:rPr>
@@ -16552,122 +14427,41 @@
           <a:lstStyle/>
           <a:p>
             <a:pPr algn="ctr"/>
-            <a:endParaRPr>
-              <a:latin typeface="Gadugi" panose="020B0502040204020203" pitchFamily="34" charset="0"/>
-              <a:ea typeface="Gadugi" panose="020B0502040204020203" pitchFamily="34" charset="0"/>
-            </a:endParaRPr>
-          </a:p>
-        </p:txBody>
-      </p:sp>
-      <p:sp>
-        <p:nvSpPr>
-          <p:cNvPr id="20" name="TextBox 19"/>
-          <p:cNvSpPr txBox="1"/>
-          <p:nvPr/>
-        </p:nvSpPr>
-        <p:spPr>
-          <a:xfrm>
-            <a:off x="7899648" y="4663440"/>
-            <a:ext cx="303288" cy="338554"/>
-          </a:xfrm>
-          <a:prstGeom prst="rect">
-            <a:avLst/>
-          </a:prstGeom>
-          <a:noFill/>
-        </p:spPr>
-        <p:txBody>
-          <a:bodyPr wrap="none">
-            <a:spAutoFit/>
-          </a:bodyPr>
-          <a:lstStyle/>
-          <a:p>
-            <a:pPr algn="ctr">
-              <a:defRPr sz="1600" b="1">
+            <a:r>
+              <a:rPr lang="en-IN" b="1" dirty="0">
                 <a:solidFill>
-                  <a:srgbClr val="00A7A4"/>
+                  <a:srgbClr val="00CC99"/>
                 </a:solidFill>
-              </a:defRPr>
-            </a:pPr>
-            <a:r>
-              <a:rPr>
                 <a:latin typeface="Gadugi" panose="020B0502040204020203" pitchFamily="34" charset="0"/>
                 <a:ea typeface="Gadugi" panose="020B0502040204020203" pitchFamily="34" charset="0"/>
               </a:rPr>
-              <a:t>4</a:t>
-            </a:r>
-          </a:p>
-        </p:txBody>
-      </p:sp>
-      <p:sp>
-        <p:nvSpPr>
-          <p:cNvPr id="21" name="TextBox 20"/>
-          <p:cNvSpPr txBox="1"/>
-          <p:nvPr/>
-        </p:nvSpPr>
-        <p:spPr>
-          <a:xfrm>
-            <a:off x="8366760" y="4636008"/>
-            <a:ext cx="939681" cy="261610"/>
-          </a:xfrm>
-          <a:prstGeom prst="rect">
-            <a:avLst/>
-          </a:prstGeom>
-          <a:noFill/>
-        </p:spPr>
-        <p:txBody>
-          <a:bodyPr wrap="none">
-            <a:spAutoFit/>
-          </a:bodyPr>
-          <a:lstStyle/>
-          <a:p>
-            <a:pPr>
-              <a:defRPr sz="1100" b="1">
+              <a:t>4. </a:t>
+            </a:r>
+            <a:r>
+              <a:rPr lang="en-IN" b="1" dirty="0" err="1">
                 <a:solidFill>
-                  <a:srgbClr val="232A32"/>
+                  <a:schemeClr val="tx1"/>
                 </a:solidFill>
-              </a:defRPr>
-            </a:pPr>
-            <a:r>
-              <a:rPr>
                 <a:latin typeface="Gadugi" panose="020B0502040204020203" pitchFamily="34" charset="0"/>
                 <a:ea typeface="Gadugi" panose="020B0502040204020203" pitchFamily="34" charset="0"/>
               </a:rPr>
-              <a:t>BharatBenz</a:t>
-            </a:r>
-          </a:p>
-        </p:txBody>
-      </p:sp>
-      <p:sp>
-        <p:nvSpPr>
-          <p:cNvPr id="22" name="TextBox 21"/>
-          <p:cNvSpPr txBox="1"/>
-          <p:nvPr/>
-        </p:nvSpPr>
-        <p:spPr>
-          <a:xfrm>
-            <a:off x="10465301" y="4626864"/>
-            <a:ext cx="736099" cy="323165"/>
-          </a:xfrm>
-          <a:prstGeom prst="rect">
-            <a:avLst/>
-          </a:prstGeom>
-          <a:noFill/>
-        </p:spPr>
-        <p:txBody>
-          <a:bodyPr wrap="none">
-            <a:spAutoFit/>
-          </a:bodyPr>
-          <a:lstStyle/>
-          <a:p>
-            <a:pPr algn="r">
-              <a:defRPr sz="1500" b="1">
+              <a:t>Bharatbenz</a:t>
+            </a:r>
+            <a:r>
+              <a:rPr lang="en-IN" b="1" dirty="0">
                 <a:solidFill>
-                  <a:srgbClr val="18355E"/>
+                  <a:schemeClr val="tx1"/>
                 </a:solidFill>
-              </a:defRPr>
-            </a:pPr>
-            <a:r>
-              <a:rPr>
+                <a:latin typeface="Gadugi" panose="020B0502040204020203" pitchFamily="34" charset="0"/>
+                <a:ea typeface="Gadugi" panose="020B0502040204020203" pitchFamily="34" charset="0"/>
+              </a:rPr>
+              <a:t>                      </a:t>
+            </a:r>
+            <a:r>
+              <a:rPr lang="en-IN" b="1" dirty="0">
+                <a:solidFill>
+                  <a:srgbClr val="000066"/>
+                </a:solidFill>
                 <a:latin typeface="Gadugi" panose="020B0502040204020203" pitchFamily="34" charset="0"/>
                 <a:ea typeface="Gadugi" panose="020B0502040204020203" pitchFamily="34" charset="0"/>
               </a:rPr>
@@ -16716,7 +14510,7 @@
           <a:lstStyle/>
           <a:p>
             <a:pPr algn="ctr"/>
-            <a:endParaRPr>
+            <a:endParaRPr b="1">
               <a:latin typeface="Gadugi" panose="020B0502040204020203" pitchFamily="34" charset="0"/>
               <a:ea typeface="Gadugi" panose="020B0502040204020203" pitchFamily="34" charset="0"/>
             </a:endParaRPr>
@@ -16732,7 +14526,7 @@
         <p:spPr>
           <a:xfrm>
             <a:off x="530352" y="6547104"/>
-            <a:ext cx="4208203" cy="215444"/>
+            <a:ext cx="4487126" cy="215444"/>
           </a:xfrm>
           <a:prstGeom prst="rect">
             <a:avLst/>
@@ -16753,7 +14547,7 @@
               </a:defRPr>
             </a:pPr>
             <a:r>
-              <a:rPr>
+              <a:rPr b="1">
                 <a:latin typeface="Gadugi" panose="020B0502040204020203" pitchFamily="34" charset="0"/>
                 <a:ea typeface="Gadugi" panose="020B0502040204020203" pitchFamily="34" charset="0"/>
               </a:rPr>
@@ -16770,8 +14564,8 @@
         </p:nvSpPr>
         <p:spPr>
           <a:xfrm>
-            <a:off x="11372108" y="6528816"/>
-            <a:ext cx="240772" cy="215444"/>
+            <a:off x="11368902" y="6528816"/>
+            <a:ext cx="243978" cy="215444"/>
           </a:xfrm>
           <a:prstGeom prst="rect">
             <a:avLst/>
@@ -16792,7 +14586,7 @@
               </a:defRPr>
             </a:pPr>
             <a:r>
-              <a:rPr>
+              <a:rPr b="1">
                 <a:latin typeface="Gadugi" panose="020B0502040204020203" pitchFamily="34" charset="0"/>
                 <a:ea typeface="Gadugi" panose="020B0502040204020203" pitchFamily="34" charset="0"/>
               </a:rPr>
@@ -16801,6 +14595,36 @@
           </a:p>
         </p:txBody>
       </p:sp>
+      <p:graphicFrame>
+        <p:nvGraphicFramePr>
+          <p:cNvPr id="27" name="Chart 26">
+            <a:extLst>
+              <a:ext uri="{FF2B5EF4-FFF2-40B4-BE49-F238E27FC236}">
+                <a16:creationId xmlns:a16="http://schemas.microsoft.com/office/drawing/2014/main" id="{DE9E911B-EB5F-5D93-7BB1-0734ABBDD0DF}"/>
+              </a:ext>
+            </a:extLst>
+          </p:cNvPr>
+          <p:cNvGraphicFramePr>
+            <a:graphicFrameLocks noGrp="1"/>
+          </p:cNvGraphicFramePr>
+          <p:nvPr>
+            <p:extLst>
+              <p:ext uri="{D42A27DB-BD31-4B8C-83A1-F6EECF244321}">
+                <p14:modId xmlns:p14="http://schemas.microsoft.com/office/powerpoint/2010/main" val="3997487967"/>
+              </p:ext>
+            </p:extLst>
+          </p:nvPr>
+        </p:nvGraphicFramePr>
+        <p:xfrm>
+          <a:off x="566927" y="1563962"/>
+          <a:ext cx="6433947" cy="3776133"/>
+        </p:xfrm>
+        <a:graphic>
+          <a:graphicData uri="http://schemas.openxmlformats.org/drawingml/2006/chart">
+            <c:chart xmlns:c="http://schemas.openxmlformats.org/drawingml/2006/chart" xmlns:r="http://schemas.openxmlformats.org/officeDocument/2006/relationships" r:id="rId3"/>
+          </a:graphicData>
+        </a:graphic>
+      </p:graphicFrame>
     </p:spTree>
   </p:cSld>
   <p:clrMapOvr>
@@ -16984,7 +14808,7 @@
           <p:nvPr>
             <p:extLst>
               <p:ext uri="{D42A27DB-BD31-4B8C-83A1-F6EECF244321}">
-                <p14:modId xmlns:p14="http://schemas.microsoft.com/office/powerpoint/2010/main" val="2669179856"/>
+                <p14:modId xmlns:p14="http://schemas.microsoft.com/office/powerpoint/2010/main" val="1493113067"/>
               </p:ext>
             </p:extLst>
           </p:nvPr>
@@ -17928,7 +15752,7 @@
               </a:defRPr>
             </a:pPr>
             <a:r>
-              <a:rPr b="1">
+              <a:rPr b="1" dirty="0">
                 <a:latin typeface="Gadugi" panose="020B0502040204020203" pitchFamily="34" charset="0"/>
                 <a:ea typeface="Gadugi" panose="020B0502040204020203" pitchFamily="34" charset="0"/>
               </a:rPr>
@@ -18032,7 +15856,7 @@
         <p:spPr>
           <a:xfrm>
             <a:off x="987552" y="1325880"/>
-            <a:ext cx="5928226" cy="453970"/>
+            <a:ext cx="7855292" cy="523220"/>
           </a:xfrm>
           <a:prstGeom prst="rect">
             <a:avLst/>
@@ -18053,7 +15877,7 @@
               </a:defRPr>
             </a:pPr>
             <a:r>
-              <a:rPr b="1">
+              <a:rPr sz="1400" b="1" dirty="0">
                 <a:latin typeface="Gadugi" panose="020B0502040204020203" pitchFamily="34" charset="0"/>
                 <a:ea typeface="Gadugi" panose="020B0502040204020203" pitchFamily="34" charset="0"/>
               </a:rPr>
@@ -18069,7 +15893,7 @@
               </a:defRPr>
             </a:pPr>
             <a:r>
-              <a:rPr b="1">
+              <a:rPr sz="1400" b="1" dirty="0">
                 <a:latin typeface="Gadugi" panose="020B0502040204020203" pitchFamily="34" charset="0"/>
                 <a:ea typeface="Gadugi" panose="020B0502040204020203" pitchFamily="34" charset="0"/>
               </a:rPr>
@@ -18134,7 +15958,7 @@
         <p:spPr>
           <a:xfrm>
             <a:off x="987552" y="2130552"/>
-            <a:ext cx="4525598" cy="453970"/>
+            <a:ext cx="5970481" cy="523220"/>
           </a:xfrm>
           <a:prstGeom prst="rect">
             <a:avLst/>
@@ -18155,7 +15979,7 @@
               </a:defRPr>
             </a:pPr>
             <a:r>
-              <a:rPr b="1">
+              <a:rPr sz="1400" b="1" dirty="0">
                 <a:latin typeface="Gadugi" panose="020B0502040204020203" pitchFamily="34" charset="0"/>
                 <a:ea typeface="Gadugi" panose="020B0502040204020203" pitchFamily="34" charset="0"/>
               </a:rPr>
@@ -18171,11 +15995,25 @@
               </a:defRPr>
             </a:pPr>
             <a:r>
-              <a:rPr b="1">
+              <a:rPr sz="1400" b="1" dirty="0">
                 <a:latin typeface="Gadugi" panose="020B0502040204020203" pitchFamily="34" charset="0"/>
                 <a:ea typeface="Gadugi" panose="020B0502040204020203" pitchFamily="34" charset="0"/>
               </a:rPr>
-              <a:t>Growth ranges from 14.2% for BharatBenz to 36.9% for Tata Motors.</a:t>
+              <a:t>Growth ranges from 14.2% for </a:t>
+            </a:r>
+            <a:r>
+              <a:rPr sz="1400" b="1" dirty="0" err="1">
+                <a:latin typeface="Gadugi" panose="020B0502040204020203" pitchFamily="34" charset="0"/>
+                <a:ea typeface="Gadugi" panose="020B0502040204020203" pitchFamily="34" charset="0"/>
+              </a:rPr>
+              <a:t>BharatBenz</a:t>
+            </a:r>
+            <a:r>
+              <a:rPr sz="1400" b="1" dirty="0">
+                <a:latin typeface="Gadugi" panose="020B0502040204020203" pitchFamily="34" charset="0"/>
+                <a:ea typeface="Gadugi" panose="020B0502040204020203" pitchFamily="34" charset="0"/>
+              </a:rPr>
+              <a:t> to 36.9% for Tata Motors.</a:t>
             </a:r>
           </a:p>
         </p:txBody>
@@ -18236,7 +16074,7 @@
         <p:spPr>
           <a:xfrm>
             <a:off x="987552" y="2935224"/>
-            <a:ext cx="5982728" cy="453970"/>
+            <a:ext cx="7909794" cy="523220"/>
           </a:xfrm>
           <a:prstGeom prst="rect">
             <a:avLst/>
@@ -18257,7 +16095,7 @@
               </a:defRPr>
             </a:pPr>
             <a:r>
-              <a:rPr b="1">
+              <a:rPr sz="1400" b="1" dirty="0">
                 <a:latin typeface="Gadugi" panose="020B0502040204020203" pitchFamily="34" charset="0"/>
                 <a:ea typeface="Gadugi" panose="020B0502040204020203" pitchFamily="34" charset="0"/>
               </a:rPr>
@@ -18273,11 +16111,25 @@
               </a:defRPr>
             </a:pPr>
             <a:r>
-              <a:rPr b="1">
+              <a:rPr sz="1400" b="1" dirty="0">
                 <a:latin typeface="Gadugi" panose="020B0502040204020203" pitchFamily="34" charset="0"/>
                 <a:ea typeface="Gadugi" panose="020B0502040204020203" pitchFamily="34" charset="0"/>
               </a:rPr>
-              <a:t>Tata Motors (+3.29%), Eicher (VECV) (+2.69%) and BharatBenz (+5.58%) were above target.</a:t>
+              <a:t>Tata Motors (+3.29%), Eicher (VECV) (+2.69%) and </a:t>
+            </a:r>
+            <a:r>
+              <a:rPr sz="1400" b="1" dirty="0" err="1">
+                <a:latin typeface="Gadugi" panose="020B0502040204020203" pitchFamily="34" charset="0"/>
+                <a:ea typeface="Gadugi" panose="020B0502040204020203" pitchFamily="34" charset="0"/>
+              </a:rPr>
+              <a:t>BharatBenz</a:t>
+            </a:r>
+            <a:r>
+              <a:rPr sz="1400" b="1" dirty="0">
+                <a:latin typeface="Gadugi" panose="020B0502040204020203" pitchFamily="34" charset="0"/>
+                <a:ea typeface="Gadugi" panose="020B0502040204020203" pitchFamily="34" charset="0"/>
+              </a:rPr>
+              <a:t> (+5.58%) were above target.</a:t>
             </a:r>
           </a:p>
         </p:txBody>
@@ -18338,7 +16190,7 @@
         <p:spPr>
           <a:xfrm>
             <a:off x="987552" y="3739896"/>
-            <a:ext cx="4112023" cy="453970"/>
+            <a:ext cx="5420074" cy="523220"/>
           </a:xfrm>
           <a:prstGeom prst="rect">
             <a:avLst/>
@@ -18359,7 +16211,7 @@
               </a:defRPr>
             </a:pPr>
             <a:r>
-              <a:rPr b="1">
+              <a:rPr sz="1400" b="1">
                 <a:latin typeface="Gadugi" panose="020B0502040204020203" pitchFamily="34" charset="0"/>
                 <a:ea typeface="Gadugi" panose="020B0502040204020203" pitchFamily="34" charset="0"/>
               </a:rPr>
@@ -18375,7 +16227,7 @@
               </a:defRPr>
             </a:pPr>
             <a:r>
-              <a:rPr b="1">
+              <a:rPr sz="1400" b="1">
                 <a:latin typeface="Gadugi" panose="020B0502040204020203" pitchFamily="34" charset="0"/>
                 <a:ea typeface="Gadugi" panose="020B0502040204020203" pitchFamily="34" charset="0"/>
               </a:rPr>
@@ -18440,7 +16292,7 @@
         <p:spPr>
           <a:xfrm>
             <a:off x="987552" y="4544568"/>
-            <a:ext cx="6017994" cy="453970"/>
+            <a:ext cx="7955961" cy="523220"/>
           </a:xfrm>
           <a:prstGeom prst="rect">
             <a:avLst/>
@@ -18461,7 +16313,7 @@
               </a:defRPr>
             </a:pPr>
             <a:r>
-              <a:rPr b="1">
+              <a:rPr sz="1400" b="1">
                 <a:latin typeface="Gadugi" panose="020B0502040204020203" pitchFamily="34" charset="0"/>
                 <a:ea typeface="Gadugi" panose="020B0502040204020203" pitchFamily="34" charset="0"/>
               </a:rPr>
@@ -18477,7 +16329,7 @@
               </a:defRPr>
             </a:pPr>
             <a:r>
-              <a:rPr b="1">
+              <a:rPr sz="1400" b="1">
                 <a:latin typeface="Gadugi" panose="020B0502040204020203" pitchFamily="34" charset="0"/>
                 <a:ea typeface="Gadugi" panose="020B0502040204020203" pitchFamily="34" charset="0"/>
               </a:rPr>
@@ -18542,7 +16394,7 @@
         <p:spPr>
           <a:xfrm>
             <a:off x="987552" y="5349240"/>
-            <a:ext cx="6014788" cy="453970"/>
+            <a:ext cx="7956730" cy="523220"/>
           </a:xfrm>
           <a:prstGeom prst="rect">
             <a:avLst/>
@@ -18563,7 +16415,7 @@
               </a:defRPr>
             </a:pPr>
             <a:r>
-              <a:rPr b="1">
+              <a:rPr sz="1400" b="1">
                 <a:latin typeface="Gadugi" panose="020B0502040204020203" pitchFamily="34" charset="0"/>
                 <a:ea typeface="Gadugi" panose="020B0502040204020203" pitchFamily="34" charset="0"/>
               </a:rPr>
@@ -18579,7 +16431,7 @@
               </a:defRPr>
             </a:pPr>
             <a:r>
-              <a:rPr b="1">
+              <a:rPr sz="1400" b="1">
                 <a:latin typeface="Gadugi" panose="020B0502040204020203" pitchFamily="34" charset="0"/>
                 <a:ea typeface="Gadugi" panose="020B0502040204020203" pitchFamily="34" charset="0"/>
               </a:rPr>
@@ -18839,7 +16691,7 @@
               </a:defRPr>
             </a:pPr>
             <a:r>
-              <a:rPr b="1">
+              <a:rPr b="1" dirty="0">
                 <a:latin typeface="Gadugi" panose="020B0502040204020203" pitchFamily="34" charset="0"/>
                 <a:ea typeface="Gadugi" panose="020B0502040204020203" pitchFamily="34" charset="0"/>
               </a:rPr>
@@ -18857,7 +16709,7 @@
         <p:spPr>
           <a:xfrm>
             <a:off x="566928" y="960120"/>
-            <a:ext cx="3571812" cy="261610"/>
+            <a:ext cx="6330323" cy="400110"/>
           </a:xfrm>
           <a:prstGeom prst="rect">
             <a:avLst/>
@@ -18878,7 +16730,7 @@
               </a:defRPr>
             </a:pPr>
             <a:r>
-              <a:rPr b="1">
+              <a:rPr sz="2000" b="1" dirty="0">
                 <a:latin typeface="Gadugi" panose="020B0502040204020203" pitchFamily="34" charset="0"/>
                 <a:ea typeface="Gadugi" panose="020B0502040204020203" pitchFamily="34" charset="0"/>
               </a:rPr>
@@ -18896,7 +16748,7 @@
         <p:spPr>
           <a:xfrm>
             <a:off x="685800" y="1371600"/>
-            <a:ext cx="859531" cy="261610"/>
+            <a:ext cx="1045479" cy="307777"/>
           </a:xfrm>
           <a:prstGeom prst="rect">
             <a:avLst/>
@@ -18917,7 +16769,7 @@
               </a:defRPr>
             </a:pPr>
             <a:r>
-              <a:rPr b="1">
+              <a:rPr sz="1400" b="1" dirty="0">
                 <a:latin typeface="Gadugi" panose="020B0502040204020203" pitchFamily="34" charset="0"/>
                 <a:ea typeface="Gadugi" panose="020B0502040204020203" pitchFamily="34" charset="0"/>
               </a:rPr>
@@ -18935,7 +16787,7 @@
         <p:spPr>
           <a:xfrm>
             <a:off x="2971800" y="1371600"/>
-            <a:ext cx="2890535" cy="253916"/>
+            <a:ext cx="3800207" cy="307777"/>
           </a:xfrm>
           <a:prstGeom prst="rect">
             <a:avLst/>
@@ -18956,7 +16808,7 @@
               </a:defRPr>
             </a:pPr>
             <a:r>
-              <a:rPr b="1">
+              <a:rPr sz="1400" b="1" dirty="0">
                 <a:latin typeface="Gadugi" panose="020B0502040204020203" pitchFamily="34" charset="0"/>
                 <a:ea typeface="Gadugi" panose="020B0502040204020203" pitchFamily="34" charset="0"/>
               </a:rPr>
@@ -18974,7 +16826,7 @@
         <p:spPr>
           <a:xfrm>
             <a:off x="685800" y="1938528"/>
-            <a:ext cx="449162" cy="261610"/>
+            <a:ext cx="522900" cy="307777"/>
           </a:xfrm>
           <a:prstGeom prst="rect">
             <a:avLst/>
@@ -18995,7 +16847,7 @@
               </a:defRPr>
             </a:pPr>
             <a:r>
-              <a:rPr b="1">
+              <a:rPr sz="1400" b="1">
                 <a:latin typeface="Gadugi" panose="020B0502040204020203" pitchFamily="34" charset="0"/>
                 <a:ea typeface="Gadugi" panose="020B0502040204020203" pitchFamily="34" charset="0"/>
               </a:rPr>
@@ -19013,7 +16865,7 @@
         <p:spPr>
           <a:xfrm>
             <a:off x="2971800" y="1938528"/>
-            <a:ext cx="2696572" cy="253916"/>
+            <a:ext cx="3541162" cy="307777"/>
           </a:xfrm>
           <a:prstGeom prst="rect">
             <a:avLst/>
@@ -19034,7 +16886,7 @@
               </a:defRPr>
             </a:pPr>
             <a:r>
-              <a:rPr b="1">
+              <a:rPr sz="1400" b="1" dirty="0">
                 <a:latin typeface="Gadugi" panose="020B0502040204020203" pitchFamily="34" charset="0"/>
                 <a:ea typeface="Gadugi" panose="020B0502040204020203" pitchFamily="34" charset="0"/>
               </a:rPr>
@@ -19052,7 +16904,7 @@
         <p:spPr>
           <a:xfrm>
             <a:off x="685800" y="2505456"/>
-            <a:ext cx="1132041" cy="261610"/>
+            <a:ext cx="1370953" cy="307777"/>
           </a:xfrm>
           <a:prstGeom prst="rect">
             <a:avLst/>
@@ -19073,7 +16925,7 @@
               </a:defRPr>
             </a:pPr>
             <a:r>
-              <a:rPr b="1">
+              <a:rPr sz="1400" b="1" dirty="0">
                 <a:latin typeface="Gadugi" panose="020B0502040204020203" pitchFamily="34" charset="0"/>
                 <a:ea typeface="Gadugi" panose="020B0502040204020203" pitchFamily="34" charset="0"/>
               </a:rPr>
@@ -19091,7 +16943,7 @@
         <p:spPr>
           <a:xfrm>
             <a:off x="2971800" y="2505456"/>
-            <a:ext cx="3300904" cy="253916"/>
+            <a:ext cx="4350422" cy="307777"/>
           </a:xfrm>
           <a:prstGeom prst="rect">
             <a:avLst/>
@@ -19112,7 +16964,7 @@
               </a:defRPr>
             </a:pPr>
             <a:r>
-              <a:rPr b="1">
+              <a:rPr sz="1400" b="1">
                 <a:latin typeface="Gadugi" panose="020B0502040204020203" pitchFamily="34" charset="0"/>
                 <a:ea typeface="Gadugi" panose="020B0502040204020203" pitchFamily="34" charset="0"/>
               </a:rPr>
@@ -19130,7 +16982,7 @@
         <p:spPr>
           <a:xfrm>
             <a:off x="685800" y="3072384"/>
-            <a:ext cx="1225015" cy="261610"/>
+            <a:ext cx="1491370" cy="307777"/>
           </a:xfrm>
           <a:prstGeom prst="rect">
             <a:avLst/>
@@ -19151,7 +17003,7 @@
               </a:defRPr>
             </a:pPr>
             <a:r>
-              <a:rPr b="1">
+              <a:rPr sz="1400" b="1" dirty="0">
                 <a:latin typeface="Gadugi" panose="020B0502040204020203" pitchFamily="34" charset="0"/>
                 <a:ea typeface="Gadugi" panose="020B0502040204020203" pitchFamily="34" charset="0"/>
               </a:rPr>
@@ -19169,7 +17021,7 @@
         <p:spPr>
           <a:xfrm>
             <a:off x="2971800" y="3072384"/>
-            <a:ext cx="1835759" cy="253916"/>
+            <a:ext cx="2390078" cy="307777"/>
           </a:xfrm>
           <a:prstGeom prst="rect">
             <a:avLst/>
@@ -19190,7 +17042,7 @@
               </a:defRPr>
             </a:pPr>
             <a:r>
-              <a:rPr b="1">
+              <a:rPr sz="1400" b="1">
                 <a:latin typeface="Gadugi" panose="020B0502040204020203" pitchFamily="34" charset="0"/>
                 <a:ea typeface="Gadugi" panose="020B0502040204020203" pitchFamily="34" charset="0"/>
               </a:rPr>
@@ -19208,7 +17060,7 @@
         <p:spPr>
           <a:xfrm>
             <a:off x="685800" y="3639312"/>
-            <a:ext cx="1362874" cy="261610"/>
+            <a:ext cx="1670842" cy="307777"/>
           </a:xfrm>
           <a:prstGeom prst="rect">
             <a:avLst/>
@@ -19229,7 +17081,7 @@
               </a:defRPr>
             </a:pPr>
             <a:r>
-              <a:rPr b="1">
+              <a:rPr sz="1400" b="1">
                 <a:latin typeface="Gadugi" panose="020B0502040204020203" pitchFamily="34" charset="0"/>
                 <a:ea typeface="Gadugi" panose="020B0502040204020203" pitchFamily="34" charset="0"/>
               </a:rPr>
@@ -19247,7 +17099,7 @@
         <p:spPr>
           <a:xfrm>
             <a:off x="2971800" y="3639312"/>
-            <a:ext cx="3586238" cy="253916"/>
+            <a:ext cx="4693016" cy="307777"/>
           </a:xfrm>
           <a:prstGeom prst="rect">
             <a:avLst/>
@@ -19268,7 +17120,7 @@
               </a:defRPr>
             </a:pPr>
             <a:r>
-              <a:rPr b="1">
+              <a:rPr sz="1400" b="1">
                 <a:latin typeface="Gadugi" panose="020B0502040204020203" pitchFamily="34" charset="0"/>
                 <a:ea typeface="Gadugi" panose="020B0502040204020203" pitchFamily="34" charset="0"/>
               </a:rPr>
@@ -19286,7 +17138,7 @@
         <p:spPr>
           <a:xfrm>
             <a:off x="685800" y="4206240"/>
-            <a:ext cx="1582484" cy="261610"/>
+            <a:ext cx="1944122" cy="307777"/>
           </a:xfrm>
           <a:prstGeom prst="rect">
             <a:avLst/>
@@ -19307,7 +17159,7 @@
               </a:defRPr>
             </a:pPr>
             <a:r>
-              <a:rPr b="1">
+              <a:rPr sz="1400" b="1">
                 <a:latin typeface="Gadugi" panose="020B0502040204020203" pitchFamily="34" charset="0"/>
                 <a:ea typeface="Gadugi" panose="020B0502040204020203" pitchFamily="34" charset="0"/>
               </a:rPr>
@@ -19325,7 +17177,7 @@
         <p:spPr>
           <a:xfrm>
             <a:off x="2971800" y="4206240"/>
-            <a:ext cx="4410182" cy="253916"/>
+            <a:ext cx="5801973" cy="307777"/>
           </a:xfrm>
           <a:prstGeom prst="rect">
             <a:avLst/>
@@ -19346,7 +17198,7 @@
               </a:defRPr>
             </a:pPr>
             <a:r>
-              <a:rPr b="1">
+              <a:rPr sz="1400" b="1">
                 <a:latin typeface="Gadugi" panose="020B0502040204020203" pitchFamily="34" charset="0"/>
                 <a:ea typeface="Gadugi" panose="020B0502040204020203" pitchFamily="34" charset="0"/>
               </a:rPr>
@@ -19364,7 +17216,7 @@
         <p:spPr>
           <a:xfrm>
             <a:off x="685800" y="4773168"/>
-            <a:ext cx="1649811" cy="261610"/>
+            <a:ext cx="2042419" cy="307777"/>
           </a:xfrm>
           <a:prstGeom prst="rect">
             <a:avLst/>
@@ -19385,7 +17237,7 @@
               </a:defRPr>
             </a:pPr>
             <a:r>
-              <a:rPr b="1">
+              <a:rPr sz="1400" b="1">
                 <a:latin typeface="Gadugi" panose="020B0502040204020203" pitchFamily="34" charset="0"/>
                 <a:ea typeface="Gadugi" panose="020B0502040204020203" pitchFamily="34" charset="0"/>
               </a:rPr>
@@ -19403,7 +17255,7 @@
         <p:spPr>
           <a:xfrm>
             <a:off x="2971800" y="4773168"/>
-            <a:ext cx="3828292" cy="253916"/>
+            <a:ext cx="5037405" cy="307777"/>
           </a:xfrm>
           <a:prstGeom prst="rect">
             <a:avLst/>
@@ -19424,7 +17276,7 @@
               </a:defRPr>
             </a:pPr>
             <a:r>
-              <a:rPr b="1">
+              <a:rPr sz="1400" b="1">
                 <a:latin typeface="Gadugi" panose="020B0502040204020203" pitchFamily="34" charset="0"/>
                 <a:ea typeface="Gadugi" panose="020B0502040204020203" pitchFamily="34" charset="0"/>
               </a:rPr>
@@ -19442,7 +17294,7 @@
         <p:spPr>
           <a:xfrm>
             <a:off x="685800" y="5340096"/>
-            <a:ext cx="1850186" cy="261610"/>
+            <a:ext cx="2301399" cy="307777"/>
           </a:xfrm>
           <a:prstGeom prst="rect">
             <a:avLst/>
@@ -19463,7 +17315,7 @@
               </a:defRPr>
             </a:pPr>
             <a:r>
-              <a:rPr b="1">
+              <a:rPr sz="1400" b="1">
                 <a:latin typeface="Gadugi" panose="020B0502040204020203" pitchFamily="34" charset="0"/>
                 <a:ea typeface="Gadugi" panose="020B0502040204020203" pitchFamily="34" charset="0"/>
               </a:rPr>
@@ -19481,7 +17333,7 @@
         <p:spPr>
           <a:xfrm>
             <a:off x="2971800" y="5340096"/>
-            <a:ext cx="6638356" cy="253916"/>
+            <a:ext cx="8788496" cy="307777"/>
           </a:xfrm>
           <a:prstGeom prst="rect">
             <a:avLst/>
@@ -19502,7 +17354,7 @@
               </a:defRPr>
             </a:pPr>
             <a:r>
-              <a:rPr b="1">
+              <a:rPr sz="1400" b="1" dirty="0">
                 <a:latin typeface="Gadugi" panose="020B0502040204020203" pitchFamily="34" charset="0"/>
                 <a:ea typeface="Gadugi" panose="020B0502040204020203" pitchFamily="34" charset="0"/>
               </a:rPr>
@@ -19588,7 +17440,7 @@
               </a:defRPr>
             </a:pPr>
             <a:r>
-              <a:rPr b="1">
+              <a:rPr b="1" dirty="0">
                 <a:latin typeface="Gadugi" panose="020B0502040204020203" pitchFamily="34" charset="0"/>
                 <a:ea typeface="Gadugi" panose="020B0502040204020203" pitchFamily="34" charset="0"/>
               </a:rPr>
